--- a/Apresentação - Projeto 02.pptx
+++ b/Apresentação - Projeto 02.pptx
@@ -10,11 +10,16 @@
     <p:sldId id="262" r:id="rId4"/>
     <p:sldId id="269" r:id="rId5"/>
     <p:sldId id="263" r:id="rId6"/>
-    <p:sldId id="264" r:id="rId7"/>
-    <p:sldId id="265" r:id="rId8"/>
-    <p:sldId id="266" r:id="rId9"/>
-    <p:sldId id="267" r:id="rId10"/>
-    <p:sldId id="268" r:id="rId11"/>
+    <p:sldId id="275" r:id="rId7"/>
+    <p:sldId id="274" r:id="rId8"/>
+    <p:sldId id="265" r:id="rId9"/>
+    <p:sldId id="270" r:id="rId10"/>
+    <p:sldId id="272" r:id="rId11"/>
+    <p:sldId id="271" r:id="rId12"/>
+    <p:sldId id="273" r:id="rId13"/>
+    <p:sldId id="266" r:id="rId14"/>
+    <p:sldId id="267" r:id="rId15"/>
+    <p:sldId id="268" r:id="rId16"/>
   </p:sldIdLst>
   <p:sldSz cx="12192000" cy="6858000"/>
   <p:notesSz cx="6858000" cy="9144000"/>
@@ -268,7 +273,7 @@
           <a:p>
             <a:fld id="{E3706E84-BC9D-4EE9-9198-D52ADEF0FD9C}" type="datetimeFigureOut">
               <a:rPr lang="pt-BR" smtClean="0"/>
-              <a:t>28/03/2026</a:t>
+              <a:t>06/04/2026</a:t>
             </a:fld>
             <a:endParaRPr lang="pt-BR"/>
           </a:p>
@@ -466,7 +471,7 @@
           <a:p>
             <a:fld id="{E3706E84-BC9D-4EE9-9198-D52ADEF0FD9C}" type="datetimeFigureOut">
               <a:rPr lang="pt-BR" smtClean="0"/>
-              <a:t>28/03/2026</a:t>
+              <a:t>06/04/2026</a:t>
             </a:fld>
             <a:endParaRPr lang="pt-BR"/>
           </a:p>
@@ -674,7 +679,7 @@
           <a:p>
             <a:fld id="{E3706E84-BC9D-4EE9-9198-D52ADEF0FD9C}" type="datetimeFigureOut">
               <a:rPr lang="pt-BR" smtClean="0"/>
-              <a:t>28/03/2026</a:t>
+              <a:t>06/04/2026</a:t>
             </a:fld>
             <a:endParaRPr lang="pt-BR"/>
           </a:p>
@@ -872,7 +877,7 @@
           <a:p>
             <a:fld id="{E3706E84-BC9D-4EE9-9198-D52ADEF0FD9C}" type="datetimeFigureOut">
               <a:rPr lang="pt-BR" smtClean="0"/>
-              <a:t>28/03/2026</a:t>
+              <a:t>06/04/2026</a:t>
             </a:fld>
             <a:endParaRPr lang="pt-BR"/>
           </a:p>
@@ -1147,7 +1152,7 @@
           <a:p>
             <a:fld id="{E3706E84-BC9D-4EE9-9198-D52ADEF0FD9C}" type="datetimeFigureOut">
               <a:rPr lang="pt-BR" smtClean="0"/>
-              <a:t>28/03/2026</a:t>
+              <a:t>06/04/2026</a:t>
             </a:fld>
             <a:endParaRPr lang="pt-BR"/>
           </a:p>
@@ -1412,7 +1417,7 @@
           <a:p>
             <a:fld id="{E3706E84-BC9D-4EE9-9198-D52ADEF0FD9C}" type="datetimeFigureOut">
               <a:rPr lang="pt-BR" smtClean="0"/>
-              <a:t>28/03/2026</a:t>
+              <a:t>06/04/2026</a:t>
             </a:fld>
             <a:endParaRPr lang="pt-BR"/>
           </a:p>
@@ -1824,7 +1829,7 @@
           <a:p>
             <a:fld id="{E3706E84-BC9D-4EE9-9198-D52ADEF0FD9C}" type="datetimeFigureOut">
               <a:rPr lang="pt-BR" smtClean="0"/>
-              <a:t>28/03/2026</a:t>
+              <a:t>06/04/2026</a:t>
             </a:fld>
             <a:endParaRPr lang="pt-BR"/>
           </a:p>
@@ -1965,7 +1970,7 @@
           <a:p>
             <a:fld id="{E3706E84-BC9D-4EE9-9198-D52ADEF0FD9C}" type="datetimeFigureOut">
               <a:rPr lang="pt-BR" smtClean="0"/>
-              <a:t>28/03/2026</a:t>
+              <a:t>06/04/2026</a:t>
             </a:fld>
             <a:endParaRPr lang="pt-BR"/>
           </a:p>
@@ -2078,7 +2083,7 @@
           <a:p>
             <a:fld id="{E3706E84-BC9D-4EE9-9198-D52ADEF0FD9C}" type="datetimeFigureOut">
               <a:rPr lang="pt-BR" smtClean="0"/>
-              <a:t>28/03/2026</a:t>
+              <a:t>06/04/2026</a:t>
             </a:fld>
             <a:endParaRPr lang="pt-BR"/>
           </a:p>
@@ -2389,7 +2394,7 @@
           <a:p>
             <a:fld id="{E3706E84-BC9D-4EE9-9198-D52ADEF0FD9C}" type="datetimeFigureOut">
               <a:rPr lang="pt-BR" smtClean="0"/>
-              <a:t>28/03/2026</a:t>
+              <a:t>06/04/2026</a:t>
             </a:fld>
             <a:endParaRPr lang="pt-BR"/>
           </a:p>
@@ -2677,7 +2682,7 @@
           <a:p>
             <a:fld id="{E3706E84-BC9D-4EE9-9198-D52ADEF0FD9C}" type="datetimeFigureOut">
               <a:rPr lang="pt-BR" smtClean="0"/>
-              <a:t>28/03/2026</a:t>
+              <a:t>06/04/2026</a:t>
             </a:fld>
             <a:endParaRPr lang="pt-BR"/>
           </a:p>
@@ -2918,7 +2923,7 @@
           <a:p>
             <a:fld id="{E3706E84-BC9D-4EE9-9198-D52ADEF0FD9C}" type="datetimeFigureOut">
               <a:rPr lang="pt-BR" smtClean="0"/>
-              <a:t>28/03/2026</a:t>
+              <a:t>06/04/2026</a:t>
             </a:fld>
             <a:endParaRPr lang="pt-BR"/>
           </a:p>
@@ -3499,148 +3504,6 @@
           </p:txBody>
         </p:sp>
       </p:grpSp>
-      <p:sp>
-        <p:nvSpPr>
-          <p:cNvPr id="2" name="Título 1">
-            <a:extLst>
-              <a:ext uri="{FF2B5EF4-FFF2-40B4-BE49-F238E27FC236}">
-                <a16:creationId xmlns:a16="http://schemas.microsoft.com/office/drawing/2014/main" id="{BD624AB8-D923-33C4-9FEE-3D9225E7D8F1}"/>
-              </a:ext>
-            </a:extLst>
-          </p:cNvPr>
-          <p:cNvSpPr>
-            <a:spLocks noGrp="1"/>
-          </p:cNvSpPr>
-          <p:nvPr>
-            <p:ph type="ctrTitle"/>
-          </p:nvPr>
-        </p:nvSpPr>
-        <p:spPr>
-          <a:xfrm>
-            <a:off x="1442906" y="1566979"/>
-            <a:ext cx="9949344" cy="2501681"/>
-          </a:xfrm>
-          <a:ln w="57150">
-            <a:solidFill>
-              <a:schemeClr val="tx1"/>
-            </a:solidFill>
-          </a:ln>
-        </p:spPr>
-        <p:txBody>
-          <a:bodyPr>
-            <a:normAutofit/>
-          </a:bodyPr>
-          <a:lstStyle/>
-          <a:p>
-            <a:r>
-              <a:rPr lang="pt-BR" sz="4800" b="1" dirty="0"/>
-              <a:t>Projeto 2 – Comparação entre Árvores</a:t>
-            </a:r>
-            <a:br>
-              <a:rPr lang="pt-BR" sz="4800" dirty="0"/>
-            </a:br>
-            <a:r>
-              <a:rPr lang="pt-BR" sz="2000" dirty="0"/>
-              <a:t>Mestrado Profissional em Computação Aplicada – Mackenzie</a:t>
-            </a:r>
-            <a:br>
-              <a:rPr lang="pt-BR" sz="2000" dirty="0"/>
-            </a:br>
-            <a:r>
-              <a:rPr lang="pt-BR" sz="2000" dirty="0"/>
-              <a:t>Disciplina – Algoritmos e Programação</a:t>
-            </a:r>
-            <a:br>
-              <a:rPr lang="pt-BR" sz="2000" dirty="0"/>
-            </a:br>
-            <a:endParaRPr lang="pt-BR" sz="4800" dirty="0"/>
-          </a:p>
-        </p:txBody>
-      </p:sp>
-      <p:sp>
-        <p:nvSpPr>
-          <p:cNvPr id="3" name="Subtítulo 2">
-            <a:extLst>
-              <a:ext uri="{FF2B5EF4-FFF2-40B4-BE49-F238E27FC236}">
-                <a16:creationId xmlns:a16="http://schemas.microsoft.com/office/drawing/2014/main" id="{1213BA62-DB81-8DFF-EB44-42442F75D481}"/>
-              </a:ext>
-            </a:extLst>
-          </p:cNvPr>
-          <p:cNvSpPr>
-            <a:spLocks noGrp="1"/>
-          </p:cNvSpPr>
-          <p:nvPr>
-            <p:ph type="subTitle" idx="1"/>
-          </p:nvPr>
-        </p:nvSpPr>
-        <p:spPr>
-          <a:xfrm>
-            <a:off x="1079384" y="4463140"/>
-            <a:ext cx="9144000" cy="1655762"/>
-          </a:xfrm>
-        </p:spPr>
-        <p:txBody>
-          <a:bodyPr>
-            <a:normAutofit lnSpcReduction="10000"/>
-          </a:bodyPr>
-          <a:lstStyle/>
-          <a:p>
-            <a:pPr algn="l"/>
-            <a:r>
-              <a:rPr lang="pt-BR" b="1" dirty="0"/>
-              <a:t>Professora:</a:t>
-            </a:r>
-            <a:r>
-              <a:rPr lang="pt-BR" dirty="0"/>
-              <a:t> Dra. Valéria </a:t>
-            </a:r>
-            <a:r>
-              <a:rPr lang="pt-BR" dirty="0" err="1"/>
-              <a:t>Farinazzo</a:t>
-            </a:r>
-            <a:r>
-              <a:rPr lang="pt-BR" dirty="0"/>
-              <a:t> Martins</a:t>
-            </a:r>
-          </a:p>
-          <a:p>
-            <a:pPr algn="l"/>
-            <a:r>
-              <a:rPr lang="pt-BR" b="1" dirty="0"/>
-              <a:t>Aluno:</a:t>
-            </a:r>
-            <a:r>
-              <a:rPr lang="pt-BR" dirty="0"/>
-              <a:t> Cândido Francisco Moreira</a:t>
-            </a:r>
-          </a:p>
-          <a:p>
-            <a:pPr algn="l"/>
-            <a:r>
-              <a:rPr lang="pt-BR" b="1" dirty="0"/>
-              <a:t>RA: </a:t>
-            </a:r>
-            <a:r>
-              <a:rPr lang="pt-BR" dirty="0"/>
-              <a:t>10779363</a:t>
-            </a:r>
-            <a:endParaRPr lang="pt-BR" b="0" dirty="0">
-              <a:effectLst/>
-            </a:endParaRPr>
-          </a:p>
-          <a:p>
-            <a:pPr algn="l"/>
-            <a:r>
-              <a:rPr lang="pt-BR" b="1" dirty="0"/>
-              <a:t>Período:</a:t>
-            </a:r>
-            <a:r>
-              <a:rPr lang="pt-BR" dirty="0"/>
-              <a:t> 1º Semestre de 2026</a:t>
-            </a:r>
-          </a:p>
-        </p:txBody>
-      </p:sp>
       <p:pic>
         <p:nvPicPr>
           <p:cNvPr id="4" name="Imagem 3">
@@ -3671,6 +3534,136 @@
           </a:prstGeom>
         </p:spPr>
       </p:pic>
+      <p:sp>
+        <p:nvSpPr>
+          <p:cNvPr id="2" name="Título 1">
+            <a:extLst>
+              <a:ext uri="{FF2B5EF4-FFF2-40B4-BE49-F238E27FC236}">
+                <a16:creationId xmlns:a16="http://schemas.microsoft.com/office/drawing/2014/main" id="{BD624AB8-D923-33C4-9FEE-3D9225E7D8F1}"/>
+              </a:ext>
+            </a:extLst>
+          </p:cNvPr>
+          <p:cNvSpPr>
+            <a:spLocks noGrp="1"/>
+          </p:cNvSpPr>
+          <p:nvPr>
+            <p:ph type="ctrTitle"/>
+          </p:nvPr>
+        </p:nvSpPr>
+        <p:spPr>
+          <a:xfrm>
+            <a:off x="459079" y="1375084"/>
+            <a:ext cx="11506875" cy="3231598"/>
+          </a:xfrm>
+          <a:ln w="57150">
+            <a:solidFill>
+              <a:schemeClr val="tx1"/>
+            </a:solidFill>
+          </a:ln>
+        </p:spPr>
+        <p:txBody>
+          <a:bodyPr>
+            <a:normAutofit/>
+          </a:bodyPr>
+          <a:lstStyle/>
+          <a:p>
+            <a:br>
+              <a:rPr lang="pt-BR" sz="4800" dirty="0"/>
+            </a:br>
+            <a:br>
+              <a:rPr lang="pt-BR" sz="4800" dirty="0"/>
+            </a:br>
+            <a:br>
+              <a:rPr lang="pt-BR" sz="2000" dirty="0"/>
+            </a:br>
+            <a:endParaRPr lang="pt-BR" sz="4800" dirty="0"/>
+          </a:p>
+        </p:txBody>
+      </p:sp>
+      <p:sp>
+        <p:nvSpPr>
+          <p:cNvPr id="3" name="Subtítulo 2">
+            <a:extLst>
+              <a:ext uri="{FF2B5EF4-FFF2-40B4-BE49-F238E27FC236}">
+                <a16:creationId xmlns:a16="http://schemas.microsoft.com/office/drawing/2014/main" id="{1213BA62-DB81-8DFF-EB44-42442F75D481}"/>
+              </a:ext>
+            </a:extLst>
+          </p:cNvPr>
+          <p:cNvSpPr>
+            <a:spLocks noGrp="1"/>
+          </p:cNvSpPr>
+          <p:nvPr>
+            <p:ph type="subTitle" idx="1"/>
+          </p:nvPr>
+        </p:nvSpPr>
+        <p:spPr>
+          <a:xfrm>
+            <a:off x="459079" y="4826133"/>
+            <a:ext cx="9144000" cy="1655762"/>
+          </a:xfrm>
+        </p:spPr>
+        <p:txBody>
+          <a:bodyPr>
+            <a:normAutofit/>
+          </a:bodyPr>
+          <a:lstStyle/>
+          <a:p>
+            <a:pPr algn="l"/>
+            <a:r>
+              <a:rPr lang="pt-BR" sz="1800" b="1" dirty="0"/>
+              <a:t>Professora:</a:t>
+            </a:r>
+            <a:r>
+              <a:rPr lang="pt-BR" sz="1800" dirty="0"/>
+              <a:t> Dra. Valéria </a:t>
+            </a:r>
+            <a:r>
+              <a:rPr lang="pt-BR" sz="1800" dirty="0" err="1"/>
+              <a:t>Farinazzo</a:t>
+            </a:r>
+            <a:r>
+              <a:rPr lang="pt-BR" sz="1800" dirty="0"/>
+              <a:t> Martins</a:t>
+            </a:r>
+          </a:p>
+          <a:p>
+            <a:pPr algn="l"/>
+            <a:r>
+              <a:rPr lang="pt-BR" sz="1800" b="1" dirty="0"/>
+              <a:t>Aluno:</a:t>
+            </a:r>
+            <a:r>
+              <a:rPr lang="pt-BR" sz="1800" dirty="0"/>
+              <a:t> Cândido Francisco Moreira</a:t>
+            </a:r>
+          </a:p>
+          <a:p>
+            <a:pPr algn="l"/>
+            <a:r>
+              <a:rPr lang="pt-BR" sz="1800" b="1" dirty="0"/>
+              <a:t>RA: </a:t>
+            </a:r>
+            <a:r>
+              <a:rPr lang="pt-BR" sz="1800" dirty="0"/>
+              <a:t>10779363</a:t>
+            </a:r>
+            <a:endParaRPr lang="pt-BR" sz="1800" b="0" dirty="0">
+              <a:effectLst/>
+            </a:endParaRPr>
+          </a:p>
+          <a:p>
+            <a:pPr algn="l"/>
+            <a:r>
+              <a:rPr lang="pt-BR" sz="1800" b="1" dirty="0"/>
+              <a:t>Período:</a:t>
+            </a:r>
+            <a:r>
+              <a:rPr lang="pt-BR" sz="1800" dirty="0"/>
+              <a:t> 1º Semestre de 2026</a:t>
+            </a:r>
+          </a:p>
+        </p:txBody>
+      </p:sp>
       <p:cxnSp>
         <p:nvCxnSpPr>
           <p:cNvPr id="8" name="Conector reto 7">
@@ -3685,7 +3678,7 @@
         </p:nvCxnSpPr>
         <p:spPr>
           <a:xfrm>
-            <a:off x="3699545" y="3665989"/>
+            <a:off x="3494014" y="3680150"/>
             <a:ext cx="5203971" cy="0"/>
           </a:xfrm>
           <a:prstGeom prst="line">
@@ -3726,7 +3719,7 @@
         </p:nvSpPr>
         <p:spPr>
           <a:xfrm>
-            <a:off x="465588" y="6488668"/>
+            <a:off x="1442906" y="6361801"/>
             <a:ext cx="11671883" cy="369332"/>
           </a:xfrm>
           <a:prstGeom prst="rect">
@@ -3748,31 +3741,146 @@
                 <a:effectLst/>
                 <a:latin typeface="Arial" panose="020B0604020202020204" pitchFamily="34" charset="0"/>
               </a:rPr>
-              <a:t> Repositório disponível em:</a:t>
-            </a:r>
-            <a:r>
-              <a:rPr lang="pt-BR" sz="1800" b="0" i="0" u="none" strike="noStrike" dirty="0">
+              <a:t> Repositório disponível em: </a:t>
+            </a:r>
+            <a:r>
+              <a:rPr lang="pt-BR" dirty="0">
                 <a:solidFill>
                   <a:srgbClr val="000000"/>
                 </a:solidFill>
-                <a:effectLst/>
                 <a:latin typeface="Arial" panose="020B0604020202020204" pitchFamily="34" charset="0"/>
                 <a:hlinkClick r:id="rId4"/>
               </a:rPr>
-              <a:t> </a:t>
-            </a:r>
-            <a:r>
-              <a:rPr lang="pt-BR" sz="1800" b="0" i="0" u="sng" strike="noStrike" dirty="0">
+              <a:t>https://github.com/candidomor/Mestrado-Algoritimos-Projeto2</a:t>
+            </a:r>
+            <a:r>
+              <a:rPr lang="pt-BR" dirty="0">
                 <a:solidFill>
-                  <a:srgbClr val="1155CC"/>
+                  <a:srgbClr val="000000"/>
                 </a:solidFill>
-                <a:effectLst/>
                 <a:latin typeface="Arial" panose="020B0604020202020204" pitchFamily="34" charset="0"/>
-                <a:hlinkClick r:id="rId4"/>
-              </a:rPr>
-              <a:t>https://github.com/candidomor/Mestrado-Algoritmos-Projeto1/tree/main/Principal</a:t>
+              </a:rPr>
+              <a:t>  </a:t>
             </a:r>
             <a:endParaRPr lang="pt-BR" dirty="0"/>
+          </a:p>
+        </p:txBody>
+      </p:sp>
+      <p:sp>
+        <p:nvSpPr>
+          <p:cNvPr id="7" name="CaixaDeTexto 6">
+            <a:extLst>
+              <a:ext uri="{FF2B5EF4-FFF2-40B4-BE49-F238E27FC236}">
+                <a16:creationId xmlns:a16="http://schemas.microsoft.com/office/drawing/2014/main" id="{7B4BA160-9754-4C63-B35B-56DC8604B978}"/>
+              </a:ext>
+            </a:extLst>
+          </p:cNvPr>
+          <p:cNvSpPr txBox="1"/>
+          <p:nvPr/>
+        </p:nvSpPr>
+        <p:spPr>
+          <a:xfrm>
+            <a:off x="2933219" y="3863229"/>
+            <a:ext cx="6558594" cy="646331"/>
+          </a:xfrm>
+          <a:prstGeom prst="rect">
+            <a:avLst/>
+          </a:prstGeom>
+          <a:noFill/>
+        </p:spPr>
+        <p:txBody>
+          <a:bodyPr wrap="square">
+            <a:spAutoFit/>
+          </a:bodyPr>
+          <a:lstStyle/>
+          <a:p>
+            <a:pPr algn="ctr"/>
+            <a:r>
+              <a:rPr lang="pt-BR" sz="1800" dirty="0"/>
+              <a:t>Mestrado Profissional em Computação Aplicada – Mackenzie</a:t>
+            </a:r>
+            <a:br>
+              <a:rPr lang="pt-BR" sz="1800" dirty="0"/>
+            </a:br>
+            <a:r>
+              <a:rPr lang="pt-BR" sz="1800" dirty="0"/>
+              <a:t>Disciplina – Algoritmos e Programação</a:t>
+            </a:r>
+            <a:endParaRPr lang="pt-BR" dirty="0"/>
+          </a:p>
+        </p:txBody>
+      </p:sp>
+      <p:sp>
+        <p:nvSpPr>
+          <p:cNvPr id="10" name="CaixaDeTexto 9">
+            <a:extLst>
+              <a:ext uri="{FF2B5EF4-FFF2-40B4-BE49-F238E27FC236}">
+                <a16:creationId xmlns:a16="http://schemas.microsoft.com/office/drawing/2014/main" id="{FA37491D-BC32-1F4A-76EC-691FBF958A9F}"/>
+              </a:ext>
+            </a:extLst>
+          </p:cNvPr>
+          <p:cNvSpPr txBox="1"/>
+          <p:nvPr/>
+        </p:nvSpPr>
+        <p:spPr>
+          <a:xfrm>
+            <a:off x="98157" y="1478888"/>
+            <a:ext cx="3089161" cy="707886"/>
+          </a:xfrm>
+          <a:prstGeom prst="rect">
+            <a:avLst/>
+          </a:prstGeom>
+          <a:noFill/>
+        </p:spPr>
+        <p:txBody>
+          <a:bodyPr wrap="square">
+            <a:spAutoFit/>
+          </a:bodyPr>
+          <a:lstStyle/>
+          <a:p>
+            <a:pPr algn="ctr"/>
+            <a:r>
+              <a:rPr lang="pt-BR" sz="4000" b="1" dirty="0"/>
+              <a:t>Projeto 2</a:t>
+            </a:r>
+            <a:endParaRPr lang="pt-BR" sz="4000" dirty="0"/>
+          </a:p>
+        </p:txBody>
+      </p:sp>
+      <p:sp>
+        <p:nvSpPr>
+          <p:cNvPr id="12" name="CaixaDeTexto 11">
+            <a:extLst>
+              <a:ext uri="{FF2B5EF4-FFF2-40B4-BE49-F238E27FC236}">
+                <a16:creationId xmlns:a16="http://schemas.microsoft.com/office/drawing/2014/main" id="{BA9942D0-AA32-970A-DC52-BD9E3E11211A}"/>
+              </a:ext>
+            </a:extLst>
+          </p:cNvPr>
+          <p:cNvSpPr txBox="1"/>
+          <p:nvPr/>
+        </p:nvSpPr>
+        <p:spPr>
+          <a:xfrm>
+            <a:off x="1411820" y="2287825"/>
+            <a:ext cx="9601392" cy="1077218"/>
+          </a:xfrm>
+          <a:prstGeom prst="rect">
+            <a:avLst/>
+          </a:prstGeom>
+          <a:noFill/>
+        </p:spPr>
+        <p:txBody>
+          <a:bodyPr wrap="square">
+            <a:spAutoFit/>
+          </a:bodyPr>
+          <a:lstStyle/>
+          <a:p>
+            <a:pPr algn="ctr"/>
+            <a:r>
+              <a:rPr lang="pt-BR" sz="3200" b="1" dirty="0"/>
+              <a:t>Análise Experimental de Desempenho entre Árvores de Busca Binária (BST) e AVL com Dados de Commodities</a:t>
+            </a:r>
+            <a:endParaRPr lang="pt-BR" sz="3200" dirty="0"/>
           </a:p>
         </p:txBody>
       </p:sp>
@@ -3790,6 +3898,2534 @@
 </file>
 
 <file path=ppt/slides/slide10.xml><?xml version="1.0" encoding="utf-8"?>
+<p:sld xmlns:a="http://schemas.openxmlformats.org/drawingml/2006/main" xmlns:r="http://schemas.openxmlformats.org/officeDocument/2006/relationships" xmlns:p="http://schemas.openxmlformats.org/presentationml/2006/main">
+  <p:cSld>
+    <p:spTree>
+      <p:nvGrpSpPr>
+        <p:cNvPr id="1" name="">
+          <a:extLst>
+            <a:ext uri="{FF2B5EF4-FFF2-40B4-BE49-F238E27FC236}">
+              <a16:creationId xmlns:a16="http://schemas.microsoft.com/office/drawing/2014/main" id="{A02D6968-D1BD-D846-D23A-50FCDDAE70F0}"/>
+            </a:ext>
+          </a:extLst>
+        </p:cNvPr>
+        <p:cNvGrpSpPr/>
+        <p:nvPr/>
+      </p:nvGrpSpPr>
+      <p:grpSpPr>
+        <a:xfrm>
+          <a:off x="0" y="0"/>
+          <a:ext cx="0" cy="0"/>
+          <a:chOff x="0" y="0"/>
+          <a:chExt cx="0" cy="0"/>
+        </a:xfrm>
+      </p:grpSpPr>
+      <p:pic>
+        <p:nvPicPr>
+          <p:cNvPr id="5" name="Imagem 4">
+            <a:extLst>
+              <a:ext uri="{FF2B5EF4-FFF2-40B4-BE49-F238E27FC236}">
+                <a16:creationId xmlns:a16="http://schemas.microsoft.com/office/drawing/2014/main" id="{CFC88493-C10A-7250-735F-37EEF3C489B0}"/>
+              </a:ext>
+            </a:extLst>
+          </p:cNvPr>
+          <p:cNvPicPr>
+            <a:picLocks noChangeAspect="1"/>
+          </p:cNvPicPr>
+          <p:nvPr/>
+        </p:nvPicPr>
+        <p:blipFill>
+          <a:blip r:embed="rId2"/>
+          <a:stretch>
+            <a:fillRect/>
+          </a:stretch>
+        </p:blipFill>
+        <p:spPr>
+          <a:xfrm>
+            <a:off x="0" y="0"/>
+            <a:ext cx="12192000" cy="1398060"/>
+          </a:xfrm>
+          <a:prstGeom prst="rect">
+            <a:avLst/>
+          </a:prstGeom>
+        </p:spPr>
+      </p:pic>
+      <p:grpSp>
+        <p:nvGrpSpPr>
+          <p:cNvPr id="10" name="Agrupar 9">
+            <a:extLst>
+              <a:ext uri="{FF2B5EF4-FFF2-40B4-BE49-F238E27FC236}">
+                <a16:creationId xmlns:a16="http://schemas.microsoft.com/office/drawing/2014/main" id="{728DF6DB-B501-9806-67E4-E0BB759ACAEE}"/>
+              </a:ext>
+            </a:extLst>
+          </p:cNvPr>
+          <p:cNvGrpSpPr/>
+          <p:nvPr/>
+        </p:nvGrpSpPr>
+        <p:grpSpPr>
+          <a:xfrm>
+            <a:off x="4739781" y="3585812"/>
+            <a:ext cx="7452219" cy="3272188"/>
+            <a:chOff x="4739781" y="3585812"/>
+            <a:chExt cx="7452219" cy="3272188"/>
+          </a:xfrm>
+        </p:grpSpPr>
+        <p:pic>
+          <p:nvPicPr>
+            <p:cNvPr id="7" name="Imagem 6">
+              <a:extLst>
+                <a:ext uri="{FF2B5EF4-FFF2-40B4-BE49-F238E27FC236}">
+                  <a16:creationId xmlns:a16="http://schemas.microsoft.com/office/drawing/2014/main" id="{A50E1B48-1B0C-7977-E7F9-C30C75CFE0D1}"/>
+                </a:ext>
+              </a:extLst>
+            </p:cNvPr>
+            <p:cNvPicPr>
+              <a:picLocks noChangeAspect="1"/>
+            </p:cNvPicPr>
+            <p:nvPr/>
+          </p:nvPicPr>
+          <p:blipFill>
+            <a:blip r:embed="rId3"/>
+            <a:stretch>
+              <a:fillRect/>
+            </a:stretch>
+          </p:blipFill>
+          <p:spPr>
+            <a:xfrm>
+              <a:off x="5492514" y="4013377"/>
+              <a:ext cx="6699486" cy="2844623"/>
+            </a:xfrm>
+            <a:prstGeom prst="rect">
+              <a:avLst/>
+            </a:prstGeom>
+            <a:effectLst>
+              <a:outerShdw blurRad="50800" dist="50800" dir="5400000" algn="ctr" rotWithShape="0">
+                <a:srgbClr val="000000"/>
+              </a:outerShdw>
+            </a:effectLst>
+          </p:spPr>
+        </p:pic>
+        <p:sp>
+          <p:nvSpPr>
+            <p:cNvPr id="8" name="Retângulo 7">
+              <a:extLst>
+                <a:ext uri="{FF2B5EF4-FFF2-40B4-BE49-F238E27FC236}">
+                  <a16:creationId xmlns:a16="http://schemas.microsoft.com/office/drawing/2014/main" id="{F872ED2D-680B-EB93-7457-298AE3AF3F37}"/>
+                </a:ext>
+              </a:extLst>
+            </p:cNvPr>
+            <p:cNvSpPr/>
+            <p:nvPr/>
+          </p:nvSpPr>
+          <p:spPr>
+            <a:xfrm>
+              <a:off x="4739781" y="4013377"/>
+              <a:ext cx="1104550" cy="2844623"/>
+            </a:xfrm>
+            <a:prstGeom prst="rect">
+              <a:avLst/>
+            </a:prstGeom>
+            <a:solidFill>
+              <a:schemeClr val="bg1"/>
+            </a:solidFill>
+            <a:ln>
+              <a:solidFill>
+                <a:schemeClr val="bg1"/>
+              </a:solidFill>
+            </a:ln>
+          </p:spPr>
+          <p:style>
+            <a:lnRef idx="2">
+              <a:schemeClr val="accent1">
+                <a:shade val="15000"/>
+              </a:schemeClr>
+            </a:lnRef>
+            <a:fillRef idx="1">
+              <a:schemeClr val="accent1"/>
+            </a:fillRef>
+            <a:effectRef idx="0">
+              <a:schemeClr val="accent1"/>
+            </a:effectRef>
+            <a:fontRef idx="minor">
+              <a:schemeClr val="lt1"/>
+            </a:fontRef>
+          </p:style>
+          <p:txBody>
+            <a:bodyPr rtlCol="0" anchor="ctr"/>
+            <a:lstStyle/>
+            <a:p>
+              <a:pPr algn="ctr"/>
+              <a:endParaRPr lang="pt-BR"/>
+            </a:p>
+          </p:txBody>
+        </p:sp>
+        <p:sp>
+          <p:nvSpPr>
+            <p:cNvPr id="9" name="Retângulo 8">
+              <a:extLst>
+                <a:ext uri="{FF2B5EF4-FFF2-40B4-BE49-F238E27FC236}">
+                  <a16:creationId xmlns:a16="http://schemas.microsoft.com/office/drawing/2014/main" id="{FB8BD088-4083-E70C-C816-54B2FC26849C}"/>
+                </a:ext>
+              </a:extLst>
+            </p:cNvPr>
+            <p:cNvSpPr/>
+            <p:nvPr/>
+          </p:nvSpPr>
+          <p:spPr>
+            <a:xfrm>
+              <a:off x="5292056" y="3585812"/>
+              <a:ext cx="4453856" cy="1078467"/>
+            </a:xfrm>
+            <a:prstGeom prst="rect">
+              <a:avLst/>
+            </a:prstGeom>
+            <a:solidFill>
+              <a:schemeClr val="bg1"/>
+            </a:solidFill>
+            <a:ln>
+              <a:solidFill>
+                <a:schemeClr val="bg1"/>
+              </a:solidFill>
+            </a:ln>
+          </p:spPr>
+          <p:style>
+            <a:lnRef idx="2">
+              <a:schemeClr val="accent1">
+                <a:shade val="15000"/>
+              </a:schemeClr>
+            </a:lnRef>
+            <a:fillRef idx="1">
+              <a:schemeClr val="accent1"/>
+            </a:fillRef>
+            <a:effectRef idx="0">
+              <a:schemeClr val="accent1"/>
+            </a:effectRef>
+            <a:fontRef idx="minor">
+              <a:schemeClr val="lt1"/>
+            </a:fontRef>
+          </p:style>
+          <p:txBody>
+            <a:bodyPr rtlCol="0" anchor="ctr"/>
+            <a:lstStyle/>
+            <a:p>
+              <a:pPr algn="ctr"/>
+              <a:endParaRPr lang="pt-BR"/>
+            </a:p>
+          </p:txBody>
+        </p:sp>
+      </p:grpSp>
+      <p:pic>
+        <p:nvPicPr>
+          <p:cNvPr id="4" name="Imagem 3">
+            <a:extLst>
+              <a:ext uri="{FF2B5EF4-FFF2-40B4-BE49-F238E27FC236}">
+                <a16:creationId xmlns:a16="http://schemas.microsoft.com/office/drawing/2014/main" id="{C8F2E3A9-6A00-7723-8325-D3F7BC4EFD9A}"/>
+              </a:ext>
+            </a:extLst>
+          </p:cNvPr>
+          <p:cNvPicPr>
+            <a:picLocks noChangeAspect="1"/>
+          </p:cNvPicPr>
+          <p:nvPr/>
+        </p:nvPicPr>
+        <p:blipFill>
+          <a:blip r:embed="rId4">
+            <a:extLst>
+              <a:ext uri="{28A0092B-C50C-407E-A947-70E740481C1C}">
+                <a14:useLocalDpi xmlns:a14="http://schemas.microsoft.com/office/drawing/2010/main" val="0"/>
+              </a:ext>
+            </a:extLst>
+          </a:blip>
+          <a:stretch>
+            <a:fillRect/>
+          </a:stretch>
+        </p:blipFill>
+        <p:spPr>
+          <a:xfrm>
+            <a:off x="1590793" y="1446862"/>
+            <a:ext cx="8308213" cy="4984928"/>
+          </a:xfrm>
+          <a:prstGeom prst="rect">
+            <a:avLst/>
+          </a:prstGeom>
+        </p:spPr>
+      </p:pic>
+    </p:spTree>
+    <p:extLst>
+      <p:ext uri="{BB962C8B-B14F-4D97-AF65-F5344CB8AC3E}">
+        <p14:creationId xmlns:p14="http://schemas.microsoft.com/office/powerpoint/2010/main" val="2531017642"/>
+      </p:ext>
+    </p:extLst>
+  </p:cSld>
+  <p:clrMapOvr>
+    <a:masterClrMapping/>
+  </p:clrMapOvr>
+</p:sld>
+</file>
+
+<file path=ppt/slides/slide11.xml><?xml version="1.0" encoding="utf-8"?>
+<p:sld xmlns:a="http://schemas.openxmlformats.org/drawingml/2006/main" xmlns:r="http://schemas.openxmlformats.org/officeDocument/2006/relationships" xmlns:p="http://schemas.openxmlformats.org/presentationml/2006/main">
+  <p:cSld>
+    <p:spTree>
+      <p:nvGrpSpPr>
+        <p:cNvPr id="1" name="">
+          <a:extLst>
+            <a:ext uri="{FF2B5EF4-FFF2-40B4-BE49-F238E27FC236}">
+              <a16:creationId xmlns:a16="http://schemas.microsoft.com/office/drawing/2014/main" id="{546AB56E-45F8-002C-6895-A1D702782C2F}"/>
+            </a:ext>
+          </a:extLst>
+        </p:cNvPr>
+        <p:cNvGrpSpPr/>
+        <p:nvPr/>
+      </p:nvGrpSpPr>
+      <p:grpSpPr>
+        <a:xfrm>
+          <a:off x="0" y="0"/>
+          <a:ext cx="0" cy="0"/>
+          <a:chOff x="0" y="0"/>
+          <a:chExt cx="0" cy="0"/>
+        </a:xfrm>
+      </p:grpSpPr>
+      <p:pic>
+        <p:nvPicPr>
+          <p:cNvPr id="5" name="Imagem 4">
+            <a:extLst>
+              <a:ext uri="{FF2B5EF4-FFF2-40B4-BE49-F238E27FC236}">
+                <a16:creationId xmlns:a16="http://schemas.microsoft.com/office/drawing/2014/main" id="{84BE9DC2-D9BD-4FE5-EF61-298CA8B4CF42}"/>
+              </a:ext>
+            </a:extLst>
+          </p:cNvPr>
+          <p:cNvPicPr>
+            <a:picLocks noChangeAspect="1"/>
+          </p:cNvPicPr>
+          <p:nvPr/>
+        </p:nvPicPr>
+        <p:blipFill>
+          <a:blip r:embed="rId2"/>
+          <a:stretch>
+            <a:fillRect/>
+          </a:stretch>
+        </p:blipFill>
+        <p:spPr>
+          <a:xfrm>
+            <a:off x="0" y="0"/>
+            <a:ext cx="12192000" cy="1398060"/>
+          </a:xfrm>
+          <a:prstGeom prst="rect">
+            <a:avLst/>
+          </a:prstGeom>
+        </p:spPr>
+      </p:pic>
+      <p:grpSp>
+        <p:nvGrpSpPr>
+          <p:cNvPr id="10" name="Agrupar 9">
+            <a:extLst>
+              <a:ext uri="{FF2B5EF4-FFF2-40B4-BE49-F238E27FC236}">
+                <a16:creationId xmlns:a16="http://schemas.microsoft.com/office/drawing/2014/main" id="{6A9D9DD1-C126-C056-51F3-CDC965E03381}"/>
+              </a:ext>
+            </a:extLst>
+          </p:cNvPr>
+          <p:cNvGrpSpPr/>
+          <p:nvPr/>
+        </p:nvGrpSpPr>
+        <p:grpSpPr>
+          <a:xfrm>
+            <a:off x="4739781" y="3585812"/>
+            <a:ext cx="7452219" cy="3272188"/>
+            <a:chOff x="4739781" y="3585812"/>
+            <a:chExt cx="7452219" cy="3272188"/>
+          </a:xfrm>
+        </p:grpSpPr>
+        <p:pic>
+          <p:nvPicPr>
+            <p:cNvPr id="7" name="Imagem 6">
+              <a:extLst>
+                <a:ext uri="{FF2B5EF4-FFF2-40B4-BE49-F238E27FC236}">
+                  <a16:creationId xmlns:a16="http://schemas.microsoft.com/office/drawing/2014/main" id="{71A7E06C-6B60-9659-6479-CE109338F0FC}"/>
+                </a:ext>
+              </a:extLst>
+            </p:cNvPr>
+            <p:cNvPicPr>
+              <a:picLocks noChangeAspect="1"/>
+            </p:cNvPicPr>
+            <p:nvPr/>
+          </p:nvPicPr>
+          <p:blipFill>
+            <a:blip r:embed="rId3"/>
+            <a:stretch>
+              <a:fillRect/>
+            </a:stretch>
+          </p:blipFill>
+          <p:spPr>
+            <a:xfrm>
+              <a:off x="5492514" y="4013377"/>
+              <a:ext cx="6699486" cy="2844623"/>
+            </a:xfrm>
+            <a:prstGeom prst="rect">
+              <a:avLst/>
+            </a:prstGeom>
+            <a:effectLst>
+              <a:outerShdw blurRad="50800" dist="50800" dir="5400000" algn="ctr" rotWithShape="0">
+                <a:srgbClr val="000000"/>
+              </a:outerShdw>
+            </a:effectLst>
+          </p:spPr>
+        </p:pic>
+        <p:sp>
+          <p:nvSpPr>
+            <p:cNvPr id="8" name="Retângulo 7">
+              <a:extLst>
+                <a:ext uri="{FF2B5EF4-FFF2-40B4-BE49-F238E27FC236}">
+                  <a16:creationId xmlns:a16="http://schemas.microsoft.com/office/drawing/2014/main" id="{2C62645B-79A4-E508-83DF-244F351E9930}"/>
+                </a:ext>
+              </a:extLst>
+            </p:cNvPr>
+            <p:cNvSpPr/>
+            <p:nvPr/>
+          </p:nvSpPr>
+          <p:spPr>
+            <a:xfrm>
+              <a:off x="4739781" y="4013377"/>
+              <a:ext cx="1104550" cy="2844623"/>
+            </a:xfrm>
+            <a:prstGeom prst="rect">
+              <a:avLst/>
+            </a:prstGeom>
+            <a:solidFill>
+              <a:schemeClr val="bg1"/>
+            </a:solidFill>
+            <a:ln>
+              <a:solidFill>
+                <a:schemeClr val="bg1"/>
+              </a:solidFill>
+            </a:ln>
+          </p:spPr>
+          <p:style>
+            <a:lnRef idx="2">
+              <a:schemeClr val="accent1">
+                <a:shade val="15000"/>
+              </a:schemeClr>
+            </a:lnRef>
+            <a:fillRef idx="1">
+              <a:schemeClr val="accent1"/>
+            </a:fillRef>
+            <a:effectRef idx="0">
+              <a:schemeClr val="accent1"/>
+            </a:effectRef>
+            <a:fontRef idx="minor">
+              <a:schemeClr val="lt1"/>
+            </a:fontRef>
+          </p:style>
+          <p:txBody>
+            <a:bodyPr rtlCol="0" anchor="ctr"/>
+            <a:lstStyle/>
+            <a:p>
+              <a:pPr algn="ctr"/>
+              <a:endParaRPr lang="pt-BR"/>
+            </a:p>
+          </p:txBody>
+        </p:sp>
+        <p:sp>
+          <p:nvSpPr>
+            <p:cNvPr id="9" name="Retângulo 8">
+              <a:extLst>
+                <a:ext uri="{FF2B5EF4-FFF2-40B4-BE49-F238E27FC236}">
+                  <a16:creationId xmlns:a16="http://schemas.microsoft.com/office/drawing/2014/main" id="{96A2DE5A-F4CF-1147-C21C-D11256F68CE3}"/>
+                </a:ext>
+              </a:extLst>
+            </p:cNvPr>
+            <p:cNvSpPr/>
+            <p:nvPr/>
+          </p:nvSpPr>
+          <p:spPr>
+            <a:xfrm>
+              <a:off x="5292056" y="3585812"/>
+              <a:ext cx="4453856" cy="1078467"/>
+            </a:xfrm>
+            <a:prstGeom prst="rect">
+              <a:avLst/>
+            </a:prstGeom>
+            <a:solidFill>
+              <a:schemeClr val="bg1"/>
+            </a:solidFill>
+            <a:ln>
+              <a:solidFill>
+                <a:schemeClr val="bg1"/>
+              </a:solidFill>
+            </a:ln>
+          </p:spPr>
+          <p:style>
+            <a:lnRef idx="2">
+              <a:schemeClr val="accent1">
+                <a:shade val="15000"/>
+              </a:schemeClr>
+            </a:lnRef>
+            <a:fillRef idx="1">
+              <a:schemeClr val="accent1"/>
+            </a:fillRef>
+            <a:effectRef idx="0">
+              <a:schemeClr val="accent1"/>
+            </a:effectRef>
+            <a:fontRef idx="minor">
+              <a:schemeClr val="lt1"/>
+            </a:fontRef>
+          </p:style>
+          <p:txBody>
+            <a:bodyPr rtlCol="0" anchor="ctr"/>
+            <a:lstStyle/>
+            <a:p>
+              <a:pPr algn="ctr"/>
+              <a:endParaRPr lang="pt-BR"/>
+            </a:p>
+          </p:txBody>
+        </p:sp>
+      </p:grpSp>
+      <p:sp>
+        <p:nvSpPr>
+          <p:cNvPr id="13" name="Rectangle 1">
+            <a:extLst>
+              <a:ext uri="{FF2B5EF4-FFF2-40B4-BE49-F238E27FC236}">
+                <a16:creationId xmlns:a16="http://schemas.microsoft.com/office/drawing/2014/main" id="{6946EC03-7C93-E575-9470-A0C6943F7886}"/>
+              </a:ext>
+            </a:extLst>
+          </p:cNvPr>
+          <p:cNvSpPr>
+            <a:spLocks noGrp="1" noChangeArrowheads="1"/>
+          </p:cNvSpPr>
+          <p:nvPr>
+            <p:ph idx="1"/>
+          </p:nvPr>
+        </p:nvSpPr>
+        <p:spPr bwMode="auto">
+          <a:xfrm>
+            <a:off x="1075630" y="1945926"/>
+            <a:ext cx="10515600" cy="3749231"/>
+          </a:xfrm>
+          <a:prstGeom prst="rect">
+            <a:avLst/>
+          </a:prstGeom>
+          <a:noFill/>
+          <a:ln>
+            <a:noFill/>
+          </a:ln>
+          <a:effectLst/>
+          <a:extLst>
+            <a:ext uri="{909E8E84-426E-40DD-AFC4-6F175D3DCCD1}">
+              <a14:hiddenFill xmlns:a14="http://schemas.microsoft.com/office/drawing/2010/main">
+                <a:solidFill>
+                  <a:schemeClr val="accent1"/>
+                </a:solidFill>
+              </a14:hiddenFill>
+            </a:ext>
+            <a:ext uri="{91240B29-F687-4F45-9708-019B960494DF}">
+              <a14:hiddenLine xmlns:a14="http://schemas.microsoft.com/office/drawing/2010/main" w="9525">
+                <a:solidFill>
+                  <a:schemeClr val="tx1"/>
+                </a:solidFill>
+                <a:miter lim="800000"/>
+                <a:headEnd/>
+                <a:tailEnd/>
+              </a14:hiddenLine>
+            </a:ext>
+            <a:ext uri="{AF507438-7753-43E0-B8FC-AC1667EBCBE1}">
+              <a14:hiddenEffects xmlns:a14="http://schemas.microsoft.com/office/drawing/2010/main">
+                <a:effectLst>
+                  <a:outerShdw dist="35921" dir="2700000" algn="ctr" rotWithShape="0">
+                    <a:schemeClr val="bg2"/>
+                  </a:outerShdw>
+                </a:effectLst>
+              </a14:hiddenEffects>
+            </a:ext>
+          </a:extLst>
+        </p:spPr>
+        <p:txBody>
+          <a:bodyPr vert="horz" wrap="square" lIns="91440" tIns="45720" rIns="91440" bIns="45720" numCol="1" anchor="ctr" anchorCtr="0" compatLnSpc="1">
+            <a:prstTxWarp prst="textNoShape">
+              <a:avLst/>
+            </a:prstTxWarp>
+            <a:spAutoFit/>
+          </a:bodyPr>
+          <a:lstStyle/>
+          <a:p>
+            <a:pPr marL="0" indent="0" eaLnBrk="0" fontAlgn="base" hangingPunct="0">
+              <a:lnSpc>
+                <a:spcPct val="100000"/>
+              </a:lnSpc>
+              <a:spcBef>
+                <a:spcPct val="0"/>
+              </a:spcBef>
+              <a:spcAft>
+                <a:spcPct val="0"/>
+              </a:spcAft>
+              <a:buFontTx/>
+              <a:buChar char="•"/>
+            </a:pPr>
+            <a:endParaRPr lang="pt-BR" altLang="pt-BR" sz="2400" b="1" dirty="0"/>
+          </a:p>
+          <a:p>
+            <a:pPr marL="0" indent="0" eaLnBrk="0" fontAlgn="base" hangingPunct="0">
+              <a:lnSpc>
+                <a:spcPct val="100000"/>
+              </a:lnSpc>
+              <a:spcBef>
+                <a:spcPct val="0"/>
+              </a:spcBef>
+              <a:spcAft>
+                <a:spcPct val="0"/>
+              </a:spcAft>
+              <a:buFontTx/>
+              <a:buChar char="•"/>
+            </a:pPr>
+            <a:r>
+              <a:rPr lang="pt-BR" dirty="0"/>
+              <a:t> </a:t>
+            </a:r>
+            <a:r>
+              <a:rPr lang="pt-BR" b="1" dirty="0"/>
+              <a:t>A notação </a:t>
+            </a:r>
+            <a:r>
+              <a:rPr lang="pt-BR" b="1" dirty="0" err="1"/>
+              <a:t>Big-O</a:t>
+            </a:r>
+            <a:r>
+              <a:rPr lang="pt-BR" b="1" dirty="0"/>
+              <a:t> é válida como modelo</a:t>
+            </a:r>
+          </a:p>
+          <a:p>
+            <a:pPr marL="457200" lvl="1" indent="0" eaLnBrk="0" fontAlgn="base" hangingPunct="0">
+              <a:lnSpc>
+                <a:spcPct val="100000"/>
+              </a:lnSpc>
+              <a:spcBef>
+                <a:spcPct val="0"/>
+              </a:spcBef>
+              <a:spcAft>
+                <a:spcPct val="0"/>
+              </a:spcAft>
+              <a:buFontTx/>
+              <a:buChar char="•"/>
+            </a:pPr>
+            <a:r>
+              <a:rPr lang="pt-BR" dirty="0"/>
+              <a:t> paralelismo</a:t>
+            </a:r>
+          </a:p>
+          <a:p>
+            <a:pPr marL="914400" lvl="2" indent="0" eaLnBrk="0" fontAlgn="base" hangingPunct="0">
+              <a:lnSpc>
+                <a:spcPct val="100000"/>
+              </a:lnSpc>
+              <a:spcBef>
+                <a:spcPct val="0"/>
+              </a:spcBef>
+              <a:spcAft>
+                <a:spcPct val="0"/>
+              </a:spcAft>
+              <a:buFontTx/>
+              <a:buChar char="•"/>
+            </a:pPr>
+            <a:r>
+              <a:rPr lang="pt-BR" dirty="0"/>
+              <a:t> fatores de implementação (GIL, </a:t>
+            </a:r>
+            <a:r>
+              <a:rPr lang="pt-BR" dirty="0" err="1"/>
+              <a:t>Pickling</a:t>
+            </a:r>
+            <a:r>
+              <a:rPr lang="pt-BR" dirty="0"/>
+              <a:t>, IPC) criam constantes lineares que dominaram o tempo de execução</a:t>
+            </a:r>
+          </a:p>
+          <a:p>
+            <a:pPr lvl="0"/>
+            <a:r>
+              <a:rPr lang="pt-BR" b="1" dirty="0"/>
+              <a:t>Lei de </a:t>
+            </a:r>
+            <a:r>
+              <a:rPr lang="pt-BR" b="1" dirty="0" err="1"/>
+              <a:t>Amdahl</a:t>
+            </a:r>
+            <a:r>
+              <a:rPr lang="pt-BR" b="1" dirty="0"/>
+              <a:t> na prática:</a:t>
+            </a:r>
+          </a:p>
+          <a:p>
+            <a:pPr lvl="1"/>
+            <a:r>
+              <a:rPr lang="pt-BR" dirty="0"/>
+              <a:t> O ganho com múltiplos núcleos</a:t>
+            </a:r>
+          </a:p>
+          <a:p>
+            <a:pPr lvl="2"/>
+            <a:r>
+              <a:rPr lang="pt-BR" dirty="0"/>
+              <a:t>Se justificou no pior cenário estrutural da BST (onde a degradação exigia varredura O(N²)</a:t>
+            </a:r>
+          </a:p>
+          <a:p>
+            <a:pPr lvl="2"/>
+            <a:r>
+              <a:rPr lang="pt-BR" dirty="0"/>
+              <a:t>Para as operações naturalmente eficientes O(log N), o overhead de coordenação tornou a computação Single-Thread vitoriosa</a:t>
+            </a:r>
+            <a:endParaRPr kumimoji="0" lang="pt-BR" altLang="pt-BR" sz="2000" b="0" i="0" u="none" strike="noStrike" cap="none" normalizeH="0" baseline="0" dirty="0">
+              <a:ln>
+                <a:noFill/>
+              </a:ln>
+              <a:solidFill>
+                <a:schemeClr val="tx1"/>
+              </a:solidFill>
+              <a:effectLst/>
+              <a:latin typeface="Google Sans Text"/>
+            </a:endParaRPr>
+          </a:p>
+        </p:txBody>
+      </p:sp>
+      <p:sp>
+        <p:nvSpPr>
+          <p:cNvPr id="16" name="Título 1">
+            <a:extLst>
+              <a:ext uri="{FF2B5EF4-FFF2-40B4-BE49-F238E27FC236}">
+                <a16:creationId xmlns:a16="http://schemas.microsoft.com/office/drawing/2014/main" id="{D5CFFB1F-A2F6-20D4-0145-CE77F864B6F8}"/>
+              </a:ext>
+            </a:extLst>
+          </p:cNvPr>
+          <p:cNvSpPr>
+            <a:spLocks noGrp="1"/>
+          </p:cNvSpPr>
+          <p:nvPr>
+            <p:ph type="title"/>
+          </p:nvPr>
+        </p:nvSpPr>
+        <p:spPr>
+          <a:xfrm>
+            <a:off x="474860" y="1162843"/>
+            <a:ext cx="10515600" cy="1325563"/>
+          </a:xfrm>
+        </p:spPr>
+        <p:txBody>
+          <a:bodyPr>
+            <a:normAutofit/>
+          </a:bodyPr>
+          <a:lstStyle/>
+          <a:p>
+            <a:r>
+              <a:rPr lang="pt-BR" sz="2800" b="1" dirty="0">
+                <a:latin typeface="+mn-lt"/>
+              </a:rPr>
+              <a:t>Análise Assintótica e a Lei de </a:t>
+            </a:r>
+            <a:r>
+              <a:rPr lang="pt-BR" sz="2800" b="1" dirty="0" err="1">
+                <a:latin typeface="+mn-lt"/>
+              </a:rPr>
+              <a:t>Amdahl</a:t>
+            </a:r>
+            <a:r>
+              <a:rPr lang="pt-BR" sz="2800" b="1" dirty="0">
+                <a:latin typeface="+mn-lt"/>
+              </a:rPr>
+              <a:t> </a:t>
+            </a:r>
+          </a:p>
+        </p:txBody>
+      </p:sp>
+    </p:spTree>
+    <p:extLst>
+      <p:ext uri="{BB962C8B-B14F-4D97-AF65-F5344CB8AC3E}">
+        <p14:creationId xmlns:p14="http://schemas.microsoft.com/office/powerpoint/2010/main" val="715795209"/>
+      </p:ext>
+    </p:extLst>
+  </p:cSld>
+  <p:clrMapOvr>
+    <a:masterClrMapping/>
+  </p:clrMapOvr>
+</p:sld>
+</file>
+
+<file path=ppt/slides/slide12.xml><?xml version="1.0" encoding="utf-8"?>
+<p:sld xmlns:a="http://schemas.openxmlformats.org/drawingml/2006/main" xmlns:r="http://schemas.openxmlformats.org/officeDocument/2006/relationships" xmlns:p="http://schemas.openxmlformats.org/presentationml/2006/main">
+  <p:cSld>
+    <p:spTree>
+      <p:nvGrpSpPr>
+        <p:cNvPr id="1" name="">
+          <a:extLst>
+            <a:ext uri="{FF2B5EF4-FFF2-40B4-BE49-F238E27FC236}">
+              <a16:creationId xmlns:a16="http://schemas.microsoft.com/office/drawing/2014/main" id="{AA726252-3887-E671-84FB-B05CBFA52BAC}"/>
+            </a:ext>
+          </a:extLst>
+        </p:cNvPr>
+        <p:cNvGrpSpPr/>
+        <p:nvPr/>
+      </p:nvGrpSpPr>
+      <p:grpSpPr>
+        <a:xfrm>
+          <a:off x="0" y="0"/>
+          <a:ext cx="0" cy="0"/>
+          <a:chOff x="0" y="0"/>
+          <a:chExt cx="0" cy="0"/>
+        </a:xfrm>
+      </p:grpSpPr>
+      <p:pic>
+        <p:nvPicPr>
+          <p:cNvPr id="5" name="Imagem 4">
+            <a:extLst>
+              <a:ext uri="{FF2B5EF4-FFF2-40B4-BE49-F238E27FC236}">
+                <a16:creationId xmlns:a16="http://schemas.microsoft.com/office/drawing/2014/main" id="{94821429-7D17-B60B-0676-D97DBFE77AA1}"/>
+              </a:ext>
+            </a:extLst>
+          </p:cNvPr>
+          <p:cNvPicPr>
+            <a:picLocks noChangeAspect="1"/>
+          </p:cNvPicPr>
+          <p:nvPr/>
+        </p:nvPicPr>
+        <p:blipFill>
+          <a:blip r:embed="rId2"/>
+          <a:stretch>
+            <a:fillRect/>
+          </a:stretch>
+        </p:blipFill>
+        <p:spPr>
+          <a:xfrm>
+            <a:off x="0" y="0"/>
+            <a:ext cx="12192000" cy="1398060"/>
+          </a:xfrm>
+          <a:prstGeom prst="rect">
+            <a:avLst/>
+          </a:prstGeom>
+        </p:spPr>
+      </p:pic>
+      <p:grpSp>
+        <p:nvGrpSpPr>
+          <p:cNvPr id="10" name="Agrupar 9">
+            <a:extLst>
+              <a:ext uri="{FF2B5EF4-FFF2-40B4-BE49-F238E27FC236}">
+                <a16:creationId xmlns:a16="http://schemas.microsoft.com/office/drawing/2014/main" id="{EE1A6FBB-95B2-9910-98A2-FC59A6A9EC59}"/>
+              </a:ext>
+            </a:extLst>
+          </p:cNvPr>
+          <p:cNvGrpSpPr/>
+          <p:nvPr/>
+        </p:nvGrpSpPr>
+        <p:grpSpPr>
+          <a:xfrm>
+            <a:off x="4739781" y="3585812"/>
+            <a:ext cx="7452219" cy="3272188"/>
+            <a:chOff x="4739781" y="3585812"/>
+            <a:chExt cx="7452219" cy="3272188"/>
+          </a:xfrm>
+        </p:grpSpPr>
+        <p:pic>
+          <p:nvPicPr>
+            <p:cNvPr id="7" name="Imagem 6">
+              <a:extLst>
+                <a:ext uri="{FF2B5EF4-FFF2-40B4-BE49-F238E27FC236}">
+                  <a16:creationId xmlns:a16="http://schemas.microsoft.com/office/drawing/2014/main" id="{F8262A45-B6AD-1CE4-0C21-E41906D8F3F0}"/>
+                </a:ext>
+              </a:extLst>
+            </p:cNvPr>
+            <p:cNvPicPr>
+              <a:picLocks noChangeAspect="1"/>
+            </p:cNvPicPr>
+            <p:nvPr/>
+          </p:nvPicPr>
+          <p:blipFill>
+            <a:blip r:embed="rId3"/>
+            <a:stretch>
+              <a:fillRect/>
+            </a:stretch>
+          </p:blipFill>
+          <p:spPr>
+            <a:xfrm>
+              <a:off x="5492514" y="4013377"/>
+              <a:ext cx="6699486" cy="2844623"/>
+            </a:xfrm>
+            <a:prstGeom prst="rect">
+              <a:avLst/>
+            </a:prstGeom>
+            <a:effectLst>
+              <a:outerShdw blurRad="50800" dist="50800" dir="5400000" algn="ctr" rotWithShape="0">
+                <a:srgbClr val="000000"/>
+              </a:outerShdw>
+            </a:effectLst>
+          </p:spPr>
+        </p:pic>
+        <p:sp>
+          <p:nvSpPr>
+            <p:cNvPr id="8" name="Retângulo 7">
+              <a:extLst>
+                <a:ext uri="{FF2B5EF4-FFF2-40B4-BE49-F238E27FC236}">
+                  <a16:creationId xmlns:a16="http://schemas.microsoft.com/office/drawing/2014/main" id="{13830BE5-A639-276B-3A4B-147CE49692A4}"/>
+                </a:ext>
+              </a:extLst>
+            </p:cNvPr>
+            <p:cNvSpPr/>
+            <p:nvPr/>
+          </p:nvSpPr>
+          <p:spPr>
+            <a:xfrm>
+              <a:off x="4739781" y="4013377"/>
+              <a:ext cx="1104550" cy="2844623"/>
+            </a:xfrm>
+            <a:prstGeom prst="rect">
+              <a:avLst/>
+            </a:prstGeom>
+            <a:solidFill>
+              <a:schemeClr val="bg1"/>
+            </a:solidFill>
+            <a:ln>
+              <a:solidFill>
+                <a:schemeClr val="bg1"/>
+              </a:solidFill>
+            </a:ln>
+          </p:spPr>
+          <p:style>
+            <a:lnRef idx="2">
+              <a:schemeClr val="accent1">
+                <a:shade val="15000"/>
+              </a:schemeClr>
+            </a:lnRef>
+            <a:fillRef idx="1">
+              <a:schemeClr val="accent1"/>
+            </a:fillRef>
+            <a:effectRef idx="0">
+              <a:schemeClr val="accent1"/>
+            </a:effectRef>
+            <a:fontRef idx="minor">
+              <a:schemeClr val="lt1"/>
+            </a:fontRef>
+          </p:style>
+          <p:txBody>
+            <a:bodyPr rtlCol="0" anchor="ctr"/>
+            <a:lstStyle/>
+            <a:p>
+              <a:pPr algn="ctr"/>
+              <a:endParaRPr lang="pt-BR"/>
+            </a:p>
+          </p:txBody>
+        </p:sp>
+        <p:sp>
+          <p:nvSpPr>
+            <p:cNvPr id="9" name="Retângulo 8">
+              <a:extLst>
+                <a:ext uri="{FF2B5EF4-FFF2-40B4-BE49-F238E27FC236}">
+                  <a16:creationId xmlns:a16="http://schemas.microsoft.com/office/drawing/2014/main" id="{94D8BE6D-1ED5-A510-5846-672ECA96F5CF}"/>
+                </a:ext>
+              </a:extLst>
+            </p:cNvPr>
+            <p:cNvSpPr/>
+            <p:nvPr/>
+          </p:nvSpPr>
+          <p:spPr>
+            <a:xfrm>
+              <a:off x="5292056" y="3585812"/>
+              <a:ext cx="4453856" cy="1078467"/>
+            </a:xfrm>
+            <a:prstGeom prst="rect">
+              <a:avLst/>
+            </a:prstGeom>
+            <a:solidFill>
+              <a:schemeClr val="bg1"/>
+            </a:solidFill>
+            <a:ln>
+              <a:solidFill>
+                <a:schemeClr val="bg1"/>
+              </a:solidFill>
+            </a:ln>
+          </p:spPr>
+          <p:style>
+            <a:lnRef idx="2">
+              <a:schemeClr val="accent1">
+                <a:shade val="15000"/>
+              </a:schemeClr>
+            </a:lnRef>
+            <a:fillRef idx="1">
+              <a:schemeClr val="accent1"/>
+            </a:fillRef>
+            <a:effectRef idx="0">
+              <a:schemeClr val="accent1"/>
+            </a:effectRef>
+            <a:fontRef idx="minor">
+              <a:schemeClr val="lt1"/>
+            </a:fontRef>
+          </p:style>
+          <p:txBody>
+            <a:bodyPr rtlCol="0" anchor="ctr"/>
+            <a:lstStyle/>
+            <a:p>
+              <a:pPr algn="ctr"/>
+              <a:endParaRPr lang="pt-BR"/>
+            </a:p>
+          </p:txBody>
+        </p:sp>
+      </p:grpSp>
+      <p:pic>
+        <p:nvPicPr>
+          <p:cNvPr id="11" name="Imagem 10">
+            <a:extLst>
+              <a:ext uri="{FF2B5EF4-FFF2-40B4-BE49-F238E27FC236}">
+                <a16:creationId xmlns:a16="http://schemas.microsoft.com/office/drawing/2014/main" id="{1A367ECC-E1B5-8A5E-27E8-74DA447152BD}"/>
+              </a:ext>
+            </a:extLst>
+          </p:cNvPr>
+          <p:cNvPicPr>
+            <a:picLocks noChangeAspect="1"/>
+          </p:cNvPicPr>
+          <p:nvPr/>
+        </p:nvPicPr>
+        <p:blipFill>
+          <a:blip r:embed="rId4">
+            <a:extLst>
+              <a:ext uri="{28A0092B-C50C-407E-A947-70E740481C1C}">
+                <a14:useLocalDpi xmlns:a14="http://schemas.microsoft.com/office/drawing/2010/main" val="0"/>
+              </a:ext>
+            </a:extLst>
+          </a:blip>
+          <a:stretch>
+            <a:fillRect/>
+          </a:stretch>
+        </p:blipFill>
+        <p:spPr>
+          <a:xfrm>
+            <a:off x="1582221" y="1611276"/>
+            <a:ext cx="8007002" cy="4804201"/>
+          </a:xfrm>
+          <a:prstGeom prst="rect">
+            <a:avLst/>
+          </a:prstGeom>
+        </p:spPr>
+      </p:pic>
+    </p:spTree>
+    <p:extLst>
+      <p:ext uri="{BB962C8B-B14F-4D97-AF65-F5344CB8AC3E}">
+        <p14:creationId xmlns:p14="http://schemas.microsoft.com/office/powerpoint/2010/main" val="1155697425"/>
+      </p:ext>
+    </p:extLst>
+  </p:cSld>
+  <p:clrMapOvr>
+    <a:masterClrMapping/>
+  </p:clrMapOvr>
+</p:sld>
+</file>
+
+<file path=ppt/slides/slide13.xml><?xml version="1.0" encoding="utf-8"?>
+<p:sld xmlns:a="http://schemas.openxmlformats.org/drawingml/2006/main" xmlns:r="http://schemas.openxmlformats.org/officeDocument/2006/relationships" xmlns:p="http://schemas.openxmlformats.org/presentationml/2006/main">
+  <p:cSld>
+    <p:spTree>
+      <p:nvGrpSpPr>
+        <p:cNvPr id="1" name="">
+          <a:extLst>
+            <a:ext uri="{FF2B5EF4-FFF2-40B4-BE49-F238E27FC236}">
+              <a16:creationId xmlns:a16="http://schemas.microsoft.com/office/drawing/2014/main" id="{09326535-FB19-E6BD-8062-3639E91C0916}"/>
+            </a:ext>
+          </a:extLst>
+        </p:cNvPr>
+        <p:cNvGrpSpPr/>
+        <p:nvPr/>
+      </p:nvGrpSpPr>
+      <p:grpSpPr>
+        <a:xfrm>
+          <a:off x="0" y="0"/>
+          <a:ext cx="0" cy="0"/>
+          <a:chOff x="0" y="0"/>
+          <a:chExt cx="0" cy="0"/>
+        </a:xfrm>
+      </p:grpSpPr>
+      <p:pic>
+        <p:nvPicPr>
+          <p:cNvPr id="5" name="Imagem 4">
+            <a:extLst>
+              <a:ext uri="{FF2B5EF4-FFF2-40B4-BE49-F238E27FC236}">
+                <a16:creationId xmlns:a16="http://schemas.microsoft.com/office/drawing/2014/main" id="{5CB36F6C-2408-85A8-92D7-513B26AF52D7}"/>
+              </a:ext>
+            </a:extLst>
+          </p:cNvPr>
+          <p:cNvPicPr>
+            <a:picLocks noChangeAspect="1"/>
+          </p:cNvPicPr>
+          <p:nvPr/>
+        </p:nvPicPr>
+        <p:blipFill>
+          <a:blip r:embed="rId2"/>
+          <a:stretch>
+            <a:fillRect/>
+          </a:stretch>
+        </p:blipFill>
+        <p:spPr>
+          <a:xfrm>
+            <a:off x="0" y="0"/>
+            <a:ext cx="12192000" cy="1398060"/>
+          </a:xfrm>
+          <a:prstGeom prst="rect">
+            <a:avLst/>
+          </a:prstGeom>
+        </p:spPr>
+      </p:pic>
+      <p:grpSp>
+        <p:nvGrpSpPr>
+          <p:cNvPr id="10" name="Agrupar 9">
+            <a:extLst>
+              <a:ext uri="{FF2B5EF4-FFF2-40B4-BE49-F238E27FC236}">
+                <a16:creationId xmlns:a16="http://schemas.microsoft.com/office/drawing/2014/main" id="{DA60E349-63E6-2906-51B0-425F847DE722}"/>
+              </a:ext>
+            </a:extLst>
+          </p:cNvPr>
+          <p:cNvGrpSpPr/>
+          <p:nvPr/>
+        </p:nvGrpSpPr>
+        <p:grpSpPr>
+          <a:xfrm>
+            <a:off x="4739781" y="3585812"/>
+            <a:ext cx="7452219" cy="3272188"/>
+            <a:chOff x="4739781" y="3585812"/>
+            <a:chExt cx="7452219" cy="3272188"/>
+          </a:xfrm>
+        </p:grpSpPr>
+        <p:pic>
+          <p:nvPicPr>
+            <p:cNvPr id="7" name="Imagem 6">
+              <a:extLst>
+                <a:ext uri="{FF2B5EF4-FFF2-40B4-BE49-F238E27FC236}">
+                  <a16:creationId xmlns:a16="http://schemas.microsoft.com/office/drawing/2014/main" id="{446EB5F3-BBDC-7AAB-B349-2E36C8C15925}"/>
+                </a:ext>
+              </a:extLst>
+            </p:cNvPr>
+            <p:cNvPicPr>
+              <a:picLocks noChangeAspect="1"/>
+            </p:cNvPicPr>
+            <p:nvPr/>
+          </p:nvPicPr>
+          <p:blipFill>
+            <a:blip r:embed="rId3"/>
+            <a:stretch>
+              <a:fillRect/>
+            </a:stretch>
+          </p:blipFill>
+          <p:spPr>
+            <a:xfrm>
+              <a:off x="5492514" y="4013377"/>
+              <a:ext cx="6699486" cy="2844623"/>
+            </a:xfrm>
+            <a:prstGeom prst="rect">
+              <a:avLst/>
+            </a:prstGeom>
+            <a:effectLst>
+              <a:outerShdw blurRad="50800" dist="50800" dir="5400000" algn="ctr" rotWithShape="0">
+                <a:srgbClr val="000000"/>
+              </a:outerShdw>
+            </a:effectLst>
+          </p:spPr>
+        </p:pic>
+        <p:sp>
+          <p:nvSpPr>
+            <p:cNvPr id="8" name="Retângulo 7">
+              <a:extLst>
+                <a:ext uri="{FF2B5EF4-FFF2-40B4-BE49-F238E27FC236}">
+                  <a16:creationId xmlns:a16="http://schemas.microsoft.com/office/drawing/2014/main" id="{E2EF6531-15C5-5472-F867-A3F5345ABB81}"/>
+                </a:ext>
+              </a:extLst>
+            </p:cNvPr>
+            <p:cNvSpPr/>
+            <p:nvPr/>
+          </p:nvSpPr>
+          <p:spPr>
+            <a:xfrm>
+              <a:off x="4739781" y="4013377"/>
+              <a:ext cx="1104550" cy="2844623"/>
+            </a:xfrm>
+            <a:prstGeom prst="rect">
+              <a:avLst/>
+            </a:prstGeom>
+            <a:solidFill>
+              <a:schemeClr val="bg1"/>
+            </a:solidFill>
+            <a:ln>
+              <a:solidFill>
+                <a:schemeClr val="bg1"/>
+              </a:solidFill>
+            </a:ln>
+          </p:spPr>
+          <p:style>
+            <a:lnRef idx="2">
+              <a:schemeClr val="accent1">
+                <a:shade val="15000"/>
+              </a:schemeClr>
+            </a:lnRef>
+            <a:fillRef idx="1">
+              <a:schemeClr val="accent1"/>
+            </a:fillRef>
+            <a:effectRef idx="0">
+              <a:schemeClr val="accent1"/>
+            </a:effectRef>
+            <a:fontRef idx="minor">
+              <a:schemeClr val="lt1"/>
+            </a:fontRef>
+          </p:style>
+          <p:txBody>
+            <a:bodyPr rtlCol="0" anchor="ctr"/>
+            <a:lstStyle/>
+            <a:p>
+              <a:pPr algn="ctr"/>
+              <a:endParaRPr lang="pt-BR"/>
+            </a:p>
+          </p:txBody>
+        </p:sp>
+        <p:sp>
+          <p:nvSpPr>
+            <p:cNvPr id="9" name="Retângulo 8">
+              <a:extLst>
+                <a:ext uri="{FF2B5EF4-FFF2-40B4-BE49-F238E27FC236}">
+                  <a16:creationId xmlns:a16="http://schemas.microsoft.com/office/drawing/2014/main" id="{0389689D-76E3-EA5B-935A-00EA4359E2CF}"/>
+                </a:ext>
+              </a:extLst>
+            </p:cNvPr>
+            <p:cNvSpPr/>
+            <p:nvPr/>
+          </p:nvSpPr>
+          <p:spPr>
+            <a:xfrm>
+              <a:off x="5292056" y="3585812"/>
+              <a:ext cx="4453856" cy="1078467"/>
+            </a:xfrm>
+            <a:prstGeom prst="rect">
+              <a:avLst/>
+            </a:prstGeom>
+            <a:solidFill>
+              <a:schemeClr val="bg1"/>
+            </a:solidFill>
+            <a:ln>
+              <a:solidFill>
+                <a:schemeClr val="bg1"/>
+              </a:solidFill>
+            </a:ln>
+          </p:spPr>
+          <p:style>
+            <a:lnRef idx="2">
+              <a:schemeClr val="accent1">
+                <a:shade val="15000"/>
+              </a:schemeClr>
+            </a:lnRef>
+            <a:fillRef idx="1">
+              <a:schemeClr val="accent1"/>
+            </a:fillRef>
+            <a:effectRef idx="0">
+              <a:schemeClr val="accent1"/>
+            </a:effectRef>
+            <a:fontRef idx="minor">
+              <a:schemeClr val="lt1"/>
+            </a:fontRef>
+          </p:style>
+          <p:txBody>
+            <a:bodyPr rtlCol="0" anchor="ctr"/>
+            <a:lstStyle/>
+            <a:p>
+              <a:pPr algn="ctr"/>
+              <a:endParaRPr lang="pt-BR"/>
+            </a:p>
+          </p:txBody>
+        </p:sp>
+      </p:grpSp>
+      <p:sp>
+        <p:nvSpPr>
+          <p:cNvPr id="13" name="Rectangle 1">
+            <a:extLst>
+              <a:ext uri="{FF2B5EF4-FFF2-40B4-BE49-F238E27FC236}">
+                <a16:creationId xmlns:a16="http://schemas.microsoft.com/office/drawing/2014/main" id="{C52BA4C7-0F04-69A4-07E7-9F09201EF58E}"/>
+              </a:ext>
+            </a:extLst>
+          </p:cNvPr>
+          <p:cNvSpPr>
+            <a:spLocks noGrp="1" noChangeArrowheads="1"/>
+          </p:cNvSpPr>
+          <p:nvPr>
+            <p:ph idx="1"/>
+          </p:nvPr>
+        </p:nvSpPr>
+        <p:spPr bwMode="auto">
+          <a:xfrm>
+            <a:off x="838200" y="2050682"/>
+            <a:ext cx="10515600" cy="4462760"/>
+          </a:xfrm>
+          <a:prstGeom prst="rect">
+            <a:avLst/>
+          </a:prstGeom>
+          <a:noFill/>
+          <a:ln>
+            <a:noFill/>
+          </a:ln>
+          <a:effectLst/>
+          <a:extLst>
+            <a:ext uri="{909E8E84-426E-40DD-AFC4-6F175D3DCCD1}">
+              <a14:hiddenFill xmlns:a14="http://schemas.microsoft.com/office/drawing/2010/main">
+                <a:solidFill>
+                  <a:schemeClr val="accent1"/>
+                </a:solidFill>
+              </a14:hiddenFill>
+            </a:ext>
+            <a:ext uri="{91240B29-F687-4F45-9708-019B960494DF}">
+              <a14:hiddenLine xmlns:a14="http://schemas.microsoft.com/office/drawing/2010/main" w="9525">
+                <a:solidFill>
+                  <a:schemeClr val="tx1"/>
+                </a:solidFill>
+                <a:miter lim="800000"/>
+                <a:headEnd/>
+                <a:tailEnd/>
+              </a14:hiddenLine>
+            </a:ext>
+            <a:ext uri="{AF507438-7753-43E0-B8FC-AC1667EBCBE1}">
+              <a14:hiddenEffects xmlns:a14="http://schemas.microsoft.com/office/drawing/2010/main">
+                <a:effectLst>
+                  <a:outerShdw dist="35921" dir="2700000" algn="ctr" rotWithShape="0">
+                    <a:schemeClr val="bg2"/>
+                  </a:outerShdw>
+                </a:effectLst>
+              </a14:hiddenEffects>
+            </a:ext>
+          </a:extLst>
+        </p:spPr>
+        <p:txBody>
+          <a:bodyPr vert="horz" wrap="square" lIns="91440" tIns="45720" rIns="91440" bIns="45720" numCol="1" anchor="ctr" anchorCtr="0" compatLnSpc="1">
+            <a:prstTxWarp prst="textNoShape">
+              <a:avLst/>
+            </a:prstTxWarp>
+            <a:spAutoFit/>
+          </a:bodyPr>
+          <a:lstStyle/>
+          <a:p>
+            <a:pPr marL="0" indent="0" eaLnBrk="0" fontAlgn="base" hangingPunct="0">
+              <a:lnSpc>
+                <a:spcPct val="100000"/>
+              </a:lnSpc>
+              <a:spcBef>
+                <a:spcPct val="0"/>
+              </a:spcBef>
+              <a:spcAft>
+                <a:spcPct val="0"/>
+              </a:spcAft>
+              <a:buFontTx/>
+              <a:buChar char="•"/>
+            </a:pPr>
+            <a:r>
+              <a:rPr kumimoji="0" lang="pt-BR" altLang="pt-BR" sz="2400" b="1" i="0" u="none" strike="noStrike" cap="none" normalizeH="0" baseline="0" dirty="0">
+                <a:ln>
+                  <a:noFill/>
+                </a:ln>
+                <a:solidFill>
+                  <a:schemeClr val="tx1"/>
+                </a:solidFill>
+                <a:effectLst/>
+                <a:latin typeface="Google Sans Text"/>
+              </a:rPr>
+              <a:t> A Invariância do </a:t>
+            </a:r>
+            <a:r>
+              <a:rPr kumimoji="0" lang="pt-BR" altLang="pt-BR" sz="2400" b="1" i="0" u="none" strike="noStrike" cap="none" normalizeH="0" baseline="0" dirty="0" err="1">
+                <a:ln>
+                  <a:noFill/>
+                </a:ln>
+                <a:solidFill>
+                  <a:schemeClr val="tx1"/>
+                </a:solidFill>
+                <a:effectLst/>
+                <a:latin typeface="Google Sans Text"/>
+              </a:rPr>
+              <a:t>Selection</a:t>
+            </a:r>
+            <a:r>
+              <a:rPr kumimoji="0" lang="pt-BR" altLang="pt-BR" sz="2400" b="1" i="0" u="none" strike="noStrike" cap="none" normalizeH="0" baseline="0" dirty="0">
+                <a:ln>
+                  <a:noFill/>
+                </a:ln>
+                <a:solidFill>
+                  <a:schemeClr val="tx1"/>
+                </a:solidFill>
+                <a:effectLst/>
+                <a:latin typeface="Google Sans Text"/>
+              </a:rPr>
+              <a:t> </a:t>
+            </a:r>
+            <a:r>
+              <a:rPr kumimoji="0" lang="pt-BR" altLang="pt-BR" sz="2400" b="1" i="0" u="none" strike="noStrike" cap="none" normalizeH="0" baseline="0" dirty="0" err="1">
+                <a:ln>
+                  <a:noFill/>
+                </a:ln>
+                <a:solidFill>
+                  <a:schemeClr val="tx1"/>
+                </a:solidFill>
+                <a:effectLst/>
+                <a:latin typeface="Google Sans Text"/>
+              </a:rPr>
+              <a:t>Sort</a:t>
+            </a:r>
+            <a:r>
+              <a:rPr kumimoji="0" lang="pt-BR" altLang="pt-BR" sz="2400" b="1" i="0" u="none" strike="noStrike" cap="none" normalizeH="0" baseline="0" dirty="0">
+                <a:ln>
+                  <a:noFill/>
+                </a:ln>
+                <a:solidFill>
+                  <a:schemeClr val="tx1"/>
+                </a:solidFill>
+                <a:effectLst/>
+                <a:latin typeface="Google Sans Text"/>
+              </a:rPr>
+              <a:t>:</a:t>
+            </a:r>
+            <a:r>
+              <a:rPr kumimoji="0" lang="pt-BR" altLang="pt-BR" sz="2400" b="0" i="0" u="none" strike="noStrike" cap="none" normalizeH="0" baseline="0" dirty="0">
+                <a:ln>
+                  <a:noFill/>
+                </a:ln>
+                <a:solidFill>
+                  <a:schemeClr val="tx1"/>
+                </a:solidFill>
+                <a:effectLst/>
+                <a:latin typeface="Google Sans Text"/>
+              </a:rPr>
+              <a:t> Preso na complexidade </a:t>
+            </a:r>
+            <a:r>
+              <a:rPr kumimoji="0" lang="pt-BR" altLang="pt-BR" sz="3600" b="0" i="0" u="none" strike="noStrike" cap="none" normalizeH="0" baseline="0" dirty="0">
+                <a:ln>
+                  <a:noFill/>
+                </a:ln>
+                <a:solidFill>
+                  <a:schemeClr val="tx1"/>
+                </a:solidFill>
+                <a:effectLst/>
+                <a:latin typeface="Times New Roman" panose="02020603050405020304" pitchFamily="18" charset="0"/>
+                <a:cs typeface="Times New Roman" panose="02020603050405020304" pitchFamily="18" charset="0"/>
+              </a:rPr>
+              <a:t>ɵ</a:t>
+            </a:r>
+            <a:r>
+              <a:rPr kumimoji="0" lang="pt-BR" altLang="pt-BR" sz="2400" b="0" i="0" u="none" strike="noStrike" cap="none" normalizeH="0" baseline="0" dirty="0">
+                <a:ln>
+                  <a:noFill/>
+                </a:ln>
+                <a:solidFill>
+                  <a:schemeClr val="tx1"/>
+                </a:solidFill>
+                <a:effectLst/>
+                <a:latin typeface="Google Sans Text"/>
+              </a:rPr>
+              <a:t>(n</a:t>
+            </a:r>
+            <a:r>
+              <a:rPr kumimoji="0" lang="pt-BR" altLang="pt-BR" sz="2400" b="0" i="0" u="none" strike="noStrike" cap="none" normalizeH="0" baseline="30000" dirty="0">
+                <a:ln>
+                  <a:noFill/>
+                </a:ln>
+                <a:solidFill>
+                  <a:schemeClr val="tx1"/>
+                </a:solidFill>
+                <a:effectLst/>
+                <a:latin typeface="Google Sans Text"/>
+              </a:rPr>
+              <a:t>2</a:t>
+            </a:r>
+            <a:r>
+              <a:rPr kumimoji="0" lang="pt-BR" altLang="pt-BR" sz="2400" b="0" i="0" u="none" strike="noStrike" cap="none" normalizeH="0" baseline="0" dirty="0">
+                <a:ln>
+                  <a:noFill/>
+                </a:ln>
+                <a:solidFill>
+                  <a:schemeClr val="tx1"/>
+                </a:solidFill>
+                <a:effectLst/>
+                <a:latin typeface="Google Sans Text"/>
+              </a:rPr>
+              <a:t>), não se beneficia de vetores ordenados (tempo constante nos 3 cenários)</a:t>
+            </a:r>
+          </a:p>
+          <a:p>
+            <a:pPr marL="0" indent="0" eaLnBrk="0" fontAlgn="base" hangingPunct="0">
+              <a:lnSpc>
+                <a:spcPct val="100000"/>
+              </a:lnSpc>
+              <a:spcBef>
+                <a:spcPct val="0"/>
+              </a:spcBef>
+              <a:spcAft>
+                <a:spcPct val="0"/>
+              </a:spcAft>
+              <a:buFontTx/>
+              <a:buChar char="•"/>
+            </a:pPr>
+            <a:endParaRPr kumimoji="0" lang="pt-BR" altLang="pt-BR" sz="2400" b="0" i="0" u="none" strike="noStrike" cap="none" normalizeH="0" baseline="0" dirty="0">
+              <a:ln>
+                <a:noFill/>
+              </a:ln>
+              <a:solidFill>
+                <a:schemeClr val="tx1"/>
+              </a:solidFill>
+              <a:effectLst/>
+              <a:latin typeface="Google Sans Text"/>
+            </a:endParaRPr>
+          </a:p>
+          <a:p>
+            <a:pPr marL="0" indent="0" eaLnBrk="0" fontAlgn="base" hangingPunct="0">
+              <a:lnSpc>
+                <a:spcPct val="100000"/>
+              </a:lnSpc>
+              <a:spcBef>
+                <a:spcPct val="0"/>
+              </a:spcBef>
+              <a:spcAft>
+                <a:spcPct val="0"/>
+              </a:spcAft>
+              <a:buFontTx/>
+              <a:buChar char="•"/>
+            </a:pPr>
+            <a:r>
+              <a:rPr kumimoji="0" lang="pt-BR" altLang="pt-BR" sz="2400" b="1" i="0" u="none" strike="noStrike" cap="none" normalizeH="0" baseline="0" dirty="0">
+                <a:ln>
+                  <a:noFill/>
+                </a:ln>
+                <a:solidFill>
+                  <a:schemeClr val="tx1"/>
+                </a:solidFill>
+                <a:effectLst/>
+                <a:latin typeface="Google Sans Text"/>
+              </a:rPr>
+              <a:t> O Comportamento Adaptativo do </a:t>
+            </a:r>
+            <a:r>
+              <a:rPr kumimoji="0" lang="pt-BR" altLang="pt-BR" sz="2400" b="1" i="0" u="none" strike="noStrike" cap="none" normalizeH="0" baseline="0" dirty="0" err="1">
+                <a:ln>
+                  <a:noFill/>
+                </a:ln>
+                <a:solidFill>
+                  <a:schemeClr val="tx1"/>
+                </a:solidFill>
+                <a:effectLst/>
+                <a:latin typeface="Google Sans Text"/>
+              </a:rPr>
+              <a:t>Insertion</a:t>
+            </a:r>
+            <a:r>
+              <a:rPr kumimoji="0" lang="pt-BR" altLang="pt-BR" sz="2400" b="1" i="0" u="none" strike="noStrike" cap="none" normalizeH="0" baseline="0" dirty="0">
+                <a:ln>
+                  <a:noFill/>
+                </a:ln>
+                <a:solidFill>
+                  <a:schemeClr val="tx1"/>
+                </a:solidFill>
+                <a:effectLst/>
+                <a:latin typeface="Google Sans Text"/>
+              </a:rPr>
+              <a:t> </a:t>
+            </a:r>
+            <a:r>
+              <a:rPr kumimoji="0" lang="pt-BR" altLang="pt-BR" sz="2400" b="1" i="0" u="none" strike="noStrike" cap="none" normalizeH="0" baseline="0" dirty="0" err="1">
+                <a:ln>
+                  <a:noFill/>
+                </a:ln>
+                <a:solidFill>
+                  <a:schemeClr val="tx1"/>
+                </a:solidFill>
+                <a:effectLst/>
+                <a:latin typeface="Google Sans Text"/>
+              </a:rPr>
+              <a:t>Sort</a:t>
+            </a:r>
+            <a:r>
+              <a:rPr kumimoji="0" lang="pt-BR" altLang="pt-BR" sz="2400" b="1" i="0" u="none" strike="noStrike" cap="none" normalizeH="0" baseline="0" dirty="0">
+                <a:ln>
+                  <a:noFill/>
+                </a:ln>
+                <a:solidFill>
+                  <a:schemeClr val="tx1"/>
+                </a:solidFill>
+                <a:effectLst/>
+                <a:latin typeface="Google Sans Text"/>
+              </a:rPr>
+              <a:t>:</a:t>
+            </a:r>
+            <a:r>
+              <a:rPr kumimoji="0" lang="pt-BR" altLang="pt-BR" sz="2400" b="0" i="0" u="none" strike="noStrike" cap="none" normalizeH="0" baseline="0" dirty="0">
+                <a:ln>
+                  <a:noFill/>
+                </a:ln>
+                <a:solidFill>
+                  <a:schemeClr val="tx1"/>
+                </a:solidFill>
+                <a:effectLst/>
+                <a:latin typeface="Google Sans Text"/>
+              </a:rPr>
+              <a:t> Atinge o limite inferior garantido de </a:t>
+            </a:r>
+            <a:r>
+              <a:rPr kumimoji="0" lang="el-GR" altLang="pt-BR" sz="2400" b="0" i="0" u="none" strike="noStrike" cap="none" normalizeH="0" baseline="0" dirty="0">
+                <a:ln>
+                  <a:noFill/>
+                </a:ln>
+                <a:solidFill>
+                  <a:schemeClr val="tx1"/>
+                </a:solidFill>
+                <a:effectLst/>
+                <a:latin typeface="Times New Roman" panose="02020603050405020304" pitchFamily="18" charset="0"/>
+                <a:cs typeface="Times New Roman" panose="02020603050405020304" pitchFamily="18" charset="0"/>
+              </a:rPr>
+              <a:t>Ω</a:t>
+            </a:r>
+            <a:r>
+              <a:rPr kumimoji="0" lang="pt-BR" altLang="pt-BR" sz="2400" b="0" i="0" u="none" strike="noStrike" cap="none" normalizeH="0" baseline="0" dirty="0">
+                <a:ln>
+                  <a:noFill/>
+                </a:ln>
+                <a:solidFill>
+                  <a:schemeClr val="tx1"/>
+                </a:solidFill>
+                <a:effectLst/>
+                <a:latin typeface="Google Sans Text"/>
+              </a:rPr>
+              <a:t>(n) no melhor caso (~0.00s), mas sofre severa punição geométrica no pior caso.</a:t>
+            </a:r>
+          </a:p>
+          <a:p>
+            <a:pPr marL="0" indent="0" eaLnBrk="0" fontAlgn="base" hangingPunct="0">
+              <a:lnSpc>
+                <a:spcPct val="100000"/>
+              </a:lnSpc>
+              <a:spcBef>
+                <a:spcPct val="0"/>
+              </a:spcBef>
+              <a:spcAft>
+                <a:spcPct val="0"/>
+              </a:spcAft>
+              <a:buFontTx/>
+              <a:buChar char="•"/>
+            </a:pPr>
+            <a:endParaRPr kumimoji="0" lang="pt-BR" altLang="pt-BR" sz="2400" b="0" i="0" u="none" strike="noStrike" cap="none" normalizeH="0" baseline="0" dirty="0">
+              <a:ln>
+                <a:noFill/>
+              </a:ln>
+              <a:solidFill>
+                <a:schemeClr val="tx1"/>
+              </a:solidFill>
+              <a:effectLst/>
+              <a:latin typeface="Google Sans Text"/>
+            </a:endParaRPr>
+          </a:p>
+          <a:p>
+            <a:pPr marL="0" indent="0" eaLnBrk="0" fontAlgn="base" hangingPunct="0">
+              <a:lnSpc>
+                <a:spcPct val="100000"/>
+              </a:lnSpc>
+              <a:spcBef>
+                <a:spcPct val="0"/>
+              </a:spcBef>
+              <a:spcAft>
+                <a:spcPct val="0"/>
+              </a:spcAft>
+              <a:buFontTx/>
+              <a:buChar char="•"/>
+            </a:pPr>
+            <a:r>
+              <a:rPr lang="pt-BR" altLang="pt-BR" sz="2400" b="1" dirty="0">
+                <a:latin typeface="Google Sans Text"/>
+              </a:rPr>
+              <a:t>Overhead do Interpretador </a:t>
+            </a:r>
+            <a:r>
+              <a:rPr lang="pt-BR" altLang="pt-BR" sz="2400" dirty="0">
+                <a:latin typeface="Google Sans Text"/>
+              </a:rPr>
+              <a:t>(</a:t>
+            </a:r>
+            <a:r>
+              <a:rPr lang="pt-BR" altLang="pt-BR" sz="2400" dirty="0" err="1">
+                <a:latin typeface="Google Sans Text"/>
+              </a:rPr>
+              <a:t>CPython</a:t>
+            </a:r>
+            <a:r>
+              <a:rPr lang="pt-BR" altLang="pt-BR" sz="2400" dirty="0">
+                <a:latin typeface="Google Sans Text"/>
+              </a:rPr>
+              <a:t>):</a:t>
+            </a:r>
+          </a:p>
+          <a:p>
+            <a:pPr marL="457200" lvl="1" indent="0" eaLnBrk="0" fontAlgn="base" hangingPunct="0">
+              <a:lnSpc>
+                <a:spcPct val="100000"/>
+              </a:lnSpc>
+              <a:spcBef>
+                <a:spcPct val="0"/>
+              </a:spcBef>
+              <a:spcAft>
+                <a:spcPct val="0"/>
+              </a:spcAft>
+              <a:buFontTx/>
+              <a:buChar char="•"/>
+            </a:pPr>
+            <a:r>
+              <a:rPr lang="pt-BR" altLang="pt-BR" sz="2000" dirty="0">
+                <a:latin typeface="Google Sans Text"/>
+              </a:rPr>
+              <a:t> Os tempos brutos refletem não apenas o algoritmo, mas as limitações da linguagem: tipagem dinâmica, custo do </a:t>
+            </a:r>
+            <a:r>
+              <a:rPr lang="pt-BR" altLang="pt-BR" sz="2000" i="1" dirty="0" err="1">
+                <a:latin typeface="Google Sans Text"/>
+              </a:rPr>
+              <a:t>call</a:t>
+            </a:r>
+            <a:r>
+              <a:rPr lang="pt-BR" altLang="pt-BR" sz="2000" i="1" dirty="0">
+                <a:latin typeface="Google Sans Text"/>
+              </a:rPr>
+              <a:t> </a:t>
+            </a:r>
+            <a:r>
+              <a:rPr lang="pt-BR" altLang="pt-BR" sz="2000" i="1" dirty="0" err="1">
+                <a:latin typeface="Google Sans Text"/>
+              </a:rPr>
+              <a:t>stack</a:t>
+            </a:r>
+            <a:r>
+              <a:rPr lang="pt-BR" altLang="pt-BR" sz="2000" i="1" dirty="0">
+                <a:latin typeface="Google Sans Text"/>
+              </a:rPr>
+              <a:t> </a:t>
+            </a:r>
+            <a:r>
+              <a:rPr lang="pt-BR" altLang="pt-BR" sz="2000" dirty="0">
+                <a:latin typeface="Google Sans Text"/>
+              </a:rPr>
+              <a:t>(recursão profunda) e laços interpretados.</a:t>
+            </a:r>
+          </a:p>
+          <a:p>
+            <a:pPr marL="457200" lvl="1" indent="0" eaLnBrk="0" fontAlgn="base" hangingPunct="0">
+              <a:lnSpc>
+                <a:spcPct val="100000"/>
+              </a:lnSpc>
+              <a:spcBef>
+                <a:spcPct val="0"/>
+              </a:spcBef>
+              <a:spcAft>
+                <a:spcPct val="0"/>
+              </a:spcAft>
+              <a:buFontTx/>
+              <a:buChar char="•"/>
+            </a:pPr>
+            <a:r>
+              <a:rPr lang="pt-BR" altLang="pt-BR" sz="2000" dirty="0">
+                <a:latin typeface="Google Sans Text"/>
+              </a:rPr>
+              <a:t> O </a:t>
+            </a:r>
+            <a:r>
+              <a:rPr lang="pt-BR" altLang="pt-BR" sz="2000" dirty="0" err="1">
+                <a:latin typeface="Google Sans Text"/>
+              </a:rPr>
+              <a:t>list.sort</a:t>
+            </a:r>
+            <a:r>
+              <a:rPr lang="pt-BR" altLang="pt-BR" sz="2000" dirty="0">
+                <a:latin typeface="Google Sans Text"/>
+              </a:rPr>
+              <a:t>() nativo (</a:t>
+            </a:r>
+            <a:r>
+              <a:rPr lang="pt-BR" altLang="pt-BR" sz="2000" dirty="0" err="1">
+                <a:latin typeface="Google Sans Text"/>
+              </a:rPr>
+              <a:t>Timsort</a:t>
+            </a:r>
+            <a:r>
+              <a:rPr lang="pt-BR" altLang="pt-BR" sz="2000" dirty="0">
+                <a:latin typeface="Google Sans Text"/>
+              </a:rPr>
+              <a:t>) é exponencialmente mais rápido por ser compilado em C, delegando operações diretamente ao hardware.</a:t>
+            </a:r>
+            <a:endParaRPr kumimoji="0" lang="pt-BR" altLang="pt-BR" sz="1800" b="0" i="0" u="none" strike="noStrike" cap="none" normalizeH="0" baseline="0" dirty="0">
+              <a:ln>
+                <a:noFill/>
+              </a:ln>
+              <a:solidFill>
+                <a:schemeClr val="tx1"/>
+              </a:solidFill>
+              <a:effectLst/>
+              <a:latin typeface="Arial" panose="020B0604020202020204" pitchFamily="34" charset="0"/>
+            </a:endParaRPr>
+          </a:p>
+        </p:txBody>
+      </p:sp>
+      <p:sp>
+        <p:nvSpPr>
+          <p:cNvPr id="16" name="Título 1">
+            <a:extLst>
+              <a:ext uri="{FF2B5EF4-FFF2-40B4-BE49-F238E27FC236}">
+                <a16:creationId xmlns:a16="http://schemas.microsoft.com/office/drawing/2014/main" id="{6869FB9E-D0C9-D809-850E-B3E4A131FF54}"/>
+              </a:ext>
+            </a:extLst>
+          </p:cNvPr>
+          <p:cNvSpPr>
+            <a:spLocks noGrp="1"/>
+          </p:cNvSpPr>
+          <p:nvPr>
+            <p:ph type="title"/>
+          </p:nvPr>
+        </p:nvSpPr>
+        <p:spPr>
+          <a:xfrm>
+            <a:off x="474860" y="1162843"/>
+            <a:ext cx="10515600" cy="1325563"/>
+          </a:xfrm>
+        </p:spPr>
+        <p:txBody>
+          <a:bodyPr>
+            <a:normAutofit/>
+          </a:bodyPr>
+          <a:lstStyle/>
+          <a:p>
+            <a:r>
+              <a:rPr lang="pt-BR" sz="2800" b="1" dirty="0">
+                <a:latin typeface="+mn-lt"/>
+              </a:rPr>
+              <a:t>O Desafio da Busca por Atributos Secundários</a:t>
+            </a:r>
+          </a:p>
+        </p:txBody>
+      </p:sp>
+      <p:sp>
+        <p:nvSpPr>
+          <p:cNvPr id="2" name="Rectangle 1">
+            <a:extLst>
+              <a:ext uri="{FF2B5EF4-FFF2-40B4-BE49-F238E27FC236}">
+                <a16:creationId xmlns:a16="http://schemas.microsoft.com/office/drawing/2014/main" id="{EA986490-0933-6260-C084-393D07EFBEC4}"/>
+              </a:ext>
+            </a:extLst>
+          </p:cNvPr>
+          <p:cNvSpPr>
+            <a:spLocks noChangeArrowheads="1"/>
+          </p:cNvSpPr>
+          <p:nvPr/>
+        </p:nvSpPr>
+        <p:spPr bwMode="auto">
+          <a:xfrm>
+            <a:off x="0" y="-161582"/>
+            <a:ext cx="184731" cy="323165"/>
+          </a:xfrm>
+          <a:prstGeom prst="rect">
+            <a:avLst/>
+          </a:prstGeom>
+          <a:noFill/>
+          <a:ln>
+            <a:noFill/>
+          </a:ln>
+          <a:effectLst/>
+          <a:extLst>
+            <a:ext uri="{909E8E84-426E-40DD-AFC4-6F175D3DCCD1}">
+              <a14:hiddenFill xmlns:a14="http://schemas.microsoft.com/office/drawing/2010/main">
+                <a:solidFill>
+                  <a:schemeClr val="accent1"/>
+                </a:solidFill>
+              </a14:hiddenFill>
+            </a:ext>
+            <a:ext uri="{91240B29-F687-4F45-9708-019B960494DF}">
+              <a14:hiddenLine xmlns:a14="http://schemas.microsoft.com/office/drawing/2010/main" w="9525">
+                <a:solidFill>
+                  <a:schemeClr val="tx1"/>
+                </a:solidFill>
+                <a:miter lim="800000"/>
+                <a:headEnd/>
+                <a:tailEnd/>
+              </a14:hiddenLine>
+            </a:ext>
+            <a:ext uri="{AF507438-7753-43E0-B8FC-AC1667EBCBE1}">
+              <a14:hiddenEffects xmlns:a14="http://schemas.microsoft.com/office/drawing/2010/main">
+                <a:effectLst>
+                  <a:outerShdw dist="35921" dir="2700000" algn="ctr" rotWithShape="0">
+                    <a:schemeClr val="bg2"/>
+                  </a:outerShdw>
+                </a:effectLst>
+              </a14:hiddenEffects>
+            </a:ext>
+          </a:extLst>
+        </p:spPr>
+        <p:txBody>
+          <a:bodyPr vert="horz" wrap="none" lIns="91440" tIns="0" rIns="91440" bIns="45720" numCol="1" anchor="ctr" anchorCtr="0" compatLnSpc="1">
+            <a:prstTxWarp prst="textNoShape">
+              <a:avLst/>
+            </a:prstTxWarp>
+            <a:spAutoFit/>
+          </a:bodyPr>
+          <a:lstStyle/>
+          <a:p>
+            <a:pPr marL="0" marR="0" lvl="0" indent="0" algn="l" defTabSz="914400" rtl="0" eaLnBrk="0" fontAlgn="base" latinLnBrk="0" hangingPunct="0">
+              <a:lnSpc>
+                <a:spcPct val="100000"/>
+              </a:lnSpc>
+              <a:spcBef>
+                <a:spcPct val="0"/>
+              </a:spcBef>
+              <a:spcAft>
+                <a:spcPct val="0"/>
+              </a:spcAft>
+              <a:buClrTx/>
+              <a:buSzTx/>
+              <a:buFontTx/>
+              <a:buNone/>
+              <a:tabLst/>
+            </a:pPr>
+            <a:endParaRPr kumimoji="0" lang="pt-BR" altLang="pt-BR" sz="1800" b="0" i="0" u="none" strike="noStrike" cap="none" normalizeH="0" baseline="0" dirty="0">
+              <a:ln>
+                <a:noFill/>
+              </a:ln>
+              <a:solidFill>
+                <a:schemeClr val="tx1"/>
+              </a:solidFill>
+              <a:effectLst/>
+              <a:latin typeface="Arial" panose="020B0604020202020204" pitchFamily="34" charset="0"/>
+            </a:endParaRPr>
+          </a:p>
+        </p:txBody>
+      </p:sp>
+    </p:spTree>
+    <p:extLst>
+      <p:ext uri="{BB962C8B-B14F-4D97-AF65-F5344CB8AC3E}">
+        <p14:creationId xmlns:p14="http://schemas.microsoft.com/office/powerpoint/2010/main" val="1275068660"/>
+      </p:ext>
+    </p:extLst>
+  </p:cSld>
+  <p:clrMapOvr>
+    <a:masterClrMapping/>
+  </p:clrMapOvr>
+</p:sld>
+</file>
+
+<file path=ppt/slides/slide14.xml><?xml version="1.0" encoding="utf-8"?>
+<p:sld xmlns:a="http://schemas.openxmlformats.org/drawingml/2006/main" xmlns:r="http://schemas.openxmlformats.org/officeDocument/2006/relationships" xmlns:p="http://schemas.openxmlformats.org/presentationml/2006/main">
+  <p:cSld>
+    <p:spTree>
+      <p:nvGrpSpPr>
+        <p:cNvPr id="1" name="">
+          <a:extLst>
+            <a:ext uri="{FF2B5EF4-FFF2-40B4-BE49-F238E27FC236}">
+              <a16:creationId xmlns:a16="http://schemas.microsoft.com/office/drawing/2014/main" id="{13C95F87-6B60-EE45-2914-BAD7CAF0DEEC}"/>
+            </a:ext>
+          </a:extLst>
+        </p:cNvPr>
+        <p:cNvGrpSpPr/>
+        <p:nvPr/>
+      </p:nvGrpSpPr>
+      <p:grpSpPr>
+        <a:xfrm>
+          <a:off x="0" y="0"/>
+          <a:ext cx="0" cy="0"/>
+          <a:chOff x="0" y="0"/>
+          <a:chExt cx="0" cy="0"/>
+        </a:xfrm>
+      </p:grpSpPr>
+      <p:pic>
+        <p:nvPicPr>
+          <p:cNvPr id="5" name="Imagem 4">
+            <a:extLst>
+              <a:ext uri="{FF2B5EF4-FFF2-40B4-BE49-F238E27FC236}">
+                <a16:creationId xmlns:a16="http://schemas.microsoft.com/office/drawing/2014/main" id="{8B30A8A3-7ADD-27EF-13B1-FF41BB6FE57A}"/>
+              </a:ext>
+            </a:extLst>
+          </p:cNvPr>
+          <p:cNvPicPr>
+            <a:picLocks noChangeAspect="1"/>
+          </p:cNvPicPr>
+          <p:nvPr/>
+        </p:nvPicPr>
+        <p:blipFill>
+          <a:blip r:embed="rId2"/>
+          <a:stretch>
+            <a:fillRect/>
+          </a:stretch>
+        </p:blipFill>
+        <p:spPr>
+          <a:xfrm>
+            <a:off x="0" y="0"/>
+            <a:ext cx="12192000" cy="1398060"/>
+          </a:xfrm>
+          <a:prstGeom prst="rect">
+            <a:avLst/>
+          </a:prstGeom>
+        </p:spPr>
+      </p:pic>
+      <p:grpSp>
+        <p:nvGrpSpPr>
+          <p:cNvPr id="10" name="Agrupar 9">
+            <a:extLst>
+              <a:ext uri="{FF2B5EF4-FFF2-40B4-BE49-F238E27FC236}">
+                <a16:creationId xmlns:a16="http://schemas.microsoft.com/office/drawing/2014/main" id="{CF4293E8-8854-17B8-8D27-406A19442340}"/>
+              </a:ext>
+            </a:extLst>
+          </p:cNvPr>
+          <p:cNvGrpSpPr/>
+          <p:nvPr/>
+        </p:nvGrpSpPr>
+        <p:grpSpPr>
+          <a:xfrm>
+            <a:off x="4739781" y="3585812"/>
+            <a:ext cx="7452219" cy="3272188"/>
+            <a:chOff x="4739781" y="3585812"/>
+            <a:chExt cx="7452219" cy="3272188"/>
+          </a:xfrm>
+        </p:grpSpPr>
+        <p:pic>
+          <p:nvPicPr>
+            <p:cNvPr id="7" name="Imagem 6">
+              <a:extLst>
+                <a:ext uri="{FF2B5EF4-FFF2-40B4-BE49-F238E27FC236}">
+                  <a16:creationId xmlns:a16="http://schemas.microsoft.com/office/drawing/2014/main" id="{56DF490E-1459-1718-A3A3-2C295272AE46}"/>
+                </a:ext>
+              </a:extLst>
+            </p:cNvPr>
+            <p:cNvPicPr>
+              <a:picLocks noChangeAspect="1"/>
+            </p:cNvPicPr>
+            <p:nvPr/>
+          </p:nvPicPr>
+          <p:blipFill>
+            <a:blip r:embed="rId3"/>
+            <a:stretch>
+              <a:fillRect/>
+            </a:stretch>
+          </p:blipFill>
+          <p:spPr>
+            <a:xfrm>
+              <a:off x="5492514" y="4013377"/>
+              <a:ext cx="6699486" cy="2844623"/>
+            </a:xfrm>
+            <a:prstGeom prst="rect">
+              <a:avLst/>
+            </a:prstGeom>
+            <a:effectLst>
+              <a:outerShdw blurRad="50800" dist="50800" dir="5400000" algn="ctr" rotWithShape="0">
+                <a:srgbClr val="000000"/>
+              </a:outerShdw>
+            </a:effectLst>
+          </p:spPr>
+        </p:pic>
+        <p:sp>
+          <p:nvSpPr>
+            <p:cNvPr id="8" name="Retângulo 7">
+              <a:extLst>
+                <a:ext uri="{FF2B5EF4-FFF2-40B4-BE49-F238E27FC236}">
+                  <a16:creationId xmlns:a16="http://schemas.microsoft.com/office/drawing/2014/main" id="{F037CCE3-FCCF-12FF-E95C-10BDAFC4BCE0}"/>
+                </a:ext>
+              </a:extLst>
+            </p:cNvPr>
+            <p:cNvSpPr/>
+            <p:nvPr/>
+          </p:nvSpPr>
+          <p:spPr>
+            <a:xfrm>
+              <a:off x="4739781" y="4013377"/>
+              <a:ext cx="1104550" cy="2844623"/>
+            </a:xfrm>
+            <a:prstGeom prst="rect">
+              <a:avLst/>
+            </a:prstGeom>
+            <a:solidFill>
+              <a:schemeClr val="bg1"/>
+            </a:solidFill>
+            <a:ln>
+              <a:solidFill>
+                <a:schemeClr val="bg1"/>
+              </a:solidFill>
+            </a:ln>
+          </p:spPr>
+          <p:style>
+            <a:lnRef idx="2">
+              <a:schemeClr val="accent1">
+                <a:shade val="15000"/>
+              </a:schemeClr>
+            </a:lnRef>
+            <a:fillRef idx="1">
+              <a:schemeClr val="accent1"/>
+            </a:fillRef>
+            <a:effectRef idx="0">
+              <a:schemeClr val="accent1"/>
+            </a:effectRef>
+            <a:fontRef idx="minor">
+              <a:schemeClr val="lt1"/>
+            </a:fontRef>
+          </p:style>
+          <p:txBody>
+            <a:bodyPr rtlCol="0" anchor="ctr"/>
+            <a:lstStyle/>
+            <a:p>
+              <a:pPr algn="ctr"/>
+              <a:endParaRPr lang="pt-BR"/>
+            </a:p>
+          </p:txBody>
+        </p:sp>
+        <p:sp>
+          <p:nvSpPr>
+            <p:cNvPr id="9" name="Retângulo 8">
+              <a:extLst>
+                <a:ext uri="{FF2B5EF4-FFF2-40B4-BE49-F238E27FC236}">
+                  <a16:creationId xmlns:a16="http://schemas.microsoft.com/office/drawing/2014/main" id="{837FD02B-D0E3-74AF-79DA-0803F43558A7}"/>
+                </a:ext>
+              </a:extLst>
+            </p:cNvPr>
+            <p:cNvSpPr/>
+            <p:nvPr/>
+          </p:nvSpPr>
+          <p:spPr>
+            <a:xfrm>
+              <a:off x="5292056" y="3585812"/>
+              <a:ext cx="4453856" cy="1078467"/>
+            </a:xfrm>
+            <a:prstGeom prst="rect">
+              <a:avLst/>
+            </a:prstGeom>
+            <a:solidFill>
+              <a:schemeClr val="bg1"/>
+            </a:solidFill>
+            <a:ln>
+              <a:solidFill>
+                <a:schemeClr val="bg1"/>
+              </a:solidFill>
+            </a:ln>
+          </p:spPr>
+          <p:style>
+            <a:lnRef idx="2">
+              <a:schemeClr val="accent1">
+                <a:shade val="15000"/>
+              </a:schemeClr>
+            </a:lnRef>
+            <a:fillRef idx="1">
+              <a:schemeClr val="accent1"/>
+            </a:fillRef>
+            <a:effectRef idx="0">
+              <a:schemeClr val="accent1"/>
+            </a:effectRef>
+            <a:fontRef idx="minor">
+              <a:schemeClr val="lt1"/>
+            </a:fontRef>
+          </p:style>
+          <p:txBody>
+            <a:bodyPr rtlCol="0" anchor="ctr"/>
+            <a:lstStyle/>
+            <a:p>
+              <a:pPr algn="ctr"/>
+              <a:endParaRPr lang="pt-BR"/>
+            </a:p>
+          </p:txBody>
+        </p:sp>
+      </p:grpSp>
+      <p:sp>
+        <p:nvSpPr>
+          <p:cNvPr id="13" name="Rectangle 1">
+            <a:extLst>
+              <a:ext uri="{FF2B5EF4-FFF2-40B4-BE49-F238E27FC236}">
+                <a16:creationId xmlns:a16="http://schemas.microsoft.com/office/drawing/2014/main" id="{30424B3E-156F-8EA6-2CA3-BC4E581209A1}"/>
+              </a:ext>
+            </a:extLst>
+          </p:cNvPr>
+          <p:cNvSpPr>
+            <a:spLocks noGrp="1" noChangeArrowheads="1"/>
+          </p:cNvSpPr>
+          <p:nvPr>
+            <p:ph idx="1"/>
+          </p:nvPr>
+        </p:nvSpPr>
+        <p:spPr bwMode="auto">
+          <a:xfrm>
+            <a:off x="838200" y="2248959"/>
+            <a:ext cx="10515600" cy="3908762"/>
+          </a:xfrm>
+          <a:prstGeom prst="rect">
+            <a:avLst/>
+          </a:prstGeom>
+          <a:noFill/>
+          <a:ln>
+            <a:noFill/>
+          </a:ln>
+          <a:effectLst/>
+          <a:extLst>
+            <a:ext uri="{909E8E84-426E-40DD-AFC4-6F175D3DCCD1}">
+              <a14:hiddenFill xmlns:a14="http://schemas.microsoft.com/office/drawing/2010/main">
+                <a:solidFill>
+                  <a:schemeClr val="accent1"/>
+                </a:solidFill>
+              </a14:hiddenFill>
+            </a:ext>
+            <a:ext uri="{91240B29-F687-4F45-9708-019B960494DF}">
+              <a14:hiddenLine xmlns:a14="http://schemas.microsoft.com/office/drawing/2010/main" w="9525">
+                <a:solidFill>
+                  <a:schemeClr val="tx1"/>
+                </a:solidFill>
+                <a:miter lim="800000"/>
+                <a:headEnd/>
+                <a:tailEnd/>
+              </a14:hiddenLine>
+            </a:ext>
+            <a:ext uri="{AF507438-7753-43E0-B8FC-AC1667EBCBE1}">
+              <a14:hiddenEffects xmlns:a14="http://schemas.microsoft.com/office/drawing/2010/main">
+                <a:effectLst>
+                  <a:outerShdw dist="35921" dir="2700000" algn="ctr" rotWithShape="0">
+                    <a:schemeClr val="bg2"/>
+                  </a:outerShdw>
+                </a:effectLst>
+              </a14:hiddenEffects>
+            </a:ext>
+          </a:extLst>
+        </p:spPr>
+        <p:txBody>
+          <a:bodyPr vert="horz" wrap="square" lIns="91440" tIns="45720" rIns="91440" bIns="45720" numCol="1" anchor="ctr" anchorCtr="0" compatLnSpc="1">
+            <a:prstTxWarp prst="textNoShape">
+              <a:avLst/>
+            </a:prstTxWarp>
+            <a:spAutoFit/>
+          </a:bodyPr>
+          <a:lstStyle/>
+          <a:p>
+            <a:pPr marL="0" indent="0" eaLnBrk="0" fontAlgn="base" hangingPunct="0">
+              <a:lnSpc>
+                <a:spcPct val="100000"/>
+              </a:lnSpc>
+              <a:spcBef>
+                <a:spcPct val="0"/>
+              </a:spcBef>
+              <a:spcAft>
+                <a:spcPct val="0"/>
+              </a:spcAft>
+              <a:buFontTx/>
+              <a:buChar char="•"/>
+            </a:pPr>
+            <a:r>
+              <a:rPr kumimoji="0" lang="pt-BR" altLang="pt-BR" sz="2400" b="1" i="0" u="none" strike="noStrike" cap="none" normalizeH="0" baseline="0" dirty="0">
+                <a:ln>
+                  <a:noFill/>
+                </a:ln>
+                <a:solidFill>
+                  <a:schemeClr val="tx1"/>
+                </a:solidFill>
+                <a:effectLst/>
+                <a:latin typeface="Google Sans Text"/>
+              </a:rPr>
+              <a:t>Validação Teórica:</a:t>
+            </a:r>
+            <a:r>
+              <a:rPr kumimoji="0" lang="pt-BR" altLang="pt-BR" sz="2400" b="0" i="0" u="none" strike="noStrike" cap="none" normalizeH="0" baseline="0" dirty="0">
+                <a:ln>
+                  <a:noFill/>
+                </a:ln>
+                <a:solidFill>
+                  <a:schemeClr val="tx1"/>
+                </a:solidFill>
+                <a:effectLst/>
+                <a:latin typeface="Google Sans Text"/>
+              </a:rPr>
+              <a:t> Os experimentos corroboram a teoria matemática; algoritmos O(n</a:t>
+            </a:r>
+            <a:r>
+              <a:rPr kumimoji="0" lang="pt-BR" altLang="pt-BR" sz="2400" b="0" i="0" u="none" strike="noStrike" cap="none" normalizeH="0" baseline="30000" dirty="0">
+                <a:ln>
+                  <a:noFill/>
+                </a:ln>
+                <a:solidFill>
+                  <a:schemeClr val="tx1"/>
+                </a:solidFill>
+                <a:effectLst/>
+                <a:latin typeface="Google Sans Text"/>
+              </a:rPr>
+              <a:t>2</a:t>
+            </a:r>
+            <a:r>
+              <a:rPr kumimoji="0" lang="pt-BR" altLang="pt-BR" sz="2400" b="0" i="0" u="none" strike="noStrike" cap="none" normalizeH="0" baseline="0" dirty="0">
+                <a:ln>
+                  <a:noFill/>
+                </a:ln>
+                <a:solidFill>
+                  <a:schemeClr val="tx1"/>
+                </a:solidFill>
+                <a:effectLst/>
+                <a:latin typeface="Google Sans Text"/>
+              </a:rPr>
+              <a:t>) sofrem degradação drástica em instâncias massivas.</a:t>
+            </a:r>
+          </a:p>
+          <a:p>
+            <a:pPr marL="0" indent="0" eaLnBrk="0" fontAlgn="base" hangingPunct="0">
+              <a:lnSpc>
+                <a:spcPct val="100000"/>
+              </a:lnSpc>
+              <a:spcBef>
+                <a:spcPct val="0"/>
+              </a:spcBef>
+              <a:spcAft>
+                <a:spcPct val="0"/>
+              </a:spcAft>
+              <a:buFontTx/>
+              <a:buChar char="•"/>
+            </a:pPr>
+            <a:endParaRPr kumimoji="0" lang="pt-BR" altLang="pt-BR" sz="2400" b="0" i="0" u="none" strike="noStrike" cap="none" normalizeH="0" baseline="0" dirty="0">
+              <a:ln>
+                <a:noFill/>
+              </a:ln>
+              <a:solidFill>
+                <a:schemeClr val="tx1"/>
+              </a:solidFill>
+              <a:effectLst/>
+              <a:latin typeface="Google Sans Text"/>
+            </a:endParaRPr>
+          </a:p>
+          <a:p>
+            <a:pPr marL="0" lvl="0" indent="0" eaLnBrk="0" fontAlgn="base" hangingPunct="0">
+              <a:lnSpc>
+                <a:spcPct val="100000"/>
+              </a:lnSpc>
+              <a:spcBef>
+                <a:spcPct val="0"/>
+              </a:spcBef>
+              <a:spcAft>
+                <a:spcPct val="0"/>
+              </a:spcAft>
+              <a:buFontTx/>
+              <a:buChar char="•"/>
+            </a:pPr>
+            <a:r>
+              <a:rPr kumimoji="0" lang="pt-BR" altLang="pt-BR" sz="2400" b="1" i="0" u="none" strike="noStrike" cap="none" normalizeH="0" baseline="0" dirty="0">
+                <a:ln>
+                  <a:noFill/>
+                </a:ln>
+                <a:solidFill>
+                  <a:schemeClr val="tx1"/>
+                </a:solidFill>
+                <a:effectLst/>
+                <a:latin typeface="Google Sans Text"/>
+              </a:rPr>
+              <a:t>A Escolha Pragmática:</a:t>
+            </a:r>
+            <a:r>
+              <a:rPr kumimoji="0" lang="pt-BR" altLang="pt-BR" sz="2400" b="0" i="0" u="none" strike="noStrike" cap="none" normalizeH="0" baseline="0" dirty="0">
+                <a:ln>
+                  <a:noFill/>
+                </a:ln>
+                <a:solidFill>
+                  <a:schemeClr val="tx1"/>
+                </a:solidFill>
+                <a:effectLst/>
+                <a:latin typeface="Google Sans Text"/>
+              </a:rPr>
+              <a:t> A decisão arquitetural não deve se basear apenas na classe </a:t>
+            </a:r>
+            <a:r>
+              <a:rPr kumimoji="0" lang="pt-BR" altLang="pt-BR" sz="2400" b="0" i="0" u="none" strike="noStrike" cap="none" normalizeH="0" baseline="0" dirty="0" err="1">
+                <a:ln>
+                  <a:noFill/>
+                </a:ln>
+                <a:solidFill>
+                  <a:schemeClr val="tx1"/>
+                </a:solidFill>
+                <a:effectLst/>
+                <a:latin typeface="Google Sans Text"/>
+              </a:rPr>
+              <a:t>Big-O</a:t>
+            </a:r>
+            <a:r>
+              <a:rPr kumimoji="0" lang="pt-BR" altLang="pt-BR" sz="2400" b="0" i="0" u="none" strike="noStrike" cap="none" normalizeH="0" baseline="0" dirty="0">
+                <a:ln>
+                  <a:noFill/>
+                </a:ln>
+                <a:solidFill>
+                  <a:schemeClr val="tx1"/>
+                </a:solidFill>
+                <a:effectLst/>
+                <a:latin typeface="Google Sans Text"/>
+              </a:rPr>
+              <a:t>, mas exige a ponderação de:</a:t>
+            </a:r>
+          </a:p>
+          <a:p>
+            <a:pPr marL="457200" lvl="1" indent="0" eaLnBrk="0" fontAlgn="base" hangingPunct="0">
+              <a:lnSpc>
+                <a:spcPct val="100000"/>
+              </a:lnSpc>
+              <a:spcBef>
+                <a:spcPct val="0"/>
+              </a:spcBef>
+              <a:spcAft>
+                <a:spcPct val="0"/>
+              </a:spcAft>
+              <a:buFontTx/>
+              <a:buAutoNum type="arabicPeriod"/>
+            </a:pPr>
+            <a:r>
+              <a:rPr lang="pt-BR" altLang="pt-BR" sz="2000" b="1" dirty="0">
+                <a:latin typeface="Google Sans Text"/>
+              </a:rPr>
+              <a:t>Estabilidade</a:t>
+            </a:r>
+            <a:r>
+              <a:rPr lang="pt-BR" altLang="pt-BR" sz="2000" dirty="0">
+                <a:latin typeface="Google Sans Text"/>
+              </a:rPr>
+              <a:t>: Preservação do histórico de dados.</a:t>
+            </a:r>
+          </a:p>
+          <a:p>
+            <a:pPr marL="457200" lvl="1" indent="0" eaLnBrk="0" fontAlgn="base" hangingPunct="0">
+              <a:lnSpc>
+                <a:spcPct val="100000"/>
+              </a:lnSpc>
+              <a:spcBef>
+                <a:spcPct val="0"/>
+              </a:spcBef>
+              <a:spcAft>
+                <a:spcPct val="0"/>
+              </a:spcAft>
+              <a:buFontTx/>
+              <a:buAutoNum type="arabicPeriod" startAt="2"/>
+            </a:pPr>
+            <a:r>
+              <a:rPr lang="pt-BR" altLang="pt-BR" sz="2000" b="1" dirty="0">
+                <a:latin typeface="Google Sans Text"/>
+              </a:rPr>
+              <a:t>Complexidade Espacial</a:t>
+            </a:r>
+            <a:r>
+              <a:rPr lang="pt-BR" altLang="pt-BR" sz="2000" dirty="0">
+                <a:latin typeface="Google Sans Text"/>
+              </a:rPr>
+              <a:t>: Economia de memória x velocidade de processamento.</a:t>
+            </a:r>
+          </a:p>
+          <a:p>
+            <a:pPr marL="457200" lvl="1" indent="0" eaLnBrk="0" fontAlgn="base" hangingPunct="0">
+              <a:lnSpc>
+                <a:spcPct val="100000"/>
+              </a:lnSpc>
+              <a:spcBef>
+                <a:spcPct val="0"/>
+              </a:spcBef>
+              <a:spcAft>
+                <a:spcPct val="0"/>
+              </a:spcAft>
+              <a:buFontTx/>
+              <a:buAutoNum type="arabicPeriod" startAt="3"/>
+            </a:pPr>
+            <a:r>
+              <a:rPr lang="pt-BR" altLang="pt-BR" sz="2000" b="1" dirty="0">
+                <a:latin typeface="Google Sans Text"/>
+              </a:rPr>
+              <a:t>Sensibilidade Topológica</a:t>
+            </a:r>
+            <a:r>
+              <a:rPr lang="pt-BR" altLang="pt-BR" sz="2000" dirty="0">
+                <a:latin typeface="Google Sans Text"/>
+              </a:rPr>
+              <a:t>: Comportamento diante da ordenação prévia dos dados.</a:t>
+            </a:r>
+          </a:p>
+          <a:p>
+            <a:pPr marL="457200" lvl="1" indent="0" eaLnBrk="0" fontAlgn="base" hangingPunct="0">
+              <a:lnSpc>
+                <a:spcPct val="100000"/>
+              </a:lnSpc>
+              <a:spcBef>
+                <a:spcPct val="0"/>
+              </a:spcBef>
+              <a:spcAft>
+                <a:spcPct val="0"/>
+              </a:spcAft>
+              <a:buFontTx/>
+              <a:buAutoNum type="arabicPeriod" startAt="3"/>
+            </a:pPr>
+            <a:endParaRPr lang="pt-BR" altLang="pt-BR" sz="2000" dirty="0">
+              <a:latin typeface="Google Sans Text"/>
+            </a:endParaRPr>
+          </a:p>
+          <a:p>
+            <a:pPr marL="0" indent="0" eaLnBrk="0" fontAlgn="base" hangingPunct="0">
+              <a:lnSpc>
+                <a:spcPct val="100000"/>
+              </a:lnSpc>
+              <a:spcBef>
+                <a:spcPct val="0"/>
+              </a:spcBef>
+              <a:spcAft>
+                <a:spcPct val="0"/>
+              </a:spcAft>
+              <a:buFontTx/>
+              <a:buAutoNum type="arabicPeriod" startAt="3"/>
+            </a:pPr>
+            <a:r>
+              <a:rPr lang="pt-BR" altLang="pt-BR" sz="2400" b="1" dirty="0">
+                <a:latin typeface="Google Sans Text"/>
+              </a:rPr>
+              <a:t>Síntese: </a:t>
+            </a:r>
+            <a:r>
+              <a:rPr lang="pt-BR" altLang="pt-BR" sz="2400" dirty="0">
+                <a:latin typeface="Google Sans Text"/>
+              </a:rPr>
+              <a:t>A análise formal de algoritmos é uma ferramenta pragmática e essencial para a construção de sistemas escaláveis e verdadeiramente otimizados.</a:t>
+            </a:r>
+          </a:p>
+        </p:txBody>
+      </p:sp>
+      <p:sp>
+        <p:nvSpPr>
+          <p:cNvPr id="16" name="Título 1">
+            <a:extLst>
+              <a:ext uri="{FF2B5EF4-FFF2-40B4-BE49-F238E27FC236}">
+                <a16:creationId xmlns:a16="http://schemas.microsoft.com/office/drawing/2014/main" id="{B1E829A6-DEDD-FB0A-ECB6-BAFBC1D5EEE1}"/>
+              </a:ext>
+            </a:extLst>
+          </p:cNvPr>
+          <p:cNvSpPr>
+            <a:spLocks noGrp="1"/>
+          </p:cNvSpPr>
+          <p:nvPr>
+            <p:ph type="title"/>
+          </p:nvPr>
+        </p:nvSpPr>
+        <p:spPr>
+          <a:xfrm>
+            <a:off x="474860" y="1162843"/>
+            <a:ext cx="10515600" cy="1325563"/>
+          </a:xfrm>
+        </p:spPr>
+        <p:txBody>
+          <a:bodyPr>
+            <a:normAutofit/>
+          </a:bodyPr>
+          <a:lstStyle/>
+          <a:p>
+            <a:r>
+              <a:rPr lang="pt-BR" sz="2800" b="1" dirty="0">
+                <a:latin typeface="+mn-lt"/>
+              </a:rPr>
+              <a:t>Considerações Finais e Engenharia de Software</a:t>
+            </a:r>
+          </a:p>
+        </p:txBody>
+      </p:sp>
+    </p:spTree>
+    <p:extLst>
+      <p:ext uri="{BB962C8B-B14F-4D97-AF65-F5344CB8AC3E}">
+        <p14:creationId xmlns:p14="http://schemas.microsoft.com/office/powerpoint/2010/main" val="158680928"/>
+      </p:ext>
+    </p:extLst>
+  </p:cSld>
+  <p:clrMapOvr>
+    <a:masterClrMapping/>
+  </p:clrMapOvr>
+</p:sld>
+</file>
+
+<file path=ppt/slides/slide15.xml><?xml version="1.0" encoding="utf-8"?>
 <p:sld xmlns:a="http://schemas.openxmlformats.org/drawingml/2006/main" xmlns:r="http://schemas.openxmlformats.org/officeDocument/2006/relationships" xmlns:p="http://schemas.openxmlformats.org/presentationml/2006/main">
   <p:cSld>
     <p:spTree>
@@ -4024,7 +6660,7 @@
         </p:nvSpPr>
         <p:spPr>
           <a:xfrm>
-            <a:off x="474860" y="1162843"/>
+            <a:off x="348003" y="1026211"/>
             <a:ext cx="10515600" cy="1325563"/>
           </a:xfrm>
         </p:spPr>
@@ -4061,266 +6697,347 @@
         </p:nvSpPr>
         <p:spPr>
           <a:xfrm>
-            <a:off x="1006765" y="2278207"/>
-            <a:ext cx="10913576" cy="4351338"/>
+            <a:off x="1441686" y="2015733"/>
+            <a:ext cx="8828469" cy="4351338"/>
           </a:xfrm>
         </p:spPr>
         <p:txBody>
           <a:bodyPr>
-            <a:normAutofit/>
+            <a:noAutofit/>
           </a:bodyPr>
           <a:lstStyle/>
           <a:p>
-            <a:pPr marL="0" indent="0">
-              <a:lnSpc>
-                <a:spcPct val="100000"/>
-              </a:lnSpc>
+            <a:pPr marL="0" indent="0" algn="just">
+              <a:spcAft>
+                <a:spcPts val="1000"/>
+              </a:spcAft>
               <a:buNone/>
             </a:pPr>
             <a:r>
-              <a:rPr lang="pt-BR" sz="2000" dirty="0"/>
-              <a:t>CORMEN, T. H.; LEISERSON, C. E.; RIVEST, R. L.; STEIN, C. </a:t>
-            </a:r>
-            <a:r>
-              <a:rPr lang="pt-BR" sz="2000" b="1" dirty="0" err="1"/>
-              <a:t>Introduction</a:t>
-            </a:r>
-            <a:r>
-              <a:rPr lang="pt-BR" sz="2000" b="1" dirty="0"/>
+              <a:rPr lang="pt-BR" sz="1700" dirty="0"/>
+              <a:t>AMDAHL, Gene M. </a:t>
+            </a:r>
+            <a:r>
+              <a:rPr lang="pt-BR" sz="1700" b="1" dirty="0" err="1"/>
+              <a:t>Validity</a:t>
+            </a:r>
+            <a:r>
+              <a:rPr lang="pt-BR" sz="1700" b="1" dirty="0"/>
               <a:t> </a:t>
             </a:r>
             <a:r>
-              <a:rPr lang="pt-BR" sz="2000" b="1" dirty="0" err="1"/>
+              <a:rPr lang="pt-BR" sz="1700" b="1" dirty="0" err="1"/>
+              <a:t>of</a:t>
+            </a:r>
+            <a:r>
+              <a:rPr lang="pt-BR" sz="1700" b="1" dirty="0"/>
+              <a:t> </a:t>
+            </a:r>
+            <a:r>
+              <a:rPr lang="pt-BR" sz="1700" b="1" dirty="0" err="1"/>
+              <a:t>the</a:t>
+            </a:r>
+            <a:r>
+              <a:rPr lang="pt-BR" sz="1700" b="1" dirty="0"/>
+              <a:t> single processor approach </a:t>
+            </a:r>
+            <a:r>
+              <a:rPr lang="pt-BR" sz="1700" b="1" dirty="0" err="1"/>
               <a:t>to</a:t>
             </a:r>
             <a:r>
-              <a:rPr lang="pt-BR" sz="2000" b="1" dirty="0"/>
+              <a:rPr lang="pt-BR" sz="1700" b="1" dirty="0"/>
               <a:t> </a:t>
             </a:r>
             <a:r>
-              <a:rPr lang="pt-BR" sz="2000" b="1" dirty="0" err="1"/>
-              <a:t>Algorithms</a:t>
-            </a:r>
-            <a:r>
-              <a:rPr lang="pt-BR" sz="2000" dirty="0"/>
-              <a:t>. 4. ed. Cambridge: The MIT Press, 2015.</a:t>
-            </a:r>
-            <a:endParaRPr lang="pt-BR" sz="2000" b="0" dirty="0">
-              <a:effectLst/>
-            </a:endParaRPr>
-          </a:p>
-          <a:p>
-            <a:pPr marL="0" indent="0">
-              <a:lnSpc>
-                <a:spcPct val="150000"/>
-              </a:lnSpc>
+              <a:rPr lang="pt-BR" sz="1700" b="1" dirty="0" err="1"/>
+              <a:t>achieving</a:t>
+            </a:r>
+            <a:r>
+              <a:rPr lang="pt-BR" sz="1700" b="1" dirty="0"/>
+              <a:t> </a:t>
+            </a:r>
+            <a:r>
+              <a:rPr lang="pt-BR" sz="1700" b="1" dirty="0" err="1"/>
+              <a:t>large</a:t>
+            </a:r>
+            <a:r>
+              <a:rPr lang="pt-BR" sz="1700" b="1" dirty="0"/>
+              <a:t> </a:t>
+            </a:r>
+            <a:r>
+              <a:rPr lang="pt-BR" sz="1700" b="1" dirty="0" err="1"/>
+              <a:t>scale</a:t>
+            </a:r>
+            <a:r>
+              <a:rPr lang="pt-BR" sz="1700" b="1" dirty="0"/>
+              <a:t> </a:t>
+            </a:r>
+            <a:r>
+              <a:rPr lang="pt-BR" sz="1700" b="1" dirty="0" err="1"/>
+              <a:t>computing</a:t>
+            </a:r>
+            <a:r>
+              <a:rPr lang="pt-BR" sz="1700" b="1" dirty="0"/>
+              <a:t> </a:t>
+            </a:r>
+            <a:r>
+              <a:rPr lang="pt-BR" sz="1700" b="1" dirty="0" err="1"/>
+              <a:t>capabilities</a:t>
+            </a:r>
+            <a:r>
+              <a:rPr lang="pt-BR" sz="1700" b="1" dirty="0"/>
+              <a:t>.</a:t>
+            </a:r>
+            <a:r>
+              <a:rPr lang="pt-BR" sz="1700" dirty="0"/>
+              <a:t> In: </a:t>
+            </a:r>
+            <a:r>
+              <a:rPr lang="pt-BR" sz="1700" dirty="0" err="1"/>
+              <a:t>Proceedings</a:t>
+            </a:r>
+            <a:r>
+              <a:rPr lang="pt-BR" sz="1700" dirty="0"/>
+              <a:t> </a:t>
+            </a:r>
+            <a:r>
+              <a:rPr lang="pt-BR" sz="1700" dirty="0" err="1"/>
+              <a:t>of</a:t>
+            </a:r>
+            <a:r>
+              <a:rPr lang="pt-BR" sz="1700" dirty="0"/>
+              <a:t> </a:t>
+            </a:r>
+            <a:r>
+              <a:rPr lang="pt-BR" sz="1700" dirty="0" err="1"/>
+              <a:t>the</a:t>
+            </a:r>
+            <a:r>
+              <a:rPr lang="pt-BR" sz="1700" dirty="0"/>
+              <a:t> Spring Joint Computer </a:t>
+            </a:r>
+            <a:r>
+              <a:rPr lang="pt-BR" sz="1700" dirty="0" err="1"/>
+              <a:t>Conference</a:t>
+            </a:r>
+            <a:r>
+              <a:rPr lang="pt-BR" sz="1700" dirty="0"/>
+              <a:t>. AFIPS, 1967. p. 483–485.</a:t>
+            </a:r>
+          </a:p>
+          <a:p>
+            <a:pPr marL="0" indent="0" algn="just">
+              <a:spcAft>
+                <a:spcPts val="1000"/>
+              </a:spcAft>
               <a:buNone/>
             </a:pPr>
             <a:r>
-              <a:rPr lang="pt-BR" sz="2000" dirty="0"/>
-              <a:t>KARUMANCHI, N. </a:t>
-            </a:r>
-            <a:r>
-              <a:rPr lang="pt-BR" sz="2000" b="1" dirty="0"/>
-              <a:t>Data </a:t>
-            </a:r>
-            <a:r>
-              <a:rPr lang="pt-BR" sz="2000" b="1" dirty="0" err="1"/>
-              <a:t>Structure</a:t>
-            </a:r>
-            <a:r>
-              <a:rPr lang="pt-BR" sz="2000" b="1" dirty="0"/>
+              <a:rPr lang="pt-BR" sz="1700" dirty="0"/>
+              <a:t>ARAVARAVIND. WB </a:t>
+            </a:r>
+            <a:r>
+              <a:rPr lang="pt-BR" sz="1700" b="1" dirty="0"/>
+              <a:t>Commodity </a:t>
+            </a:r>
+            <a:r>
+              <a:rPr lang="pt-BR" sz="1700" b="1" dirty="0" err="1"/>
+              <a:t>Price</a:t>
+            </a:r>
+            <a:r>
+              <a:rPr lang="pt-BR" sz="1700" b="1" dirty="0"/>
               <a:t> </a:t>
             </a:r>
             <a:r>
-              <a:rPr lang="pt-BR" sz="2000" b="1" dirty="0" err="1"/>
-              <a:t>and</a:t>
-            </a:r>
-            <a:r>
-              <a:rPr lang="pt-BR" sz="2000" b="1" dirty="0"/>
+              <a:rPr lang="pt-BR" sz="1700" b="1" dirty="0" err="1"/>
+              <a:t>Intelligence</a:t>
+            </a:r>
+            <a:r>
+              <a:rPr lang="pt-BR" sz="1700" b="1" dirty="0"/>
+              <a:t> (1960–2026). </a:t>
+            </a:r>
+            <a:r>
+              <a:rPr lang="pt-BR" sz="1700" b="1" dirty="0" err="1"/>
+              <a:t>Kaggle</a:t>
+            </a:r>
+            <a:r>
+              <a:rPr lang="pt-BR" sz="1700" dirty="0"/>
+              <a:t>, 2026. Disponível em:</a:t>
+            </a:r>
+            <a:r>
+              <a:rPr lang="pt-BR" sz="1700" dirty="0">
+                <a:hlinkClick r:id="rId4"/>
+              </a:rPr>
               <a:t> </a:t>
             </a:r>
             <a:r>
-              <a:rPr lang="pt-BR" sz="2000" b="1" dirty="0" err="1"/>
-              <a:t>Algorithmic</a:t>
-            </a:r>
-            <a:r>
-              <a:rPr lang="pt-BR" sz="2000" b="1" dirty="0"/>
-              <a:t> </a:t>
-            </a:r>
-            <a:r>
-              <a:rPr lang="pt-BR" sz="2000" b="1" dirty="0" err="1"/>
-              <a:t>Thinking</a:t>
-            </a:r>
-            <a:r>
-              <a:rPr lang="pt-BR" sz="2000" b="1" dirty="0"/>
-              <a:t> </a:t>
-            </a:r>
-            <a:r>
-              <a:rPr lang="pt-BR" sz="2000" b="1" dirty="0" err="1"/>
-              <a:t>with</a:t>
-            </a:r>
-            <a:r>
-              <a:rPr lang="pt-BR" sz="2000" b="1" dirty="0"/>
-              <a:t> Python</a:t>
-            </a:r>
-            <a:r>
-              <a:rPr lang="pt-BR" sz="2000" dirty="0"/>
-              <a:t>. New York: </a:t>
-            </a:r>
-            <a:r>
-              <a:rPr lang="pt-BR" sz="2000" dirty="0" err="1"/>
-              <a:t>CareerMonk</a:t>
-            </a:r>
-            <a:r>
-              <a:rPr lang="pt-BR" sz="2000" dirty="0"/>
-              <a:t>, 2015.</a:t>
-            </a:r>
-            <a:endParaRPr lang="pt-BR" sz="2000" b="0" dirty="0">
-              <a:effectLst/>
-            </a:endParaRPr>
-          </a:p>
-          <a:p>
-            <a:pPr marL="0" indent="0">
-              <a:lnSpc>
-                <a:spcPct val="150000"/>
-              </a:lnSpc>
+              <a:rPr lang="pt-BR" sz="1700" u="sng" dirty="0">
+                <a:hlinkClick r:id="rId4"/>
+              </a:rPr>
+              <a:t>https://www.kaggle.com/</a:t>
+            </a:r>
+            <a:r>
+              <a:rPr lang="pt-BR" sz="1700" u="sng" dirty="0" err="1">
+                <a:hlinkClick r:id="rId4"/>
+              </a:rPr>
+              <a:t>code</a:t>
+            </a:r>
+            <a:r>
+              <a:rPr lang="pt-BR" sz="1700" u="sng" dirty="0">
+                <a:hlinkClick r:id="rId4"/>
+              </a:rPr>
+              <a:t>/</a:t>
+            </a:r>
+            <a:r>
+              <a:rPr lang="pt-BR" sz="1700" u="sng" dirty="0" err="1">
+                <a:hlinkClick r:id="rId4"/>
+              </a:rPr>
+              <a:t>aravaravind</a:t>
+            </a:r>
+            <a:r>
+              <a:rPr lang="pt-BR" sz="1700" u="sng" dirty="0">
+                <a:hlinkClick r:id="rId4"/>
+              </a:rPr>
+              <a:t>/wb-commodity-price-intelligence-1960-2026</a:t>
+            </a:r>
+            <a:r>
+              <a:rPr lang="pt-BR" sz="1700" dirty="0"/>
+              <a:t>. Acesso em: 20 mar. 2026.</a:t>
+            </a:r>
+          </a:p>
+          <a:p>
+            <a:pPr marL="0" indent="0" algn="just">
+              <a:spcAft>
+                <a:spcPts val="1000"/>
+              </a:spcAft>
               <a:buNone/>
             </a:pPr>
             <a:r>
-              <a:rPr lang="pt-BR" sz="2000" dirty="0"/>
-              <a:t>LEVITIN, A. V. </a:t>
-            </a:r>
-            <a:r>
-              <a:rPr lang="pt-BR" sz="2000" b="1" dirty="0" err="1"/>
-              <a:t>Introduction</a:t>
-            </a:r>
-            <a:r>
-              <a:rPr lang="pt-BR" sz="2000" b="1" dirty="0"/>
-              <a:t> </a:t>
-            </a:r>
-            <a:r>
-              <a:rPr lang="pt-BR" sz="2000" b="1" dirty="0" err="1"/>
-              <a:t>to</a:t>
-            </a:r>
-            <a:r>
-              <a:rPr lang="pt-BR" sz="2000" b="1" dirty="0"/>
-              <a:t> </a:t>
-            </a:r>
-            <a:r>
-              <a:rPr lang="pt-BR" sz="2000" b="1" dirty="0" err="1"/>
-              <a:t>the</a:t>
-            </a:r>
-            <a:r>
-              <a:rPr lang="pt-BR" sz="2000" b="1" dirty="0"/>
-              <a:t> Design </a:t>
-            </a:r>
-            <a:r>
-              <a:rPr lang="pt-BR" sz="2000" b="1" dirty="0" err="1"/>
-              <a:t>and</a:t>
-            </a:r>
-            <a:r>
-              <a:rPr lang="pt-BR" sz="2000" b="1" dirty="0"/>
-              <a:t> </a:t>
-            </a:r>
-            <a:r>
-              <a:rPr lang="pt-BR" sz="2000" b="1" dirty="0" err="1"/>
-              <a:t>Analysis</a:t>
-            </a:r>
-            <a:r>
-              <a:rPr lang="pt-BR" sz="2000" b="1" dirty="0"/>
-              <a:t> </a:t>
-            </a:r>
-            <a:r>
-              <a:rPr lang="pt-BR" sz="2000" b="1" dirty="0" err="1"/>
-              <a:t>of</a:t>
-            </a:r>
-            <a:r>
-              <a:rPr lang="pt-BR" sz="2000" b="1" dirty="0"/>
-              <a:t> </a:t>
-            </a:r>
-            <a:r>
-              <a:rPr lang="pt-BR" sz="2000" b="1" dirty="0" err="1"/>
-              <a:t>Algorithms</a:t>
-            </a:r>
-            <a:r>
-              <a:rPr lang="pt-BR" sz="2000" dirty="0"/>
-              <a:t>. New York: Addison-Wesley, 2002.</a:t>
-            </a:r>
-            <a:endParaRPr lang="pt-BR" sz="2000" b="0" dirty="0">
-              <a:effectLst/>
-            </a:endParaRPr>
-          </a:p>
-          <a:p>
-            <a:pPr marL="0" indent="0">
-              <a:lnSpc>
-                <a:spcPct val="100000"/>
-              </a:lnSpc>
+              <a:rPr lang="pt-BR" sz="1700" dirty="0"/>
+              <a:t>MOREIRA, Cândido. </a:t>
+            </a:r>
+            <a:r>
+              <a:rPr lang="pt-BR" sz="1700" b="1" dirty="0"/>
+              <a:t>Análise Experimental de Desempenho entre Árvores de Busca Binária (BST) e AVL com Dados de Commodities.</a:t>
+            </a:r>
+            <a:r>
+              <a:rPr lang="pt-BR" sz="1700" dirty="0"/>
+              <a:t> Repositório GitHub, 2026. Disponível em: </a:t>
+            </a:r>
+            <a:r>
+              <a:rPr lang="pt-BR" sz="1700" u="sng" dirty="0">
+                <a:hlinkClick r:id="rId5"/>
+              </a:rPr>
+              <a:t>https://github.com/</a:t>
+            </a:r>
+            <a:r>
+              <a:rPr lang="pt-BR" sz="1700" u="sng" dirty="0" err="1">
+                <a:hlinkClick r:id="rId5"/>
+              </a:rPr>
+              <a:t>candidomor</a:t>
+            </a:r>
+            <a:r>
+              <a:rPr lang="pt-BR" sz="1700" u="sng" dirty="0">
+                <a:hlinkClick r:id="rId5"/>
+              </a:rPr>
+              <a:t>/Mestrado-Algoritimos-Projeto2</a:t>
+            </a:r>
+            <a:r>
+              <a:rPr lang="pt-BR" sz="1700" dirty="0"/>
+              <a:t>. Acesso em: 29 mar. 2026.</a:t>
+            </a:r>
+          </a:p>
+          <a:p>
+            <a:pPr marL="0" indent="0" algn="just">
+              <a:spcAft>
+                <a:spcPts val="1000"/>
+              </a:spcAft>
               <a:buNone/>
             </a:pPr>
             <a:r>
-              <a:rPr lang="pt-BR" sz="2000" dirty="0"/>
-              <a:t>MOREIRA, Cândido. </a:t>
-            </a:r>
-            <a:r>
-              <a:rPr lang="pt-BR" sz="2000" b="1" dirty="0"/>
-              <a:t>Implementações e scripts experimentais do Projeto 1 – Algoritmos de Ordenação</a:t>
-            </a:r>
-            <a:r>
-              <a:rPr lang="pt-BR" sz="2000" dirty="0"/>
-              <a:t>. Repositório GitHub, 2026. Disponível em:</a:t>
-            </a:r>
-            <a:r>
-              <a:rPr lang="pt-BR" sz="2000" dirty="0">
-                <a:hlinkClick r:id="rId4"/>
-              </a:rPr>
-              <a:t> </a:t>
-            </a:r>
-            <a:r>
-              <a:rPr lang="pt-BR" sz="2000" u="sng" dirty="0">
-                <a:hlinkClick r:id="rId4"/>
-              </a:rPr>
-              <a:t>https://github.com/</a:t>
-            </a:r>
-            <a:r>
-              <a:rPr lang="pt-BR" sz="2000" u="sng" dirty="0" err="1">
-                <a:hlinkClick r:id="rId4"/>
-              </a:rPr>
-              <a:t>candidomor</a:t>
-            </a:r>
-            <a:r>
-              <a:rPr lang="pt-BR" sz="2000" u="sng" dirty="0">
-                <a:hlinkClick r:id="rId4"/>
-              </a:rPr>
-              <a:t>/Mestrado-Algoritmos-Projeto1/</a:t>
-            </a:r>
-            <a:r>
-              <a:rPr lang="pt-BR" sz="2000" u="sng" dirty="0" err="1">
-                <a:hlinkClick r:id="rId4"/>
-              </a:rPr>
-              <a:t>tree</a:t>
-            </a:r>
-            <a:r>
-              <a:rPr lang="pt-BR" sz="2000" u="sng" dirty="0">
-                <a:hlinkClick r:id="rId4"/>
-              </a:rPr>
-              <a:t>/</a:t>
-            </a:r>
-            <a:r>
-              <a:rPr lang="pt-BR" sz="2000" u="sng" dirty="0" err="1">
-                <a:hlinkClick r:id="rId4"/>
-              </a:rPr>
-              <a:t>main</a:t>
-            </a:r>
-            <a:r>
-              <a:rPr lang="pt-BR" sz="2000" u="sng" dirty="0">
-                <a:hlinkClick r:id="rId4"/>
-              </a:rPr>
-              <a:t>/Principal</a:t>
-            </a:r>
-            <a:r>
-              <a:rPr lang="pt-BR" sz="2000" dirty="0"/>
-              <a:t>. Acesso em: 8 mar. 2026.</a:t>
+              <a:rPr lang="pt-BR" sz="1700" dirty="0"/>
+              <a:t>CORMEN, Thomas H.; LEISERSON, Charles E.; RIVEST, Ronald L.; STEIN, Clifford. </a:t>
+            </a:r>
+            <a:r>
+              <a:rPr lang="pt-BR" sz="1700" b="1" dirty="0"/>
+              <a:t>Algoritmos: teoria e prática. </a:t>
+            </a:r>
+            <a:r>
+              <a:rPr lang="pt-BR" sz="1700" dirty="0"/>
+              <a:t>3. ed. Rio de Janeiro: Elsevier, 2012.</a:t>
+            </a:r>
+          </a:p>
+          <a:p>
+            <a:pPr marL="0" indent="0" algn="just">
+              <a:spcAft>
+                <a:spcPts val="1000"/>
+              </a:spcAft>
+              <a:buNone/>
+            </a:pPr>
+            <a:r>
+              <a:rPr lang="pt-BR" sz="1700" dirty="0"/>
+              <a:t>GOODRICH, Michael T.; TAMASSIA, Roberto; GOLDWASSER, Michael H. </a:t>
+            </a:r>
+            <a:r>
+              <a:rPr lang="pt-BR" sz="1700" b="1" dirty="0"/>
+              <a:t>Data </a:t>
+            </a:r>
+            <a:r>
+              <a:rPr lang="pt-BR" sz="1700" b="1" dirty="0" err="1"/>
+              <a:t>Structures</a:t>
+            </a:r>
+            <a:r>
+              <a:rPr lang="pt-BR" sz="1700" b="1" dirty="0"/>
+              <a:t> and </a:t>
+            </a:r>
+            <a:r>
+              <a:rPr lang="pt-BR" sz="1700" b="1" dirty="0" err="1"/>
+              <a:t>Algorithms</a:t>
+            </a:r>
+            <a:r>
+              <a:rPr lang="pt-BR" sz="1700" b="1" dirty="0"/>
+              <a:t> in Python</a:t>
+            </a:r>
+            <a:r>
+              <a:rPr lang="pt-BR" sz="1700" dirty="0"/>
+              <a:t>. </a:t>
+            </a:r>
+            <a:r>
+              <a:rPr lang="pt-BR" sz="1700" dirty="0" err="1"/>
+              <a:t>Hoboken</a:t>
+            </a:r>
+            <a:r>
+              <a:rPr lang="pt-BR" sz="1700" dirty="0"/>
+              <a:t>: </a:t>
+            </a:r>
+            <a:r>
+              <a:rPr lang="pt-BR" sz="1700" dirty="0" err="1"/>
+              <a:t>Wiley</a:t>
+            </a:r>
+            <a:r>
+              <a:rPr lang="pt-BR" sz="1700" dirty="0"/>
+              <a:t>, 2013.</a:t>
+            </a:r>
+          </a:p>
+          <a:p>
+            <a:pPr marL="0" indent="0" algn="just">
+              <a:spcAft>
+                <a:spcPts val="1000"/>
+              </a:spcAft>
+              <a:buNone/>
+            </a:pPr>
+            <a:r>
+              <a:rPr lang="pt-BR" sz="1700" dirty="0"/>
+              <a:t>SILBERSCHATZ, Abraham; KORTH, Henry F.; SUDARSHAN, S</a:t>
+            </a:r>
+            <a:r>
+              <a:rPr lang="pt-BR" sz="1700" b="1" dirty="0"/>
+              <a:t>. Sistema de banco de dados. </a:t>
+            </a:r>
+            <a:r>
+              <a:rPr lang="pt-BR" sz="1700" dirty="0"/>
+              <a:t>6. ed. Rio de Janeiro: Elsevier, 2012.</a:t>
             </a:r>
           </a:p>
         </p:txBody>
@@ -5251,6 +7968,10 @@
               <a:buChar char="•"/>
             </a:pPr>
             <a:r>
+              <a:rPr lang="pt-BR" dirty="0"/>
+              <a:t> </a:t>
+            </a:r>
+            <a:r>
               <a:rPr lang="pt-BR" dirty="0" err="1"/>
               <a:t>Garbage</a:t>
             </a:r>
@@ -5302,7 +8023,7 @@
                 <a:effectLst/>
                 <a:latin typeface="Google Sans Text"/>
               </a:rPr>
-              <a:t>Processador i7-14700KF e 32 GB RAM.</a:t>
+              <a:t> Processador i7-14700KF e 32 GB RAM.</a:t>
             </a:r>
           </a:p>
           <a:p>
@@ -5371,7 +8092,7 @@
                 <a:effectLst/>
                 <a:latin typeface="Google Sans Text"/>
               </a:rPr>
-              <a:t>Medições </a:t>
+              <a:t> Medições </a:t>
             </a:r>
             <a:r>
               <a:rPr lang="pt-BR" altLang="pt-BR" sz="2000" dirty="0">
@@ -5410,7 +8131,7 @@
               <a:rPr lang="pt-BR" altLang="pt-BR" sz="2000" dirty="0">
                 <a:latin typeface="Google Sans Text"/>
               </a:rPr>
-              <a:t>Cada cenário foi executado 5 vezes (k</a:t>
+              <a:t> Cada cenário foi executado 5 vezes (k</a:t>
             </a:r>
             <a:r>
               <a:rPr kumimoji="0" lang="pt-BR" altLang="pt-BR" sz="2000" b="0" i="0" u="none" strike="noStrike" cap="none" normalizeH="0" baseline="0" dirty="0">
@@ -6213,7 +8934,7 @@
               <a:rPr lang="pt-BR" sz="2000" dirty="0">
                 <a:latin typeface="Google Sans Text"/>
               </a:rPr>
-              <a:t>Tempo absoluto de busca por chaves específicas.</a:t>
+              <a:t> Tempo absoluto de busca por chaves específicas.</a:t>
             </a:r>
           </a:p>
           <a:p>
@@ -6234,7 +8955,7 @@
               <a:rPr lang="pt-BR" sz="2000" dirty="0">
                 <a:latin typeface="Google Sans Text"/>
               </a:rPr>
-              <a:t>Altura final (níveis) gerada para cada árvore nos diferentes cenários.</a:t>
+              <a:t> Altura final (níveis) gerada para cada árvore nos diferentes cenários.</a:t>
             </a:r>
             <a:endParaRPr lang="pt-BR" altLang="pt-BR" sz="2000" dirty="0">
               <a:latin typeface="Google Sans Text"/>
@@ -6490,7 +9211,7 @@
         </p:nvSpPr>
         <p:spPr>
           <a:xfrm>
-            <a:off x="474860" y="1162843"/>
+            <a:off x="305479" y="902711"/>
             <a:ext cx="10515600" cy="1325563"/>
           </a:xfrm>
         </p:spPr>
@@ -6504,49 +9225,291 @@
               <a:rPr lang="pt-BR" sz="2800" b="1" dirty="0">
                 <a:latin typeface="+mn-lt"/>
               </a:rPr>
-              <a:t>Resultados de Estresse (Carga de 100.000 elementos)</a:t>
+              <a:t>Resultados</a:t>
             </a:r>
           </a:p>
         </p:txBody>
       </p:sp>
       <p:pic>
         <p:nvPicPr>
-          <p:cNvPr id="4" name="Imagem 3">
-            <a:extLst>
-              <a:ext uri="{FF2B5EF4-FFF2-40B4-BE49-F238E27FC236}">
-                <a16:creationId xmlns:a16="http://schemas.microsoft.com/office/drawing/2014/main" id="{772F4B93-A171-671D-D91D-8E9D4B9FD2AC}"/>
+          <p:cNvPr id="1026" name="Picture 2">
+            <a:extLst>
+              <a:ext uri="{FF2B5EF4-FFF2-40B4-BE49-F238E27FC236}">
+                <a16:creationId xmlns:a16="http://schemas.microsoft.com/office/drawing/2014/main" id="{2B18DCAE-EB75-C974-1E1A-7624CD653046}"/>
               </a:ext>
             </a:extLst>
           </p:cNvPr>
           <p:cNvPicPr>
-            <a:picLocks noChangeAspect="1"/>
+            <a:picLocks noChangeAspect="1" noChangeArrowheads="1"/>
           </p:cNvPicPr>
           <p:nvPr/>
         </p:nvPicPr>
         <p:blipFill>
-          <a:blip r:embed="rId4"/>
+          <a:blip r:embed="rId4">
+            <a:extLst>
+              <a:ext uri="{28A0092B-C50C-407E-A947-70E740481C1C}">
+                <a14:useLocalDpi xmlns:a14="http://schemas.microsoft.com/office/drawing/2010/main" val="0"/>
+              </a:ext>
+            </a:extLst>
+          </a:blip>
+          <a:srcRect/>
           <a:stretch>
             <a:fillRect/>
           </a:stretch>
         </p:blipFill>
-        <p:spPr>
+        <p:spPr bwMode="auto">
           <a:xfrm>
-            <a:off x="1741891" y="2447890"/>
-            <a:ext cx="8708217" cy="3843409"/>
+            <a:off x="588701" y="1844899"/>
+            <a:ext cx="3600000" cy="2298520"/>
           </a:xfrm>
           <a:prstGeom prst="rect">
             <a:avLst/>
           </a:prstGeom>
-          <a:ln>
-            <a:noFill/>
-          </a:ln>
-          <a:effectLst>
-            <a:outerShdw blurRad="292100" dist="139700" dir="2700000" algn="tl" rotWithShape="0">
-              <a:srgbClr val="333333">
-                <a:alpha val="65000"/>
-              </a:srgbClr>
-            </a:outerShdw>
-          </a:effectLst>
+          <a:noFill/>
+          <a:extLst>
+            <a:ext uri="{909E8E84-426E-40DD-AFC4-6F175D3DCCD1}">
+              <a14:hiddenFill xmlns:a14="http://schemas.microsoft.com/office/drawing/2010/main">
+                <a:solidFill>
+                  <a:srgbClr val="FFFFFF"/>
+                </a:solidFill>
+              </a14:hiddenFill>
+            </a:ext>
+          </a:extLst>
+        </p:spPr>
+      </p:pic>
+      <p:pic>
+        <p:nvPicPr>
+          <p:cNvPr id="1028" name="Picture 4">
+            <a:extLst>
+              <a:ext uri="{FF2B5EF4-FFF2-40B4-BE49-F238E27FC236}">
+                <a16:creationId xmlns:a16="http://schemas.microsoft.com/office/drawing/2014/main" id="{7CB6FE74-12B9-1DC2-EC20-95DF2B1F60FE}"/>
+              </a:ext>
+            </a:extLst>
+          </p:cNvPr>
+          <p:cNvPicPr>
+            <a:picLocks noChangeAspect="1" noChangeArrowheads="1"/>
+          </p:cNvPicPr>
+          <p:nvPr/>
+        </p:nvPicPr>
+        <p:blipFill>
+          <a:blip r:embed="rId5">
+            <a:extLst>
+              <a:ext uri="{28A0092B-C50C-407E-A947-70E740481C1C}">
+                <a14:useLocalDpi xmlns:a14="http://schemas.microsoft.com/office/drawing/2010/main" val="0"/>
+              </a:ext>
+            </a:extLst>
+          </a:blip>
+          <a:srcRect/>
+          <a:stretch>
+            <a:fillRect/>
+          </a:stretch>
+        </p:blipFill>
+        <p:spPr bwMode="auto">
+          <a:xfrm>
+            <a:off x="8059821" y="1835262"/>
+            <a:ext cx="3600000" cy="2284034"/>
+          </a:xfrm>
+          <a:prstGeom prst="rect">
+            <a:avLst/>
+          </a:prstGeom>
+          <a:noFill/>
+          <a:extLst>
+            <a:ext uri="{909E8E84-426E-40DD-AFC4-6F175D3DCCD1}">
+              <a14:hiddenFill xmlns:a14="http://schemas.microsoft.com/office/drawing/2010/main">
+                <a:solidFill>
+                  <a:srgbClr val="FFFFFF"/>
+                </a:solidFill>
+              </a14:hiddenFill>
+            </a:ext>
+          </a:extLst>
+        </p:spPr>
+      </p:pic>
+      <p:pic>
+        <p:nvPicPr>
+          <p:cNvPr id="2050" name="Picture 2">
+            <a:extLst>
+              <a:ext uri="{FF2B5EF4-FFF2-40B4-BE49-F238E27FC236}">
+                <a16:creationId xmlns:a16="http://schemas.microsoft.com/office/drawing/2014/main" id="{F20EB8D4-5927-8914-6A03-B8E32C396FF8}"/>
+              </a:ext>
+            </a:extLst>
+          </p:cNvPr>
+          <p:cNvPicPr>
+            <a:picLocks noChangeAspect="1" noChangeArrowheads="1"/>
+          </p:cNvPicPr>
+          <p:nvPr/>
+        </p:nvPicPr>
+        <p:blipFill>
+          <a:blip r:embed="rId6">
+            <a:extLst>
+              <a:ext uri="{28A0092B-C50C-407E-A947-70E740481C1C}">
+                <a14:useLocalDpi xmlns:a14="http://schemas.microsoft.com/office/drawing/2010/main" val="0"/>
+              </a:ext>
+            </a:extLst>
+          </a:blip>
+          <a:srcRect/>
+          <a:stretch>
+            <a:fillRect/>
+          </a:stretch>
+        </p:blipFill>
+        <p:spPr bwMode="auto">
+          <a:xfrm>
+            <a:off x="4327553" y="1825625"/>
+            <a:ext cx="3600000" cy="2293671"/>
+          </a:xfrm>
+          <a:prstGeom prst="rect">
+            <a:avLst/>
+          </a:prstGeom>
+          <a:noFill/>
+          <a:extLst>
+            <a:ext uri="{909E8E84-426E-40DD-AFC4-6F175D3DCCD1}">
+              <a14:hiddenFill xmlns:a14="http://schemas.microsoft.com/office/drawing/2010/main">
+                <a:solidFill>
+                  <a:srgbClr val="FFFFFF"/>
+                </a:solidFill>
+              </a14:hiddenFill>
+            </a:ext>
+          </a:extLst>
+        </p:spPr>
+      </p:pic>
+      <p:pic>
+        <p:nvPicPr>
+          <p:cNvPr id="1030" name="Picture 6">
+            <a:extLst>
+              <a:ext uri="{FF2B5EF4-FFF2-40B4-BE49-F238E27FC236}">
+                <a16:creationId xmlns:a16="http://schemas.microsoft.com/office/drawing/2014/main" id="{810CA23C-854E-32DA-D704-79EFB6A4228A}"/>
+              </a:ext>
+            </a:extLst>
+          </p:cNvPr>
+          <p:cNvPicPr>
+            <a:picLocks noChangeAspect="1" noChangeArrowheads="1"/>
+          </p:cNvPicPr>
+          <p:nvPr/>
+        </p:nvPicPr>
+        <p:blipFill>
+          <a:blip r:embed="rId7">
+            <a:extLst>
+              <a:ext uri="{28A0092B-C50C-407E-A947-70E740481C1C}">
+                <a14:useLocalDpi xmlns:a14="http://schemas.microsoft.com/office/drawing/2010/main" val="0"/>
+              </a:ext>
+            </a:extLst>
+          </a:blip>
+          <a:srcRect/>
+          <a:stretch>
+            <a:fillRect/>
+          </a:stretch>
+        </p:blipFill>
+        <p:spPr bwMode="auto">
+          <a:xfrm>
+            <a:off x="588701" y="4286729"/>
+            <a:ext cx="3600000" cy="2303390"/>
+          </a:xfrm>
+          <a:prstGeom prst="rect">
+            <a:avLst/>
+          </a:prstGeom>
+          <a:noFill/>
+          <a:extLst>
+            <a:ext uri="{909E8E84-426E-40DD-AFC4-6F175D3DCCD1}">
+              <a14:hiddenFill xmlns:a14="http://schemas.microsoft.com/office/drawing/2010/main">
+                <a:solidFill>
+                  <a:srgbClr val="FFFFFF"/>
+                </a:solidFill>
+              </a14:hiddenFill>
+            </a:ext>
+          </a:extLst>
+        </p:spPr>
+      </p:pic>
+      <p:pic>
+        <p:nvPicPr>
+          <p:cNvPr id="1032" name="Picture 8">
+            <a:extLst>
+              <a:ext uri="{FF2B5EF4-FFF2-40B4-BE49-F238E27FC236}">
+                <a16:creationId xmlns:a16="http://schemas.microsoft.com/office/drawing/2014/main" id="{6A279C26-759A-BA26-C40B-F1ACBCCB3DD9}"/>
+              </a:ext>
+            </a:extLst>
+          </p:cNvPr>
+          <p:cNvPicPr>
+            <a:picLocks noChangeAspect="1" noChangeArrowheads="1"/>
+          </p:cNvPicPr>
+          <p:nvPr/>
+        </p:nvPicPr>
+        <p:blipFill>
+          <a:blip r:embed="rId8">
+            <a:extLst>
+              <a:ext uri="{28A0092B-C50C-407E-A947-70E740481C1C}">
+                <a14:useLocalDpi xmlns:a14="http://schemas.microsoft.com/office/drawing/2010/main" val="0"/>
+              </a:ext>
+            </a:extLst>
+          </a:blip>
+          <a:srcRect/>
+          <a:stretch>
+            <a:fillRect/>
+          </a:stretch>
+        </p:blipFill>
+        <p:spPr bwMode="auto">
+          <a:xfrm>
+            <a:off x="4327553" y="4286729"/>
+            <a:ext cx="3600000" cy="2303390"/>
+          </a:xfrm>
+          <a:prstGeom prst="rect">
+            <a:avLst/>
+          </a:prstGeom>
+          <a:noFill/>
+          <a:extLst>
+            <a:ext uri="{909E8E84-426E-40DD-AFC4-6F175D3DCCD1}">
+              <a14:hiddenFill xmlns:a14="http://schemas.microsoft.com/office/drawing/2010/main">
+                <a:solidFill>
+                  <a:srgbClr val="FFFFFF"/>
+                </a:solidFill>
+              </a14:hiddenFill>
+            </a:ext>
+          </a:extLst>
+        </p:spPr>
+      </p:pic>
+      <p:pic>
+        <p:nvPicPr>
+          <p:cNvPr id="1034" name="Picture 10">
+            <a:extLst>
+              <a:ext uri="{FF2B5EF4-FFF2-40B4-BE49-F238E27FC236}">
+                <a16:creationId xmlns:a16="http://schemas.microsoft.com/office/drawing/2014/main" id="{5415A2C7-F880-1B5A-D8C4-E9727A9D5BE7}"/>
+              </a:ext>
+            </a:extLst>
+          </p:cNvPr>
+          <p:cNvPicPr>
+            <a:picLocks noChangeAspect="1" noChangeArrowheads="1"/>
+          </p:cNvPicPr>
+          <p:nvPr/>
+        </p:nvPicPr>
+        <p:blipFill>
+          <a:blip r:embed="rId9">
+            <a:extLst>
+              <a:ext uri="{28A0092B-C50C-407E-A947-70E740481C1C}">
+                <a14:useLocalDpi xmlns:a14="http://schemas.microsoft.com/office/drawing/2010/main" val="0"/>
+              </a:ext>
+            </a:extLst>
+          </a:blip>
+          <a:srcRect/>
+          <a:stretch>
+            <a:fillRect/>
+          </a:stretch>
+        </p:blipFill>
+        <p:spPr bwMode="auto">
+          <a:xfrm>
+            <a:off x="8059821" y="4292987"/>
+            <a:ext cx="3600000" cy="2308280"/>
+          </a:xfrm>
+          <a:prstGeom prst="rect">
+            <a:avLst/>
+          </a:prstGeom>
+          <a:noFill/>
+          <a:extLst>
+            <a:ext uri="{909E8E84-426E-40DD-AFC4-6F175D3DCCD1}">
+              <a14:hiddenFill xmlns:a14="http://schemas.microsoft.com/office/drawing/2010/main">
+                <a:solidFill>
+                  <a:srgbClr val="FFFFFF"/>
+                </a:solidFill>
+              </a14:hiddenFill>
+            </a:ext>
+          </a:extLst>
         </p:spPr>
       </p:pic>
     </p:spTree>
@@ -6570,7 +9533,7 @@
         <p:cNvPr id="1" name="">
           <a:extLst>
             <a:ext uri="{FF2B5EF4-FFF2-40B4-BE49-F238E27FC236}">
-              <a16:creationId xmlns:a16="http://schemas.microsoft.com/office/drawing/2014/main" id="{5F7919C3-08E1-4A24-BFAA-E12F0EEF80F3}"/>
+              <a16:creationId xmlns:a16="http://schemas.microsoft.com/office/drawing/2014/main" id="{7940AC39-2646-0275-BFE4-EBD06859FD5F}"/>
             </a:ext>
           </a:extLst>
         </p:cNvPr>
@@ -6590,7 +9553,7 @@
           <p:cNvPr id="5" name="Imagem 4">
             <a:extLst>
               <a:ext uri="{FF2B5EF4-FFF2-40B4-BE49-F238E27FC236}">
-                <a16:creationId xmlns:a16="http://schemas.microsoft.com/office/drawing/2014/main" id="{B2F817A1-BBD5-D7A3-9B73-F63FE13C3A68}"/>
+                <a16:creationId xmlns:a16="http://schemas.microsoft.com/office/drawing/2014/main" id="{249CB1AB-0EE3-3FAC-5F13-1F36CA6C745D}"/>
               </a:ext>
             </a:extLst>
           </p:cNvPr>
@@ -6615,64 +9578,181 @@
           </a:prstGeom>
         </p:spPr>
       </p:pic>
+      <p:grpSp>
+        <p:nvGrpSpPr>
+          <p:cNvPr id="10" name="Agrupar 9">
+            <a:extLst>
+              <a:ext uri="{FF2B5EF4-FFF2-40B4-BE49-F238E27FC236}">
+                <a16:creationId xmlns:a16="http://schemas.microsoft.com/office/drawing/2014/main" id="{CFDE33FD-59B2-1EA0-3AA2-9FC3F61F27DF}"/>
+              </a:ext>
+            </a:extLst>
+          </p:cNvPr>
+          <p:cNvGrpSpPr/>
+          <p:nvPr/>
+        </p:nvGrpSpPr>
+        <p:grpSpPr>
+          <a:xfrm>
+            <a:off x="4739781" y="3585812"/>
+            <a:ext cx="7452219" cy="3272188"/>
+            <a:chOff x="4739781" y="3585812"/>
+            <a:chExt cx="7452219" cy="3272188"/>
+          </a:xfrm>
+        </p:grpSpPr>
+        <p:pic>
+          <p:nvPicPr>
+            <p:cNvPr id="7" name="Imagem 6">
+              <a:extLst>
+                <a:ext uri="{FF2B5EF4-FFF2-40B4-BE49-F238E27FC236}">
+                  <a16:creationId xmlns:a16="http://schemas.microsoft.com/office/drawing/2014/main" id="{18A75F52-7FA1-E615-189F-5CBFA6B223C8}"/>
+                </a:ext>
+              </a:extLst>
+            </p:cNvPr>
+            <p:cNvPicPr>
+              <a:picLocks noChangeAspect="1"/>
+            </p:cNvPicPr>
+            <p:nvPr/>
+          </p:nvPicPr>
+          <p:blipFill>
+            <a:blip r:embed="rId3"/>
+            <a:stretch>
+              <a:fillRect/>
+            </a:stretch>
+          </p:blipFill>
+          <p:spPr>
+            <a:xfrm>
+              <a:off x="5492514" y="4013377"/>
+              <a:ext cx="6699486" cy="2844623"/>
+            </a:xfrm>
+            <a:prstGeom prst="rect">
+              <a:avLst/>
+            </a:prstGeom>
+            <a:effectLst>
+              <a:outerShdw blurRad="50800" dist="50800" dir="5400000" algn="ctr" rotWithShape="0">
+                <a:srgbClr val="000000"/>
+              </a:outerShdw>
+            </a:effectLst>
+          </p:spPr>
+        </p:pic>
+        <p:sp>
+          <p:nvSpPr>
+            <p:cNvPr id="8" name="Retângulo 7">
+              <a:extLst>
+                <a:ext uri="{FF2B5EF4-FFF2-40B4-BE49-F238E27FC236}">
+                  <a16:creationId xmlns:a16="http://schemas.microsoft.com/office/drawing/2014/main" id="{CDB7D207-DC0F-F3EB-0223-44ABE0E50EE1}"/>
+                </a:ext>
+              </a:extLst>
+            </p:cNvPr>
+            <p:cNvSpPr/>
+            <p:nvPr/>
+          </p:nvSpPr>
+          <p:spPr>
+            <a:xfrm>
+              <a:off x="4739781" y="4013377"/>
+              <a:ext cx="1104550" cy="2844623"/>
+            </a:xfrm>
+            <a:prstGeom prst="rect">
+              <a:avLst/>
+            </a:prstGeom>
+            <a:solidFill>
+              <a:schemeClr val="bg1"/>
+            </a:solidFill>
+            <a:ln>
+              <a:solidFill>
+                <a:schemeClr val="bg1"/>
+              </a:solidFill>
+            </a:ln>
+          </p:spPr>
+          <p:style>
+            <a:lnRef idx="2">
+              <a:schemeClr val="accent1">
+                <a:shade val="15000"/>
+              </a:schemeClr>
+            </a:lnRef>
+            <a:fillRef idx="1">
+              <a:schemeClr val="accent1"/>
+            </a:fillRef>
+            <a:effectRef idx="0">
+              <a:schemeClr val="accent1"/>
+            </a:effectRef>
+            <a:fontRef idx="minor">
+              <a:schemeClr val="lt1"/>
+            </a:fontRef>
+          </p:style>
+          <p:txBody>
+            <a:bodyPr rtlCol="0" anchor="ctr"/>
+            <a:lstStyle/>
+            <a:p>
+              <a:pPr algn="ctr"/>
+              <a:endParaRPr lang="pt-BR"/>
+            </a:p>
+          </p:txBody>
+        </p:sp>
+        <p:sp>
+          <p:nvSpPr>
+            <p:cNvPr id="9" name="Retângulo 8">
+              <a:extLst>
+                <a:ext uri="{FF2B5EF4-FFF2-40B4-BE49-F238E27FC236}">
+                  <a16:creationId xmlns:a16="http://schemas.microsoft.com/office/drawing/2014/main" id="{ABB87BB6-6783-DB32-9C97-2F23747E5B21}"/>
+                </a:ext>
+              </a:extLst>
+            </p:cNvPr>
+            <p:cNvSpPr/>
+            <p:nvPr/>
+          </p:nvSpPr>
+          <p:spPr>
+            <a:xfrm>
+              <a:off x="5292056" y="3585812"/>
+              <a:ext cx="4453856" cy="1078467"/>
+            </a:xfrm>
+            <a:prstGeom prst="rect">
+              <a:avLst/>
+            </a:prstGeom>
+            <a:solidFill>
+              <a:schemeClr val="bg1"/>
+            </a:solidFill>
+            <a:ln>
+              <a:solidFill>
+                <a:schemeClr val="bg1"/>
+              </a:solidFill>
+            </a:ln>
+          </p:spPr>
+          <p:style>
+            <a:lnRef idx="2">
+              <a:schemeClr val="accent1">
+                <a:shade val="15000"/>
+              </a:schemeClr>
+            </a:lnRef>
+            <a:fillRef idx="1">
+              <a:schemeClr val="accent1"/>
+            </a:fillRef>
+            <a:effectRef idx="0">
+              <a:schemeClr val="accent1"/>
+            </a:effectRef>
+            <a:fontRef idx="minor">
+              <a:schemeClr val="lt1"/>
+            </a:fontRef>
+          </p:style>
+          <p:txBody>
+            <a:bodyPr rtlCol="0" anchor="ctr"/>
+            <a:lstStyle/>
+            <a:p>
+              <a:pPr algn="ctr"/>
+              <a:endParaRPr lang="pt-BR"/>
+            </a:p>
+          </p:txBody>
+        </p:sp>
+      </p:grpSp>
       <p:pic>
         <p:nvPicPr>
-          <p:cNvPr id="3074" name="Picture 2">
-            <a:extLst>
-              <a:ext uri="{FF2B5EF4-FFF2-40B4-BE49-F238E27FC236}">
-                <a16:creationId xmlns:a16="http://schemas.microsoft.com/office/drawing/2014/main" id="{2329B87F-06B9-9F92-16E7-F2BC84F5FCAE}"/>
+          <p:cNvPr id="3" name="Imagem 2">
+            <a:extLst>
+              <a:ext uri="{FF2B5EF4-FFF2-40B4-BE49-F238E27FC236}">
+                <a16:creationId xmlns:a16="http://schemas.microsoft.com/office/drawing/2014/main" id="{C827EB39-010F-3317-D1A0-1405B5DA82F1}"/>
               </a:ext>
             </a:extLst>
           </p:cNvPr>
           <p:cNvPicPr>
-            <a:picLocks noChangeAspect="1" noChangeArrowheads="1"/>
-          </p:cNvPicPr>
-          <p:nvPr/>
-        </p:nvPicPr>
-        <p:blipFill>
-          <a:blip r:embed="rId3">
-            <a:extLst>
-              <a:ext uri="{28A0092B-C50C-407E-A947-70E740481C1C}">
-                <a14:useLocalDpi xmlns:a14="http://schemas.microsoft.com/office/drawing/2010/main" val="0"/>
-              </a:ext>
-            </a:extLst>
-          </a:blip>
-          <a:srcRect/>
-          <a:stretch>
-            <a:fillRect/>
-          </a:stretch>
-        </p:blipFill>
-        <p:spPr bwMode="auto">
-          <a:xfrm>
-            <a:off x="186916" y="1503584"/>
-            <a:ext cx="4205562" cy="2520000"/>
-          </a:xfrm>
-          <a:prstGeom prst="rect">
-            <a:avLst/>
-          </a:prstGeom>
-          <a:noFill/>
-          <a:extLst>
-            <a:ext uri="{909E8E84-426E-40DD-AFC4-6F175D3DCCD1}">
-              <a14:hiddenFill xmlns:a14="http://schemas.microsoft.com/office/drawing/2010/main">
-                <a:solidFill>
-                  <a:srgbClr val="FFFFFF"/>
-                </a:solidFill>
-              </a14:hiddenFill>
-            </a:ext>
-          </a:extLst>
-        </p:spPr>
-      </p:pic>
-      <p:pic>
-        <p:nvPicPr>
-          <p:cNvPr id="3076" name="Picture 4">
-            <a:extLst>
-              <a:ext uri="{FF2B5EF4-FFF2-40B4-BE49-F238E27FC236}">
-                <a16:creationId xmlns:a16="http://schemas.microsoft.com/office/drawing/2014/main" id="{962C8C4D-5CCE-6E48-0B53-A2115CC3E14C}"/>
-              </a:ext>
-            </a:extLst>
-          </p:cNvPr>
-          <p:cNvPicPr>
-            <a:picLocks noChangeAspect="1" noChangeArrowheads="1"/>
+            <a:picLocks noChangeAspect="1"/>
           </p:cNvPicPr>
           <p:nvPr/>
         </p:nvPicPr>
@@ -6684,223 +9764,24 @@
               </a:ext>
             </a:extLst>
           </a:blip>
-          <a:srcRect/>
           <a:stretch>
             <a:fillRect/>
           </a:stretch>
         </p:blipFill>
-        <p:spPr bwMode="auto">
+        <p:spPr>
           <a:xfrm>
-            <a:off x="4020925" y="1570609"/>
-            <a:ext cx="4205563" cy="2520000"/>
+            <a:off x="2590441" y="1694171"/>
+            <a:ext cx="8334423" cy="4861747"/>
           </a:xfrm>
           <a:prstGeom prst="rect">
             <a:avLst/>
           </a:prstGeom>
-          <a:noFill/>
-          <a:extLst>
-            <a:ext uri="{909E8E84-426E-40DD-AFC4-6F175D3DCCD1}">
-              <a14:hiddenFill xmlns:a14="http://schemas.microsoft.com/office/drawing/2010/main">
-                <a:solidFill>
-                  <a:srgbClr val="FFFFFF"/>
-                </a:solidFill>
-              </a14:hiddenFill>
-            </a:ext>
-          </a:extLst>
-        </p:spPr>
-      </p:pic>
-      <p:pic>
-        <p:nvPicPr>
-          <p:cNvPr id="3078" name="Picture 6">
-            <a:extLst>
-              <a:ext uri="{FF2B5EF4-FFF2-40B4-BE49-F238E27FC236}">
-                <a16:creationId xmlns:a16="http://schemas.microsoft.com/office/drawing/2014/main" id="{B8C2658F-BF00-C442-78A5-2FF254252A3E}"/>
-              </a:ext>
-            </a:extLst>
-          </p:cNvPr>
-          <p:cNvPicPr>
-            <a:picLocks noChangeAspect="1" noChangeArrowheads="1"/>
-          </p:cNvPicPr>
-          <p:nvPr/>
-        </p:nvPicPr>
-        <p:blipFill>
-          <a:blip r:embed="rId5">
-            <a:extLst>
-              <a:ext uri="{28A0092B-C50C-407E-A947-70E740481C1C}">
-                <a14:useLocalDpi xmlns:a14="http://schemas.microsoft.com/office/drawing/2010/main" val="0"/>
-              </a:ext>
-            </a:extLst>
-          </a:blip>
-          <a:srcRect/>
-          <a:stretch>
-            <a:fillRect/>
-          </a:stretch>
-        </p:blipFill>
-        <p:spPr bwMode="auto">
-          <a:xfrm>
-            <a:off x="7799521" y="1553119"/>
-            <a:ext cx="4205563" cy="2520000"/>
-          </a:xfrm>
-          <a:prstGeom prst="rect">
-            <a:avLst/>
-          </a:prstGeom>
-          <a:noFill/>
-          <a:extLst>
-            <a:ext uri="{909E8E84-426E-40DD-AFC4-6F175D3DCCD1}">
-              <a14:hiddenFill xmlns:a14="http://schemas.microsoft.com/office/drawing/2010/main">
-                <a:solidFill>
-                  <a:srgbClr val="FFFFFF"/>
-                </a:solidFill>
-              </a14:hiddenFill>
-            </a:ext>
-          </a:extLst>
-        </p:spPr>
-      </p:pic>
-      <p:pic>
-        <p:nvPicPr>
-          <p:cNvPr id="3080" name="Picture 8">
-            <a:extLst>
-              <a:ext uri="{FF2B5EF4-FFF2-40B4-BE49-F238E27FC236}">
-                <a16:creationId xmlns:a16="http://schemas.microsoft.com/office/drawing/2014/main" id="{5B3FED5F-5207-9B05-0C35-F1660C7AB5DF}"/>
-              </a:ext>
-            </a:extLst>
-          </p:cNvPr>
-          <p:cNvPicPr>
-            <a:picLocks noChangeAspect="1" noChangeArrowheads="1"/>
-          </p:cNvPicPr>
-          <p:nvPr/>
-        </p:nvPicPr>
-        <p:blipFill>
-          <a:blip r:embed="rId6">
-            <a:extLst>
-              <a:ext uri="{28A0092B-C50C-407E-A947-70E740481C1C}">
-                <a14:useLocalDpi xmlns:a14="http://schemas.microsoft.com/office/drawing/2010/main" val="0"/>
-              </a:ext>
-            </a:extLst>
-          </a:blip>
-          <a:srcRect/>
-          <a:stretch>
-            <a:fillRect/>
-          </a:stretch>
-        </p:blipFill>
-        <p:spPr bwMode="auto">
-          <a:xfrm>
-            <a:off x="186916" y="3990072"/>
-            <a:ext cx="4205563" cy="2520000"/>
-          </a:xfrm>
-          <a:prstGeom prst="rect">
-            <a:avLst/>
-          </a:prstGeom>
-          <a:noFill/>
-          <a:extLst>
-            <a:ext uri="{909E8E84-426E-40DD-AFC4-6F175D3DCCD1}">
-              <a14:hiddenFill xmlns:a14="http://schemas.microsoft.com/office/drawing/2010/main">
-                <a:solidFill>
-                  <a:srgbClr val="FFFFFF"/>
-                </a:solidFill>
-              </a14:hiddenFill>
-            </a:ext>
-          </a:extLst>
-        </p:spPr>
-      </p:pic>
-      <p:pic>
-        <p:nvPicPr>
-          <p:cNvPr id="3082" name="Picture 10">
-            <a:extLst>
-              <a:ext uri="{FF2B5EF4-FFF2-40B4-BE49-F238E27FC236}">
-                <a16:creationId xmlns:a16="http://schemas.microsoft.com/office/drawing/2014/main" id="{37DD70D8-531A-D5F5-E853-845E1C643FBF}"/>
-              </a:ext>
-            </a:extLst>
-          </p:cNvPr>
-          <p:cNvPicPr>
-            <a:picLocks noChangeAspect="1" noChangeArrowheads="1"/>
-          </p:cNvPicPr>
-          <p:nvPr/>
-        </p:nvPicPr>
-        <p:blipFill>
-          <a:blip r:embed="rId7">
-            <a:extLst>
-              <a:ext uri="{28A0092B-C50C-407E-A947-70E740481C1C}">
-                <a14:useLocalDpi xmlns:a14="http://schemas.microsoft.com/office/drawing/2010/main" val="0"/>
-              </a:ext>
-            </a:extLst>
-          </a:blip>
-          <a:srcRect/>
-          <a:stretch>
-            <a:fillRect/>
-          </a:stretch>
-        </p:blipFill>
-        <p:spPr bwMode="auto">
-          <a:xfrm>
-            <a:off x="4020925" y="4049272"/>
-            <a:ext cx="4205563" cy="2520000"/>
-          </a:xfrm>
-          <a:prstGeom prst="rect">
-            <a:avLst/>
-          </a:prstGeom>
-          <a:noFill/>
-          <a:extLst>
-            <a:ext uri="{909E8E84-426E-40DD-AFC4-6F175D3DCCD1}">
-              <a14:hiddenFill xmlns:a14="http://schemas.microsoft.com/office/drawing/2010/main">
-                <a:solidFill>
-                  <a:srgbClr val="FFFFFF"/>
-                </a:solidFill>
-              </a14:hiddenFill>
-            </a:ext>
-          </a:extLst>
-        </p:spPr>
-      </p:pic>
-      <p:pic>
-        <p:nvPicPr>
-          <p:cNvPr id="3084" name="Picture 12">
-            <a:extLst>
-              <a:ext uri="{FF2B5EF4-FFF2-40B4-BE49-F238E27FC236}">
-                <a16:creationId xmlns:a16="http://schemas.microsoft.com/office/drawing/2014/main" id="{7EB1E8BA-2FB6-4A68-9A16-1D9F796F152C}"/>
-              </a:ext>
-            </a:extLst>
-          </p:cNvPr>
-          <p:cNvPicPr>
-            <a:picLocks noChangeAspect="1" noChangeArrowheads="1"/>
-          </p:cNvPicPr>
-          <p:nvPr/>
-        </p:nvPicPr>
-        <p:blipFill>
-          <a:blip r:embed="rId8">
-            <a:extLst>
-              <a:ext uri="{28A0092B-C50C-407E-A947-70E740481C1C}">
-                <a14:useLocalDpi xmlns:a14="http://schemas.microsoft.com/office/drawing/2010/main" val="0"/>
-              </a:ext>
-            </a:extLst>
-          </a:blip>
-          <a:srcRect/>
-          <a:stretch>
-            <a:fillRect/>
-          </a:stretch>
-        </p:blipFill>
-        <p:spPr bwMode="auto">
-          <a:xfrm>
-            <a:off x="7854934" y="4023584"/>
-            <a:ext cx="4205563" cy="2520000"/>
-          </a:xfrm>
-          <a:prstGeom prst="rect">
-            <a:avLst/>
-          </a:prstGeom>
-          <a:noFill/>
-          <a:extLst>
-            <a:ext uri="{909E8E84-426E-40DD-AFC4-6F175D3DCCD1}">
-              <a14:hiddenFill xmlns:a14="http://schemas.microsoft.com/office/drawing/2010/main">
-                <a:solidFill>
-                  <a:srgbClr val="FFFFFF"/>
-                </a:solidFill>
-              </a14:hiddenFill>
-            </a:ext>
-          </a:extLst>
         </p:spPr>
       </p:pic>
     </p:spTree>
     <p:extLst>
       <p:ext uri="{BB962C8B-B14F-4D97-AF65-F5344CB8AC3E}">
-        <p14:creationId xmlns:p14="http://schemas.microsoft.com/office/powerpoint/2010/main" val="3376384073"/>
+        <p14:creationId xmlns:p14="http://schemas.microsoft.com/office/powerpoint/2010/main" val="220922368"/>
       </p:ext>
     </p:extLst>
   </p:cSld>
@@ -6911,6 +9792,272 @@
 </file>
 
 <file path=ppt/slides/slide7.xml><?xml version="1.0" encoding="utf-8"?>
+<p:sld xmlns:a="http://schemas.openxmlformats.org/drawingml/2006/main" xmlns:r="http://schemas.openxmlformats.org/officeDocument/2006/relationships" xmlns:p="http://schemas.openxmlformats.org/presentationml/2006/main">
+  <p:cSld>
+    <p:spTree>
+      <p:nvGrpSpPr>
+        <p:cNvPr id="1" name="">
+          <a:extLst>
+            <a:ext uri="{FF2B5EF4-FFF2-40B4-BE49-F238E27FC236}">
+              <a16:creationId xmlns:a16="http://schemas.microsoft.com/office/drawing/2014/main" id="{E9E269BE-EF8D-C334-38C6-00ED357D0F58}"/>
+            </a:ext>
+          </a:extLst>
+        </p:cNvPr>
+        <p:cNvGrpSpPr/>
+        <p:nvPr/>
+      </p:nvGrpSpPr>
+      <p:grpSpPr>
+        <a:xfrm>
+          <a:off x="0" y="0"/>
+          <a:ext cx="0" cy="0"/>
+          <a:chOff x="0" y="0"/>
+          <a:chExt cx="0" cy="0"/>
+        </a:xfrm>
+      </p:grpSpPr>
+      <p:pic>
+        <p:nvPicPr>
+          <p:cNvPr id="5" name="Imagem 4">
+            <a:extLst>
+              <a:ext uri="{FF2B5EF4-FFF2-40B4-BE49-F238E27FC236}">
+                <a16:creationId xmlns:a16="http://schemas.microsoft.com/office/drawing/2014/main" id="{8605649D-38D0-0BDD-01BA-2FF51DCF4226}"/>
+              </a:ext>
+            </a:extLst>
+          </p:cNvPr>
+          <p:cNvPicPr>
+            <a:picLocks noChangeAspect="1"/>
+          </p:cNvPicPr>
+          <p:nvPr/>
+        </p:nvPicPr>
+        <p:blipFill>
+          <a:blip r:embed="rId2"/>
+          <a:stretch>
+            <a:fillRect/>
+          </a:stretch>
+        </p:blipFill>
+        <p:spPr>
+          <a:xfrm>
+            <a:off x="0" y="0"/>
+            <a:ext cx="12192000" cy="1398060"/>
+          </a:xfrm>
+          <a:prstGeom prst="rect">
+            <a:avLst/>
+          </a:prstGeom>
+        </p:spPr>
+      </p:pic>
+      <p:grpSp>
+        <p:nvGrpSpPr>
+          <p:cNvPr id="10" name="Agrupar 9">
+            <a:extLst>
+              <a:ext uri="{FF2B5EF4-FFF2-40B4-BE49-F238E27FC236}">
+                <a16:creationId xmlns:a16="http://schemas.microsoft.com/office/drawing/2014/main" id="{BAC80D2C-41B7-7489-5698-2DFF33C7604E}"/>
+              </a:ext>
+            </a:extLst>
+          </p:cNvPr>
+          <p:cNvGrpSpPr/>
+          <p:nvPr/>
+        </p:nvGrpSpPr>
+        <p:grpSpPr>
+          <a:xfrm>
+            <a:off x="4739781" y="3585812"/>
+            <a:ext cx="7452219" cy="3272188"/>
+            <a:chOff x="4739781" y="3585812"/>
+            <a:chExt cx="7452219" cy="3272188"/>
+          </a:xfrm>
+        </p:grpSpPr>
+        <p:pic>
+          <p:nvPicPr>
+            <p:cNvPr id="7" name="Imagem 6">
+              <a:extLst>
+                <a:ext uri="{FF2B5EF4-FFF2-40B4-BE49-F238E27FC236}">
+                  <a16:creationId xmlns:a16="http://schemas.microsoft.com/office/drawing/2014/main" id="{97C84EFA-3A6A-B9AF-2BF7-9C370AE3DC8B}"/>
+                </a:ext>
+              </a:extLst>
+            </p:cNvPr>
+            <p:cNvPicPr>
+              <a:picLocks noChangeAspect="1"/>
+            </p:cNvPicPr>
+            <p:nvPr/>
+          </p:nvPicPr>
+          <p:blipFill>
+            <a:blip r:embed="rId3"/>
+            <a:stretch>
+              <a:fillRect/>
+            </a:stretch>
+          </p:blipFill>
+          <p:spPr>
+            <a:xfrm>
+              <a:off x="5492514" y="4013377"/>
+              <a:ext cx="6699486" cy="2844623"/>
+            </a:xfrm>
+            <a:prstGeom prst="rect">
+              <a:avLst/>
+            </a:prstGeom>
+            <a:effectLst>
+              <a:outerShdw blurRad="50800" dist="50800" dir="5400000" algn="ctr" rotWithShape="0">
+                <a:srgbClr val="000000"/>
+              </a:outerShdw>
+            </a:effectLst>
+          </p:spPr>
+        </p:pic>
+        <p:sp>
+          <p:nvSpPr>
+            <p:cNvPr id="8" name="Retângulo 7">
+              <a:extLst>
+                <a:ext uri="{FF2B5EF4-FFF2-40B4-BE49-F238E27FC236}">
+                  <a16:creationId xmlns:a16="http://schemas.microsoft.com/office/drawing/2014/main" id="{B12DB201-EEFE-5031-1873-679B79066016}"/>
+                </a:ext>
+              </a:extLst>
+            </p:cNvPr>
+            <p:cNvSpPr/>
+            <p:nvPr/>
+          </p:nvSpPr>
+          <p:spPr>
+            <a:xfrm>
+              <a:off x="4739781" y="4013377"/>
+              <a:ext cx="1104550" cy="2844623"/>
+            </a:xfrm>
+            <a:prstGeom prst="rect">
+              <a:avLst/>
+            </a:prstGeom>
+            <a:solidFill>
+              <a:schemeClr val="bg1"/>
+            </a:solidFill>
+            <a:ln>
+              <a:solidFill>
+                <a:schemeClr val="bg1"/>
+              </a:solidFill>
+            </a:ln>
+          </p:spPr>
+          <p:style>
+            <a:lnRef idx="2">
+              <a:schemeClr val="accent1">
+                <a:shade val="15000"/>
+              </a:schemeClr>
+            </a:lnRef>
+            <a:fillRef idx="1">
+              <a:schemeClr val="accent1"/>
+            </a:fillRef>
+            <a:effectRef idx="0">
+              <a:schemeClr val="accent1"/>
+            </a:effectRef>
+            <a:fontRef idx="minor">
+              <a:schemeClr val="lt1"/>
+            </a:fontRef>
+          </p:style>
+          <p:txBody>
+            <a:bodyPr rtlCol="0" anchor="ctr"/>
+            <a:lstStyle/>
+            <a:p>
+              <a:pPr algn="ctr"/>
+              <a:endParaRPr lang="pt-BR"/>
+            </a:p>
+          </p:txBody>
+        </p:sp>
+        <p:sp>
+          <p:nvSpPr>
+            <p:cNvPr id="9" name="Retângulo 8">
+              <a:extLst>
+                <a:ext uri="{FF2B5EF4-FFF2-40B4-BE49-F238E27FC236}">
+                  <a16:creationId xmlns:a16="http://schemas.microsoft.com/office/drawing/2014/main" id="{6ABB8F99-FC95-8672-996A-A758F5C68F91}"/>
+                </a:ext>
+              </a:extLst>
+            </p:cNvPr>
+            <p:cNvSpPr/>
+            <p:nvPr/>
+          </p:nvSpPr>
+          <p:spPr>
+            <a:xfrm>
+              <a:off x="5292056" y="3585812"/>
+              <a:ext cx="4453856" cy="1078467"/>
+            </a:xfrm>
+            <a:prstGeom prst="rect">
+              <a:avLst/>
+            </a:prstGeom>
+            <a:solidFill>
+              <a:schemeClr val="bg1"/>
+            </a:solidFill>
+            <a:ln>
+              <a:solidFill>
+                <a:schemeClr val="bg1"/>
+              </a:solidFill>
+            </a:ln>
+          </p:spPr>
+          <p:style>
+            <a:lnRef idx="2">
+              <a:schemeClr val="accent1">
+                <a:shade val="15000"/>
+              </a:schemeClr>
+            </a:lnRef>
+            <a:fillRef idx="1">
+              <a:schemeClr val="accent1"/>
+            </a:fillRef>
+            <a:effectRef idx="0">
+              <a:schemeClr val="accent1"/>
+            </a:effectRef>
+            <a:fontRef idx="minor">
+              <a:schemeClr val="lt1"/>
+            </a:fontRef>
+          </p:style>
+          <p:txBody>
+            <a:bodyPr rtlCol="0" anchor="ctr"/>
+            <a:lstStyle/>
+            <a:p>
+              <a:pPr algn="ctr"/>
+              <a:endParaRPr lang="pt-BR"/>
+            </a:p>
+          </p:txBody>
+        </p:sp>
+      </p:grpSp>
+      <p:pic>
+        <p:nvPicPr>
+          <p:cNvPr id="12" name="Imagem 11">
+            <a:extLst>
+              <a:ext uri="{FF2B5EF4-FFF2-40B4-BE49-F238E27FC236}">
+                <a16:creationId xmlns:a16="http://schemas.microsoft.com/office/drawing/2014/main" id="{E7B8E890-F0FD-E4B9-BFE1-3F0DB0E05337}"/>
+              </a:ext>
+            </a:extLst>
+          </p:cNvPr>
+          <p:cNvPicPr>
+            <a:picLocks noChangeAspect="1"/>
+          </p:cNvPicPr>
+          <p:nvPr/>
+        </p:nvPicPr>
+        <p:blipFill>
+          <a:blip r:embed="rId4">
+            <a:extLst>
+              <a:ext uri="{28A0092B-C50C-407E-A947-70E740481C1C}">
+                <a14:useLocalDpi xmlns:a14="http://schemas.microsoft.com/office/drawing/2010/main" val="0"/>
+              </a:ext>
+            </a:extLst>
+          </a:blip>
+          <a:stretch>
+            <a:fillRect/>
+          </a:stretch>
+        </p:blipFill>
+        <p:spPr>
+          <a:xfrm>
+            <a:off x="1632393" y="1548498"/>
+            <a:ext cx="8216261" cy="4929757"/>
+          </a:xfrm>
+          <a:prstGeom prst="rect">
+            <a:avLst/>
+          </a:prstGeom>
+        </p:spPr>
+      </p:pic>
+    </p:spTree>
+    <p:extLst>
+      <p:ext uri="{BB962C8B-B14F-4D97-AF65-F5344CB8AC3E}">
+        <p14:creationId xmlns:p14="http://schemas.microsoft.com/office/powerpoint/2010/main" val="4174757410"/>
+      </p:ext>
+    </p:extLst>
+  </p:cSld>
+  <p:clrMapOvr>
+    <a:masterClrMapping/>
+  </p:clrMapOvr>
+</p:sld>
+</file>
+
+<file path=ppt/slides/slide8.xml><?xml version="1.0" encoding="utf-8"?>
 <p:sld xmlns:a="http://schemas.openxmlformats.org/drawingml/2006/main" xmlns:r="http://schemas.openxmlformats.org/officeDocument/2006/relationships" xmlns:p="http://schemas.openxmlformats.org/presentationml/2006/main">
   <p:cSld>
     <p:spTree>
@@ -7145,8 +10292,8 @@
         </p:nvSpPr>
         <p:spPr bwMode="auto">
           <a:xfrm>
-            <a:off x="1201540" y="2430602"/>
-            <a:ext cx="10515600" cy="3877985"/>
+            <a:off x="1075630" y="2265589"/>
+            <a:ext cx="10515600" cy="3170099"/>
           </a:xfrm>
           <a:prstGeom prst="rect">
             <a:avLst/>
@@ -7208,69 +10355,8 @@
               <a:buChar char="•"/>
             </a:pPr>
             <a:r>
-              <a:rPr kumimoji="0" lang="pt-BR" altLang="pt-BR" sz="2400" b="1" i="0" u="none" strike="noStrike" cap="none" normalizeH="0" baseline="0" dirty="0">
-                <a:ln>
-                  <a:noFill/>
-                </a:ln>
-                <a:solidFill>
-                  <a:schemeClr val="tx1"/>
-                </a:solidFill>
-                <a:effectLst/>
-                <a:latin typeface="Google Sans Text"/>
-              </a:rPr>
-              <a:t>Quick </a:t>
-            </a:r>
-            <a:r>
-              <a:rPr kumimoji="0" lang="pt-BR" altLang="pt-BR" sz="2400" b="1" i="0" u="none" strike="noStrike" cap="none" normalizeH="0" baseline="0" dirty="0" err="1">
-                <a:ln>
-                  <a:noFill/>
-                </a:ln>
-                <a:solidFill>
-                  <a:schemeClr val="tx1"/>
-                </a:solidFill>
-                <a:effectLst/>
-                <a:latin typeface="Google Sans Text"/>
-              </a:rPr>
-              <a:t>Sort</a:t>
-            </a:r>
-            <a:r>
-              <a:rPr kumimoji="0" lang="pt-BR" altLang="pt-BR" sz="2400" b="1" i="0" u="none" strike="noStrike" cap="none" normalizeH="0" baseline="0" dirty="0">
-                <a:ln>
-                  <a:noFill/>
-                </a:ln>
-                <a:solidFill>
-                  <a:schemeClr val="tx1"/>
-                </a:solidFill>
-                <a:effectLst/>
-                <a:latin typeface="Google Sans Text"/>
-              </a:rPr>
-              <a:t> (Eficiência </a:t>
-            </a:r>
-            <a:r>
-              <a:rPr kumimoji="0" lang="pt-BR" altLang="pt-BR" sz="2400" b="1" i="1" u="none" strike="noStrike" cap="none" normalizeH="0" baseline="0" dirty="0" err="1">
-                <a:ln>
-                  <a:noFill/>
-                </a:ln>
-                <a:solidFill>
-                  <a:schemeClr val="tx1"/>
-                </a:solidFill>
-                <a:effectLst/>
-                <a:latin typeface="Google Sans Text"/>
-              </a:rPr>
-              <a:t>In-Place</a:t>
-            </a:r>
-            <a:r>
-              <a:rPr kumimoji="0" lang="pt-BR" altLang="pt-BR" sz="2400" b="1" i="0" u="none" strike="noStrike" cap="none" normalizeH="0" baseline="0" dirty="0">
-                <a:ln>
-                  <a:noFill/>
-                </a:ln>
-                <a:solidFill>
-                  <a:schemeClr val="tx1"/>
-                </a:solidFill>
-                <a:effectLst/>
-                <a:latin typeface="Google Sans Text"/>
-              </a:rPr>
-              <a:t>):</a:t>
+              <a:rPr lang="pt-BR" altLang="pt-BR" sz="2400" b="1" dirty="0"/>
+              <a:t>O( log n)</a:t>
             </a:r>
           </a:p>
           <a:p>
@@ -7288,112 +10374,8 @@
               <a:buChar char="•"/>
             </a:pPr>
             <a:r>
-              <a:rPr kumimoji="0" lang="pt-BR" altLang="pt-BR" sz="2000" b="0" i="0" u="none" strike="noStrike" cap="none" normalizeH="0" baseline="0" dirty="0">
-                <a:ln>
-                  <a:noFill/>
-                </a:ln>
-                <a:solidFill>
-                  <a:schemeClr val="tx1"/>
-                </a:solidFill>
-                <a:effectLst/>
-                <a:latin typeface="Google Sans Text"/>
-              </a:rPr>
-              <a:t> Menor tempo absoluto observado (~0.09s).</a:t>
-            </a:r>
-          </a:p>
-          <a:p>
-            <a:pPr marL="457200" lvl="1" indent="0" eaLnBrk="0" fontAlgn="base" hangingPunct="0">
-              <a:lnSpc>
-                <a:spcPct val="100000"/>
-              </a:lnSpc>
-              <a:spcBef>
-                <a:spcPct val="0"/>
-              </a:spcBef>
-              <a:spcAft>
-                <a:spcPct val="0"/>
-              </a:spcAft>
-              <a:buFontTx/>
-              <a:buChar char="•"/>
-            </a:pPr>
-            <a:r>
-              <a:rPr kumimoji="0" lang="pt-BR" altLang="pt-BR" sz="2000" b="0" i="0" u="none" strike="noStrike" cap="none" normalizeH="0" baseline="0" dirty="0">
-                <a:ln>
-                  <a:noFill/>
-                </a:ln>
-                <a:solidFill>
-                  <a:schemeClr val="tx1"/>
-                </a:solidFill>
-                <a:effectLst/>
-                <a:latin typeface="Google Sans Text"/>
-              </a:rPr>
-              <a:t> Evita alocações dinâmicas e maximiza localidade de cache.</a:t>
-            </a:r>
-          </a:p>
-          <a:p>
-            <a:pPr marL="457200" lvl="1" indent="0" eaLnBrk="0" fontAlgn="base" hangingPunct="0">
-              <a:lnSpc>
-                <a:spcPct val="100000"/>
-              </a:lnSpc>
-              <a:spcBef>
-                <a:spcPct val="0"/>
-              </a:spcBef>
-              <a:spcAft>
-                <a:spcPct val="0"/>
-              </a:spcAft>
-              <a:buFontTx/>
-              <a:buChar char="•"/>
-            </a:pPr>
-            <a:r>
-              <a:rPr kumimoji="0" lang="pt-BR" altLang="pt-BR" sz="2000" b="1" i="0" u="none" strike="noStrike" cap="none" normalizeH="0" baseline="0" dirty="0">
-                <a:ln>
-                  <a:noFill/>
-                </a:ln>
-                <a:solidFill>
-                  <a:schemeClr val="tx1"/>
-                </a:solidFill>
-                <a:effectLst/>
-                <a:latin typeface="Google Sans Text"/>
-              </a:rPr>
-              <a:t> Estratégia Adotada:</a:t>
-            </a:r>
-            <a:r>
-              <a:rPr kumimoji="0" lang="pt-BR" altLang="pt-BR" sz="2000" b="0" i="0" u="none" strike="noStrike" cap="none" normalizeH="0" baseline="0" dirty="0">
-                <a:ln>
-                  <a:noFill/>
-                </a:ln>
-                <a:solidFill>
-                  <a:schemeClr val="tx1"/>
-                </a:solidFill>
-                <a:effectLst/>
-                <a:latin typeface="Google Sans Text"/>
-              </a:rPr>
-              <a:t> Pivô central mitigou o pior caso de O(n</a:t>
-            </a:r>
-            <a:r>
-              <a:rPr kumimoji="0" lang="pt-BR" altLang="pt-BR" sz="2000" b="0" i="0" u="none" strike="noStrike" cap="none" normalizeH="0" baseline="30000" dirty="0">
-                <a:ln>
-                  <a:noFill/>
-                </a:ln>
-                <a:solidFill>
-                  <a:schemeClr val="tx1"/>
-                </a:solidFill>
-                <a:effectLst/>
-                <a:latin typeface="Google Sans Text"/>
-              </a:rPr>
-              <a:t>2</a:t>
-            </a:r>
-            <a:r>
-              <a:rPr kumimoji="0" lang="pt-BR" altLang="pt-BR" sz="2000" b="0" i="0" u="none" strike="noStrike" cap="none" normalizeH="0" baseline="0" dirty="0">
-                <a:ln>
-                  <a:noFill/>
-                </a:ln>
-                <a:solidFill>
-                  <a:schemeClr val="tx1"/>
-                </a:solidFill>
-                <a:effectLst/>
-                <a:latin typeface="Google Sans Text"/>
-              </a:rPr>
-              <a:t>), mantendo a performance log-linear. Contraponto: Algoritmo instável.</a:t>
+              <a:rPr lang="pt-BR" altLang="pt-BR" dirty="0"/>
+              <a:t> Estável e rápida em núcleo único</a:t>
             </a:r>
           </a:p>
           <a:p>
@@ -7439,19 +10421,19 @@
               <a:rPr lang="pt-BR" altLang="pt-BR" sz="2400" b="1" dirty="0">
                 <a:latin typeface="Google Sans Text"/>
               </a:rPr>
-              <a:t>Merge </a:t>
-            </a:r>
-            <a:r>
-              <a:rPr lang="pt-BR" altLang="pt-BR" sz="2400" b="1" dirty="0" err="1">
+              <a:t>Paradoxo do </a:t>
+            </a:r>
+            <a:r>
+              <a:rPr lang="pt-BR" sz="2400" b="1" dirty="0" err="1">
                 <a:latin typeface="Google Sans Text"/>
               </a:rPr>
-              <a:t>Sort</a:t>
-            </a:r>
-            <a:r>
-              <a:rPr lang="pt-BR" altLang="pt-BR" sz="2400" b="1" dirty="0">
+              <a:t>Multiprocessing</a:t>
+            </a:r>
+            <a:r>
+              <a:rPr lang="pt-BR" sz="2400" b="1" dirty="0">
                 <a:latin typeface="Google Sans Text"/>
               </a:rPr>
-              <a:t> (Estabilidade e Determinismo):</a:t>
+              <a:t> (4 núcleos)</a:t>
             </a:r>
           </a:p>
           <a:p>
@@ -7469,11 +10451,18 @@
               <a:buChar char="•"/>
             </a:pPr>
             <a:r>
-              <a:rPr lang="pt-BR" altLang="pt-BR" sz="2000" dirty="0">
+              <a:rPr lang="pt-BR" altLang="pt-BR" sz="2000" b="1" dirty="0">
                 <a:latin typeface="Google Sans Text"/>
               </a:rPr>
-              <a:t> Desempenho assintótico de O(n log n) em todos os cenários analisados</a:t>
-            </a:r>
+              <a:t> </a:t>
+            </a:r>
+            <a:r>
+              <a:rPr lang="pt-BR" dirty="0"/>
+              <a:t>+1116% de tempo</a:t>
+            </a:r>
+            <a:endParaRPr lang="pt-BR" altLang="pt-BR" sz="2000" b="1" dirty="0">
+              <a:latin typeface="Google Sans Text"/>
+            </a:endParaRPr>
           </a:p>
           <a:p>
             <a:pPr marL="457200" lvl="1" indent="0" eaLnBrk="0" fontAlgn="base" hangingPunct="0">
@@ -7490,26 +10479,16 @@
               <a:buChar char="•"/>
             </a:pPr>
             <a:r>
-              <a:rPr lang="pt-BR" altLang="pt-BR" sz="2000" dirty="0">
-                <a:latin typeface="Google Sans Text"/>
-              </a:rPr>
+              <a:rPr lang="pt-BR" altLang="pt-BR" dirty="0"/>
               <a:t> </a:t>
             </a:r>
             <a:r>
-              <a:rPr lang="pt-BR" altLang="pt-BR" sz="2000" b="1" dirty="0">
-                <a:latin typeface="Google Sans Text"/>
-              </a:rPr>
-              <a:t>Vantagem Crítica: </a:t>
-            </a:r>
-            <a:r>
-              <a:rPr lang="pt-BR" altLang="pt-BR" sz="2000" dirty="0">
-                <a:latin typeface="Google Sans Text"/>
-              </a:rPr>
-              <a:t>Estabilidade (preserva a ordem de chaves idênticas)</a:t>
-            </a:r>
-          </a:p>
-          <a:p>
-            <a:pPr marL="457200" lvl="1" indent="0" eaLnBrk="0" fontAlgn="base" hangingPunct="0">
+              <a:rPr lang="pt-BR" altLang="pt-BR" b="1" dirty="0"/>
+              <a:t>Custo Arquitetural:</a:t>
+            </a:r>
+          </a:p>
+          <a:p>
+            <a:pPr marL="914400" lvl="2" indent="0" eaLnBrk="0" fontAlgn="base" hangingPunct="0">
               <a:lnSpc>
                 <a:spcPct val="100000"/>
               </a:lnSpc>
@@ -7523,26 +10502,20 @@
               <a:buChar char="•"/>
             </a:pPr>
             <a:r>
-              <a:rPr lang="pt-BR" altLang="pt-BR" sz="2000" dirty="0">
-                <a:latin typeface="Google Sans Text"/>
-              </a:rPr>
-              <a:t> </a:t>
-            </a:r>
-            <a:r>
-              <a:rPr lang="pt-BR" altLang="pt-BR" sz="2000" b="1" dirty="0">
-                <a:latin typeface="Google Sans Text"/>
-              </a:rPr>
-              <a:t>Contraponto: </a:t>
-            </a:r>
-            <a:r>
-              <a:rPr lang="pt-BR" altLang="pt-BR" sz="2000" dirty="0">
-                <a:latin typeface="Google Sans Text"/>
-              </a:rPr>
-              <a:t>Exige alocação de memória extra na ordem de O(n).</a:t>
-            </a:r>
-          </a:p>
-          <a:p>
-            <a:pPr marL="0" lvl="0" indent="0" eaLnBrk="0" fontAlgn="base" hangingPunct="0">
+              <a:rPr lang="pt-BR" dirty="0"/>
+              <a:t> Serialização os objetos na memória (</a:t>
+            </a:r>
+            <a:r>
+              <a:rPr lang="pt-BR" b="1" dirty="0" err="1"/>
+              <a:t>Pickling</a:t>
+            </a:r>
+            <a:r>
+              <a:rPr lang="pt-BR" dirty="0"/>
+              <a:t>)</a:t>
+            </a:r>
+          </a:p>
+          <a:p>
+            <a:pPr marL="914400" lvl="2" indent="0" eaLnBrk="0" fontAlgn="base" hangingPunct="0">
               <a:lnSpc>
                 <a:spcPct val="100000"/>
               </a:lnSpc>
@@ -7552,9 +10525,26 @@
               <a:spcAft>
                 <a:spcPct val="0"/>
               </a:spcAft>
-              <a:buNone/>
+              <a:buFontTx/>
+              <a:buChar char="•"/>
             </a:pPr>
-            <a:endParaRPr kumimoji="0" lang="pt-BR" altLang="pt-BR" sz="1800" b="0" i="0" u="none" strike="noStrike" cap="none" normalizeH="0" baseline="0" dirty="0">
+            <a:r>
+              <a:rPr lang="pt-BR" dirty="0"/>
+              <a:t> Atraso da Comunicação </a:t>
+            </a:r>
+            <a:r>
+              <a:rPr lang="pt-BR" dirty="0" err="1"/>
+              <a:t>Inter-Processos</a:t>
+            </a:r>
+            <a:r>
+              <a:rPr lang="pt-BR" dirty="0"/>
+              <a:t> (</a:t>
+            </a:r>
+            <a:r>
+              <a:rPr lang="pt-BR" b="1" dirty="0"/>
+              <a:t>IPC Delay)</a:t>
+            </a:r>
+            <a:endParaRPr kumimoji="0" lang="pt-BR" altLang="pt-BR" sz="1800" b="1" i="0" u="none" strike="noStrike" cap="none" normalizeH="0" baseline="0" dirty="0">
               <a:ln>
                 <a:noFill/>
               </a:ln>
@@ -7624,81 +10614,8 @@
               <a:rPr lang="pt-BR" sz="2800" b="1" dirty="0">
                 <a:latin typeface="+mn-lt"/>
               </a:rPr>
-              <a:t>Análise Arquitetural: Divisão e Conquista - </a:t>
-            </a:r>
-            <a:r>
-              <a:rPr kumimoji="0" lang="pt-BR" altLang="pt-BR" sz="2800" b="1" i="0" u="none" strike="noStrike" cap="none" normalizeH="0" baseline="0" dirty="0">
-                <a:ln>
-                  <a:noFill/>
-                </a:ln>
-                <a:solidFill>
-                  <a:schemeClr val="tx1"/>
-                </a:solidFill>
-                <a:effectLst/>
-                <a:latin typeface="Google Sans Text"/>
-              </a:rPr>
-              <a:t>O(n</a:t>
-            </a:r>
-            <a:r>
-              <a:rPr kumimoji="0" lang="pt-BR" altLang="pt-BR" sz="2800" b="1" i="0" u="none" strike="noStrike" cap="none" normalizeH="0" baseline="30000" dirty="0">
-                <a:ln>
-                  <a:noFill/>
-                </a:ln>
-                <a:solidFill>
-                  <a:schemeClr val="tx1"/>
-                </a:solidFill>
-                <a:effectLst/>
-                <a:latin typeface="Google Sans Text"/>
-              </a:rPr>
-              <a:t>2</a:t>
-            </a:r>
-            <a:r>
-              <a:rPr kumimoji="0" lang="pt-BR" altLang="pt-BR" sz="2800" b="1" i="0" u="none" strike="noStrike" cap="none" normalizeH="0" baseline="0" dirty="0">
-                <a:ln>
-                  <a:noFill/>
-                </a:ln>
-                <a:solidFill>
-                  <a:schemeClr val="tx1"/>
-                </a:solidFill>
-                <a:effectLst/>
-                <a:latin typeface="Google Sans Text"/>
-              </a:rPr>
-              <a:t>)</a:t>
-            </a:r>
-            <a:r>
-              <a:rPr kumimoji="0" lang="pt-BR" altLang="pt-BR" sz="2800" b="1" i="0" u="none" strike="noStrike" cap="none" normalizeH="0" baseline="0" dirty="0">
-                <a:ln>
-                  <a:noFill/>
-                </a:ln>
-                <a:solidFill>
-                  <a:schemeClr val="tx1"/>
-                </a:solidFill>
-                <a:effectLst/>
-              </a:rPr>
-              <a:t> vs. </a:t>
-            </a:r>
-            <a:r>
-              <a:rPr kumimoji="0" lang="pt-BR" altLang="pt-BR" sz="2800" b="1" i="0" u="none" strike="noStrike" cap="none" normalizeH="0" baseline="0" dirty="0">
-                <a:ln>
-                  <a:noFill/>
-                </a:ln>
-                <a:solidFill>
-                  <a:schemeClr val="tx1"/>
-                </a:solidFill>
-                <a:effectLst/>
-                <a:latin typeface="Google Sans Text"/>
-              </a:rPr>
-              <a:t>O(n log n</a:t>
-            </a:r>
-            <a:r>
-              <a:rPr lang="pt-BR" altLang="pt-BR" sz="2800" b="1" dirty="0">
-                <a:latin typeface="Arial" panose="020B0604020202020204" pitchFamily="34" charset="0"/>
-              </a:rPr>
-              <a:t>)</a:t>
-            </a:r>
-            <a:endParaRPr lang="pt-BR" sz="2800" b="1" dirty="0">
-              <a:latin typeface="+mn-lt"/>
-            </a:endParaRPr>
+              <a:t>Árvore AVL e o Gargalo do Paralelismo</a:t>
+            </a:r>
           </a:p>
         </p:txBody>
       </p:sp>
@@ -7715,7 +10632,7 @@
 </p:sld>
 </file>
 
-<file path=ppt/slides/slide8.xml><?xml version="1.0" encoding="utf-8"?>
+<file path=ppt/slides/slide9.xml><?xml version="1.0" encoding="utf-8"?>
 <p:sld xmlns:a="http://schemas.openxmlformats.org/drawingml/2006/main" xmlns:r="http://schemas.openxmlformats.org/officeDocument/2006/relationships" xmlns:p="http://schemas.openxmlformats.org/presentationml/2006/main">
   <p:cSld>
     <p:spTree>
@@ -7723,7 +10640,7 @@
         <p:cNvPr id="1" name="">
           <a:extLst>
             <a:ext uri="{FF2B5EF4-FFF2-40B4-BE49-F238E27FC236}">
-              <a16:creationId xmlns:a16="http://schemas.microsoft.com/office/drawing/2014/main" id="{09326535-FB19-E6BD-8062-3639E91C0916}"/>
+              <a16:creationId xmlns:a16="http://schemas.microsoft.com/office/drawing/2014/main" id="{E164B671-FC38-2847-0962-11B4314CAE5D}"/>
             </a:ext>
           </a:extLst>
         </p:cNvPr>
@@ -7743,7 +10660,7 @@
           <p:cNvPr id="5" name="Imagem 4">
             <a:extLst>
               <a:ext uri="{FF2B5EF4-FFF2-40B4-BE49-F238E27FC236}">
-                <a16:creationId xmlns:a16="http://schemas.microsoft.com/office/drawing/2014/main" id="{5CB36F6C-2408-85A8-92D7-513B26AF52D7}"/>
+                <a16:creationId xmlns:a16="http://schemas.microsoft.com/office/drawing/2014/main" id="{14A210E9-96BE-6AEF-888F-BC27D770B970}"/>
               </a:ext>
             </a:extLst>
           </p:cNvPr>
@@ -7773,7 +10690,7 @@
           <p:cNvPr id="10" name="Agrupar 9">
             <a:extLst>
               <a:ext uri="{FF2B5EF4-FFF2-40B4-BE49-F238E27FC236}">
-                <a16:creationId xmlns:a16="http://schemas.microsoft.com/office/drawing/2014/main" id="{DA60E349-63E6-2906-51B0-425F847DE722}"/>
+                <a16:creationId xmlns:a16="http://schemas.microsoft.com/office/drawing/2014/main" id="{6B17D0A5-FA6E-7612-F4EA-B08B6E431FA9}"/>
               </a:ext>
             </a:extLst>
           </p:cNvPr>
@@ -7793,7 +10710,7 @@
             <p:cNvPr id="7" name="Imagem 6">
               <a:extLst>
                 <a:ext uri="{FF2B5EF4-FFF2-40B4-BE49-F238E27FC236}">
-                  <a16:creationId xmlns:a16="http://schemas.microsoft.com/office/drawing/2014/main" id="{446EB5F3-BBDC-7AAB-B349-2E36C8C15925}"/>
+                  <a16:creationId xmlns:a16="http://schemas.microsoft.com/office/drawing/2014/main" id="{C0A576E9-D595-470C-A40E-2194D8494497}"/>
                 </a:ext>
               </a:extLst>
             </p:cNvPr>
@@ -7828,7 +10745,7 @@
             <p:cNvPr id="8" name="Retângulo 7">
               <a:extLst>
                 <a:ext uri="{FF2B5EF4-FFF2-40B4-BE49-F238E27FC236}">
-                  <a16:creationId xmlns:a16="http://schemas.microsoft.com/office/drawing/2014/main" id="{E2EF6531-15C5-5472-F867-A3F5345ABB81}"/>
+                  <a16:creationId xmlns:a16="http://schemas.microsoft.com/office/drawing/2014/main" id="{6330B5B5-14A9-566F-3454-C956FFC60E8C}"/>
                 </a:ext>
               </a:extLst>
             </p:cNvPr>
@@ -7882,7 +10799,7 @@
             <p:cNvPr id="9" name="Retângulo 8">
               <a:extLst>
                 <a:ext uri="{FF2B5EF4-FFF2-40B4-BE49-F238E27FC236}">
-                  <a16:creationId xmlns:a16="http://schemas.microsoft.com/office/drawing/2014/main" id="{0389689D-76E3-EA5B-935A-00EA4359E2CF}"/>
+                  <a16:creationId xmlns:a16="http://schemas.microsoft.com/office/drawing/2014/main" id="{484C3208-5267-F20F-10D0-69E389B21B7E}"/>
                 </a:ext>
               </a:extLst>
             </p:cNvPr>
@@ -7934,10 +10851,47 @@
       </p:grpSp>
       <p:sp>
         <p:nvSpPr>
+          <p:cNvPr id="16" name="Título 1">
+            <a:extLst>
+              <a:ext uri="{FF2B5EF4-FFF2-40B4-BE49-F238E27FC236}">
+                <a16:creationId xmlns:a16="http://schemas.microsoft.com/office/drawing/2014/main" id="{3F1C265C-450B-E149-E6F1-8766C3132B27}"/>
+              </a:ext>
+            </a:extLst>
+          </p:cNvPr>
+          <p:cNvSpPr>
+            <a:spLocks noGrp="1"/>
+          </p:cNvSpPr>
+          <p:nvPr>
+            <p:ph type="title"/>
+          </p:nvPr>
+        </p:nvSpPr>
+        <p:spPr>
+          <a:xfrm>
+            <a:off x="474860" y="1162843"/>
+            <a:ext cx="10515600" cy="1325563"/>
+          </a:xfrm>
+        </p:spPr>
+        <p:txBody>
+          <a:bodyPr>
+            <a:normAutofit/>
+          </a:bodyPr>
+          <a:lstStyle/>
+          <a:p>
+            <a:r>
+              <a:rPr lang="pt-BR" sz="2800" b="1" dirty="0">
+                <a:latin typeface="+mn-lt"/>
+              </a:rPr>
+              <a:t>A Árvore BST e a Volatilidade Estrutural</a:t>
+            </a:r>
+          </a:p>
+        </p:txBody>
+      </p:sp>
+      <p:sp>
+        <p:nvSpPr>
           <p:cNvPr id="13" name="Rectangle 1">
             <a:extLst>
               <a:ext uri="{FF2B5EF4-FFF2-40B4-BE49-F238E27FC236}">
-                <a16:creationId xmlns:a16="http://schemas.microsoft.com/office/drawing/2014/main" id="{C52BA4C7-0F04-69A4-07E7-9F09201EF58E}"/>
+                <a16:creationId xmlns:a16="http://schemas.microsoft.com/office/drawing/2014/main" id="{379EF3F8-DAA6-B371-6726-DD0D059AD3EC}"/>
               </a:ext>
             </a:extLst>
           </p:cNvPr>
@@ -7950,8 +10904,8 @@
         </p:nvSpPr>
         <p:spPr bwMode="auto">
           <a:xfrm>
-            <a:off x="838200" y="2050682"/>
-            <a:ext cx="10515600" cy="4462760"/>
+            <a:off x="1075630" y="2382161"/>
+            <a:ext cx="10515600" cy="3262432"/>
           </a:xfrm>
           <a:prstGeom prst="rect">
             <a:avLst/>
@@ -8013,135 +10967,8 @@
               <a:buChar char="•"/>
             </a:pPr>
             <a:r>
-              <a:rPr kumimoji="0" lang="pt-BR" altLang="pt-BR" sz="2400" b="1" i="0" u="none" strike="noStrike" cap="none" normalizeH="0" baseline="0" dirty="0">
-                <a:ln>
-                  <a:noFill/>
-                </a:ln>
-                <a:solidFill>
-                  <a:schemeClr val="tx1"/>
-                </a:solidFill>
-                <a:effectLst/>
-                <a:latin typeface="Google Sans Text"/>
-              </a:rPr>
-              <a:t> A Invariância do </a:t>
-            </a:r>
-            <a:r>
-              <a:rPr kumimoji="0" lang="pt-BR" altLang="pt-BR" sz="2400" b="1" i="0" u="none" strike="noStrike" cap="none" normalizeH="0" baseline="0" dirty="0" err="1">
-                <a:ln>
-                  <a:noFill/>
-                </a:ln>
-                <a:solidFill>
-                  <a:schemeClr val="tx1"/>
-                </a:solidFill>
-                <a:effectLst/>
-                <a:latin typeface="Google Sans Text"/>
-              </a:rPr>
-              <a:t>Selection</a:t>
-            </a:r>
-            <a:r>
-              <a:rPr kumimoji="0" lang="pt-BR" altLang="pt-BR" sz="2400" b="1" i="0" u="none" strike="noStrike" cap="none" normalizeH="0" baseline="0" dirty="0">
-                <a:ln>
-                  <a:noFill/>
-                </a:ln>
-                <a:solidFill>
-                  <a:schemeClr val="tx1"/>
-                </a:solidFill>
-                <a:effectLst/>
-                <a:latin typeface="Google Sans Text"/>
-              </a:rPr>
-              <a:t> </a:t>
-            </a:r>
-            <a:r>
-              <a:rPr kumimoji="0" lang="pt-BR" altLang="pt-BR" sz="2400" b="1" i="0" u="none" strike="noStrike" cap="none" normalizeH="0" baseline="0" dirty="0" err="1">
-                <a:ln>
-                  <a:noFill/>
-                </a:ln>
-                <a:solidFill>
-                  <a:schemeClr val="tx1"/>
-                </a:solidFill>
-                <a:effectLst/>
-                <a:latin typeface="Google Sans Text"/>
-              </a:rPr>
-              <a:t>Sort</a:t>
-            </a:r>
-            <a:r>
-              <a:rPr kumimoji="0" lang="pt-BR" altLang="pt-BR" sz="2400" b="1" i="0" u="none" strike="noStrike" cap="none" normalizeH="0" baseline="0" dirty="0">
-                <a:ln>
-                  <a:noFill/>
-                </a:ln>
-                <a:solidFill>
-                  <a:schemeClr val="tx1"/>
-                </a:solidFill>
-                <a:effectLst/>
-                <a:latin typeface="Google Sans Text"/>
-              </a:rPr>
-              <a:t>:</a:t>
-            </a:r>
-            <a:r>
-              <a:rPr kumimoji="0" lang="pt-BR" altLang="pt-BR" sz="2400" b="0" i="0" u="none" strike="noStrike" cap="none" normalizeH="0" baseline="0" dirty="0">
-                <a:ln>
-                  <a:noFill/>
-                </a:ln>
-                <a:solidFill>
-                  <a:schemeClr val="tx1"/>
-                </a:solidFill>
-                <a:effectLst/>
-                <a:latin typeface="Google Sans Text"/>
-              </a:rPr>
-              <a:t> Preso na complexidade </a:t>
-            </a:r>
-            <a:r>
-              <a:rPr kumimoji="0" lang="pt-BR" altLang="pt-BR" sz="3600" b="0" i="0" u="none" strike="noStrike" cap="none" normalizeH="0" baseline="0" dirty="0">
-                <a:ln>
-                  <a:noFill/>
-                </a:ln>
-                <a:solidFill>
-                  <a:schemeClr val="tx1"/>
-                </a:solidFill>
-                <a:effectLst/>
-                <a:latin typeface="Times New Roman" panose="02020603050405020304" pitchFamily="18" charset="0"/>
-                <a:cs typeface="Times New Roman" panose="02020603050405020304" pitchFamily="18" charset="0"/>
-              </a:rPr>
-              <a:t>ɵ</a:t>
-            </a:r>
-            <a:r>
-              <a:rPr kumimoji="0" lang="pt-BR" altLang="pt-BR" sz="2400" b="0" i="0" u="none" strike="noStrike" cap="none" normalizeH="0" baseline="0" dirty="0">
-                <a:ln>
-                  <a:noFill/>
-                </a:ln>
-                <a:solidFill>
-                  <a:schemeClr val="tx1"/>
-                </a:solidFill>
-                <a:effectLst/>
-                <a:latin typeface="Google Sans Text"/>
-              </a:rPr>
-              <a:t>(n</a:t>
-            </a:r>
-            <a:r>
-              <a:rPr kumimoji="0" lang="pt-BR" altLang="pt-BR" sz="2400" b="0" i="0" u="none" strike="noStrike" cap="none" normalizeH="0" baseline="30000" dirty="0">
-                <a:ln>
-                  <a:noFill/>
-                </a:ln>
-                <a:solidFill>
-                  <a:schemeClr val="tx1"/>
-                </a:solidFill>
-                <a:effectLst/>
-                <a:latin typeface="Google Sans Text"/>
-              </a:rPr>
-              <a:t>2</a:t>
-            </a:r>
-            <a:r>
-              <a:rPr kumimoji="0" lang="pt-BR" altLang="pt-BR" sz="2400" b="0" i="0" u="none" strike="noStrike" cap="none" normalizeH="0" baseline="0" dirty="0">
-                <a:ln>
-                  <a:noFill/>
-                </a:ln>
-                <a:solidFill>
-                  <a:schemeClr val="tx1"/>
-                </a:solidFill>
-                <a:effectLst/>
-                <a:latin typeface="Google Sans Text"/>
-              </a:rPr>
-              <a:t>), não se beneficia de vetores ordenados (tempo constante nos 3 cenários)</a:t>
+              <a:rPr lang="pt-BR" altLang="pt-BR" sz="2400" b="1" dirty="0"/>
+              <a:t> Topologicamente vulnerável a entrada dos dados</a:t>
             </a:r>
           </a:p>
           <a:p>
@@ -8158,7 +10985,162 @@
               <a:buFontTx/>
               <a:buChar char="•"/>
             </a:pPr>
-            <a:endParaRPr kumimoji="0" lang="pt-BR" altLang="pt-BR" sz="2400" b="0" i="0" u="none" strike="noStrike" cap="none" normalizeH="0" baseline="0" dirty="0">
+            <a:endParaRPr lang="pt-BR" altLang="pt-BR" sz="2400" b="1" dirty="0"/>
+          </a:p>
+          <a:p>
+            <a:pPr marL="457200" lvl="1" indent="0" eaLnBrk="0" fontAlgn="base" hangingPunct="0">
+              <a:lnSpc>
+                <a:spcPct val="100000"/>
+              </a:lnSpc>
+              <a:spcBef>
+                <a:spcPct val="0"/>
+              </a:spcBef>
+              <a:spcAft>
+                <a:spcPct val="0"/>
+              </a:spcAft>
+              <a:buFontTx/>
+              <a:buChar char="•"/>
+            </a:pPr>
+            <a:r>
+              <a:rPr lang="pt-BR" altLang="pt-BR" sz="2000" b="1" dirty="0"/>
+              <a:t> Dados ordenados</a:t>
+            </a:r>
+          </a:p>
+          <a:p>
+            <a:pPr marL="914400" lvl="2" indent="0" eaLnBrk="0" fontAlgn="base" hangingPunct="0">
+              <a:lnSpc>
+                <a:spcPct val="100000"/>
+              </a:lnSpc>
+              <a:spcBef>
+                <a:spcPct val="0"/>
+              </a:spcBef>
+              <a:spcAft>
+                <a:spcPct val="0"/>
+              </a:spcAft>
+              <a:buFontTx/>
+              <a:buChar char="•"/>
+            </a:pPr>
+            <a:r>
+              <a:rPr lang="pt-BR" altLang="pt-BR" dirty="0"/>
+              <a:t> “Lista encadeada” - O(N)</a:t>
+            </a:r>
+          </a:p>
+          <a:p>
+            <a:pPr marL="457200" lvl="1" indent="0" eaLnBrk="0" fontAlgn="base" hangingPunct="0">
+              <a:lnSpc>
+                <a:spcPct val="100000"/>
+              </a:lnSpc>
+              <a:spcBef>
+                <a:spcPct val="0"/>
+              </a:spcBef>
+              <a:spcAft>
+                <a:spcPct val="0"/>
+              </a:spcAft>
+              <a:buFontTx/>
+              <a:buChar char="•"/>
+            </a:pPr>
+            <a:r>
+              <a:rPr lang="pt-BR" altLang="pt-BR" sz="2000" b="1" dirty="0"/>
+              <a:t> Dados aleatórios</a:t>
+            </a:r>
+          </a:p>
+          <a:p>
+            <a:pPr marL="914400" lvl="2" indent="0" eaLnBrk="0" fontAlgn="base" hangingPunct="0">
+              <a:lnSpc>
+                <a:spcPct val="100000"/>
+              </a:lnSpc>
+              <a:spcBef>
+                <a:spcPct val="0"/>
+              </a:spcBef>
+              <a:spcAft>
+                <a:spcPct val="0"/>
+              </a:spcAft>
+              <a:buFontTx/>
+              <a:buChar char="•"/>
+            </a:pPr>
+            <a:r>
+              <a:rPr lang="pt-BR" altLang="pt-BR" dirty="0"/>
+              <a:t> Árvore naturalmente balanceada</a:t>
+            </a:r>
+          </a:p>
+          <a:p>
+            <a:pPr marL="914400" lvl="2" indent="0" eaLnBrk="0" fontAlgn="base" hangingPunct="0">
+              <a:lnSpc>
+                <a:spcPct val="100000"/>
+              </a:lnSpc>
+              <a:spcBef>
+                <a:spcPct val="0"/>
+              </a:spcBef>
+              <a:spcAft>
+                <a:spcPct val="0"/>
+              </a:spcAft>
+              <a:buFontTx/>
+              <a:buChar char="•"/>
+            </a:pPr>
+            <a:r>
+              <a:rPr lang="pt-BR" altLang="pt-BR" dirty="0"/>
+              <a:t> Superou AVL no processamento sequencial</a:t>
+            </a:r>
+          </a:p>
+          <a:p>
+            <a:pPr marL="1371600" lvl="3" indent="0" eaLnBrk="0" fontAlgn="base" hangingPunct="0">
+              <a:lnSpc>
+                <a:spcPct val="100000"/>
+              </a:lnSpc>
+              <a:spcBef>
+                <a:spcPct val="0"/>
+              </a:spcBef>
+              <a:spcAft>
+                <a:spcPct val="0"/>
+              </a:spcAft>
+              <a:buFontTx/>
+              <a:buChar char="•"/>
+            </a:pPr>
+            <a:r>
+              <a:rPr lang="pt-BR" altLang="pt-BR" sz="2000" dirty="0"/>
+              <a:t>sem overhead de rotações automáticas</a:t>
+            </a:r>
+          </a:p>
+          <a:p>
+            <a:pPr marL="914400" lvl="2" indent="0" eaLnBrk="0" fontAlgn="base" hangingPunct="0">
+              <a:lnSpc>
+                <a:spcPct val="100000"/>
+              </a:lnSpc>
+              <a:spcBef>
+                <a:spcPct val="0"/>
+              </a:spcBef>
+              <a:spcAft>
+                <a:spcPct val="0"/>
+              </a:spcAft>
+              <a:buFontTx/>
+              <a:buChar char="•"/>
+            </a:pPr>
+            <a:endParaRPr kumimoji="0" lang="pt-BR" altLang="pt-BR" sz="1800" b="1" i="0" u="none" strike="noStrike" cap="none" normalizeH="0" baseline="0" dirty="0">
+              <a:ln>
+                <a:noFill/>
+              </a:ln>
+              <a:solidFill>
+                <a:schemeClr val="tx1"/>
+              </a:solidFill>
+              <a:effectLst/>
+              <a:latin typeface="Arial" panose="020B0604020202020204" pitchFamily="34" charset="0"/>
+            </a:endParaRPr>
+          </a:p>
+          <a:p>
+            <a:pPr marL="457200" lvl="1" indent="0" eaLnBrk="0" fontAlgn="base" hangingPunct="0">
+              <a:lnSpc>
+                <a:spcPct val="100000"/>
+              </a:lnSpc>
+              <a:spcBef>
+                <a:spcPct val="0"/>
+              </a:spcBef>
+              <a:spcAft>
+                <a:spcPct val="0"/>
+              </a:spcAft>
+              <a:buFontTx/>
+              <a:buAutoNum type="arabicPeriod"/>
+            </a:pPr>
+            <a:endParaRPr kumimoji="0" lang="pt-BR" altLang="pt-BR" sz="2000" b="0" i="0" u="none" strike="noStrike" cap="none" normalizeH="0" baseline="0" dirty="0">
               <a:ln>
                 <a:noFill/>
               </a:ln>
@@ -8169,1053 +11151,12 @@
               <a:latin typeface="Google Sans Text"/>
             </a:endParaRPr>
           </a:p>
-          <a:p>
-            <a:pPr marL="0" indent="0" eaLnBrk="0" fontAlgn="base" hangingPunct="0">
-              <a:lnSpc>
-                <a:spcPct val="100000"/>
-              </a:lnSpc>
-              <a:spcBef>
-                <a:spcPct val="0"/>
-              </a:spcBef>
-              <a:spcAft>
-                <a:spcPct val="0"/>
-              </a:spcAft>
-              <a:buFontTx/>
-              <a:buChar char="•"/>
-            </a:pPr>
-            <a:r>
-              <a:rPr kumimoji="0" lang="pt-BR" altLang="pt-BR" sz="2400" b="1" i="0" u="none" strike="noStrike" cap="none" normalizeH="0" baseline="0" dirty="0">
-                <a:ln>
-                  <a:noFill/>
-                </a:ln>
-                <a:solidFill>
-                  <a:schemeClr val="tx1"/>
-                </a:solidFill>
-                <a:effectLst/>
-                <a:latin typeface="Google Sans Text"/>
-              </a:rPr>
-              <a:t> O Comportamento Adaptativo do </a:t>
-            </a:r>
-            <a:r>
-              <a:rPr kumimoji="0" lang="pt-BR" altLang="pt-BR" sz="2400" b="1" i="0" u="none" strike="noStrike" cap="none" normalizeH="0" baseline="0" dirty="0" err="1">
-                <a:ln>
-                  <a:noFill/>
-                </a:ln>
-                <a:solidFill>
-                  <a:schemeClr val="tx1"/>
-                </a:solidFill>
-                <a:effectLst/>
-                <a:latin typeface="Google Sans Text"/>
-              </a:rPr>
-              <a:t>Insertion</a:t>
-            </a:r>
-            <a:r>
-              <a:rPr kumimoji="0" lang="pt-BR" altLang="pt-BR" sz="2400" b="1" i="0" u="none" strike="noStrike" cap="none" normalizeH="0" baseline="0" dirty="0">
-                <a:ln>
-                  <a:noFill/>
-                </a:ln>
-                <a:solidFill>
-                  <a:schemeClr val="tx1"/>
-                </a:solidFill>
-                <a:effectLst/>
-                <a:latin typeface="Google Sans Text"/>
-              </a:rPr>
-              <a:t> </a:t>
-            </a:r>
-            <a:r>
-              <a:rPr kumimoji="0" lang="pt-BR" altLang="pt-BR" sz="2400" b="1" i="0" u="none" strike="noStrike" cap="none" normalizeH="0" baseline="0" dirty="0" err="1">
-                <a:ln>
-                  <a:noFill/>
-                </a:ln>
-                <a:solidFill>
-                  <a:schemeClr val="tx1"/>
-                </a:solidFill>
-                <a:effectLst/>
-                <a:latin typeface="Google Sans Text"/>
-              </a:rPr>
-              <a:t>Sort</a:t>
-            </a:r>
-            <a:r>
-              <a:rPr kumimoji="0" lang="pt-BR" altLang="pt-BR" sz="2400" b="1" i="0" u="none" strike="noStrike" cap="none" normalizeH="0" baseline="0" dirty="0">
-                <a:ln>
-                  <a:noFill/>
-                </a:ln>
-                <a:solidFill>
-                  <a:schemeClr val="tx1"/>
-                </a:solidFill>
-                <a:effectLst/>
-                <a:latin typeface="Google Sans Text"/>
-              </a:rPr>
-              <a:t>:</a:t>
-            </a:r>
-            <a:r>
-              <a:rPr kumimoji="0" lang="pt-BR" altLang="pt-BR" sz="2400" b="0" i="0" u="none" strike="noStrike" cap="none" normalizeH="0" baseline="0" dirty="0">
-                <a:ln>
-                  <a:noFill/>
-                </a:ln>
-                <a:solidFill>
-                  <a:schemeClr val="tx1"/>
-                </a:solidFill>
-                <a:effectLst/>
-                <a:latin typeface="Google Sans Text"/>
-              </a:rPr>
-              <a:t> Atinge o limite inferior garantido de </a:t>
-            </a:r>
-            <a:r>
-              <a:rPr kumimoji="0" lang="el-GR" altLang="pt-BR" sz="2400" b="0" i="0" u="none" strike="noStrike" cap="none" normalizeH="0" baseline="0" dirty="0">
-                <a:ln>
-                  <a:noFill/>
-                </a:ln>
-                <a:solidFill>
-                  <a:schemeClr val="tx1"/>
-                </a:solidFill>
-                <a:effectLst/>
-                <a:latin typeface="Times New Roman" panose="02020603050405020304" pitchFamily="18" charset="0"/>
-                <a:cs typeface="Times New Roman" panose="02020603050405020304" pitchFamily="18" charset="0"/>
-              </a:rPr>
-              <a:t>Ω</a:t>
-            </a:r>
-            <a:r>
-              <a:rPr kumimoji="0" lang="pt-BR" altLang="pt-BR" sz="2400" b="0" i="0" u="none" strike="noStrike" cap="none" normalizeH="0" baseline="0" dirty="0">
-                <a:ln>
-                  <a:noFill/>
-                </a:ln>
-                <a:solidFill>
-                  <a:schemeClr val="tx1"/>
-                </a:solidFill>
-                <a:effectLst/>
-                <a:latin typeface="Google Sans Text"/>
-              </a:rPr>
-              <a:t>(n) no melhor caso (~0.00s), mas sofre severa punição geométrica no pior caso.</a:t>
-            </a:r>
-          </a:p>
-          <a:p>
-            <a:pPr marL="0" indent="0" eaLnBrk="0" fontAlgn="base" hangingPunct="0">
-              <a:lnSpc>
-                <a:spcPct val="100000"/>
-              </a:lnSpc>
-              <a:spcBef>
-                <a:spcPct val="0"/>
-              </a:spcBef>
-              <a:spcAft>
-                <a:spcPct val="0"/>
-              </a:spcAft>
-              <a:buFontTx/>
-              <a:buChar char="•"/>
-            </a:pPr>
-            <a:endParaRPr kumimoji="0" lang="pt-BR" altLang="pt-BR" sz="2400" b="0" i="0" u="none" strike="noStrike" cap="none" normalizeH="0" baseline="0" dirty="0">
-              <a:ln>
-                <a:noFill/>
-              </a:ln>
-              <a:solidFill>
-                <a:schemeClr val="tx1"/>
-              </a:solidFill>
-              <a:effectLst/>
-              <a:latin typeface="Google Sans Text"/>
-            </a:endParaRPr>
-          </a:p>
-          <a:p>
-            <a:pPr marL="0" indent="0" eaLnBrk="0" fontAlgn="base" hangingPunct="0">
-              <a:lnSpc>
-                <a:spcPct val="100000"/>
-              </a:lnSpc>
-              <a:spcBef>
-                <a:spcPct val="0"/>
-              </a:spcBef>
-              <a:spcAft>
-                <a:spcPct val="0"/>
-              </a:spcAft>
-              <a:buFontTx/>
-              <a:buChar char="•"/>
-            </a:pPr>
-            <a:r>
-              <a:rPr lang="pt-BR" altLang="pt-BR" sz="2400" b="1" dirty="0">
-                <a:latin typeface="Google Sans Text"/>
-              </a:rPr>
-              <a:t>Overhead do Interpretador </a:t>
-            </a:r>
-            <a:r>
-              <a:rPr lang="pt-BR" altLang="pt-BR" sz="2400" dirty="0">
-                <a:latin typeface="Google Sans Text"/>
-              </a:rPr>
-              <a:t>(</a:t>
-            </a:r>
-            <a:r>
-              <a:rPr lang="pt-BR" altLang="pt-BR" sz="2400" dirty="0" err="1">
-                <a:latin typeface="Google Sans Text"/>
-              </a:rPr>
-              <a:t>CPython</a:t>
-            </a:r>
-            <a:r>
-              <a:rPr lang="pt-BR" altLang="pt-BR" sz="2400" dirty="0">
-                <a:latin typeface="Google Sans Text"/>
-              </a:rPr>
-              <a:t>):</a:t>
-            </a:r>
-          </a:p>
-          <a:p>
-            <a:pPr marL="457200" lvl="1" indent="0" eaLnBrk="0" fontAlgn="base" hangingPunct="0">
-              <a:lnSpc>
-                <a:spcPct val="100000"/>
-              </a:lnSpc>
-              <a:spcBef>
-                <a:spcPct val="0"/>
-              </a:spcBef>
-              <a:spcAft>
-                <a:spcPct val="0"/>
-              </a:spcAft>
-              <a:buFontTx/>
-              <a:buChar char="•"/>
-            </a:pPr>
-            <a:r>
-              <a:rPr lang="pt-BR" altLang="pt-BR" sz="2000" dirty="0">
-                <a:latin typeface="Google Sans Text"/>
-              </a:rPr>
-              <a:t> Os tempos brutos refletem não apenas o algoritmo, mas as limitações da linguagem: tipagem dinâmica, custo do </a:t>
-            </a:r>
-            <a:r>
-              <a:rPr lang="pt-BR" altLang="pt-BR" sz="2000" i="1" dirty="0" err="1">
-                <a:latin typeface="Google Sans Text"/>
-              </a:rPr>
-              <a:t>call</a:t>
-            </a:r>
-            <a:r>
-              <a:rPr lang="pt-BR" altLang="pt-BR" sz="2000" i="1" dirty="0">
-                <a:latin typeface="Google Sans Text"/>
-              </a:rPr>
-              <a:t> </a:t>
-            </a:r>
-            <a:r>
-              <a:rPr lang="pt-BR" altLang="pt-BR" sz="2000" i="1" dirty="0" err="1">
-                <a:latin typeface="Google Sans Text"/>
-              </a:rPr>
-              <a:t>stack</a:t>
-            </a:r>
-            <a:r>
-              <a:rPr lang="pt-BR" altLang="pt-BR" sz="2000" i="1" dirty="0">
-                <a:latin typeface="Google Sans Text"/>
-              </a:rPr>
-              <a:t> </a:t>
-            </a:r>
-            <a:r>
-              <a:rPr lang="pt-BR" altLang="pt-BR" sz="2000" dirty="0">
-                <a:latin typeface="Google Sans Text"/>
-              </a:rPr>
-              <a:t>(recursão profunda) e laços interpretados.</a:t>
-            </a:r>
-          </a:p>
-          <a:p>
-            <a:pPr marL="457200" lvl="1" indent="0" eaLnBrk="0" fontAlgn="base" hangingPunct="0">
-              <a:lnSpc>
-                <a:spcPct val="100000"/>
-              </a:lnSpc>
-              <a:spcBef>
-                <a:spcPct val="0"/>
-              </a:spcBef>
-              <a:spcAft>
-                <a:spcPct val="0"/>
-              </a:spcAft>
-              <a:buFontTx/>
-              <a:buChar char="•"/>
-            </a:pPr>
-            <a:r>
-              <a:rPr lang="pt-BR" altLang="pt-BR" sz="2000" dirty="0">
-                <a:latin typeface="Google Sans Text"/>
-              </a:rPr>
-              <a:t> O </a:t>
-            </a:r>
-            <a:r>
-              <a:rPr lang="pt-BR" altLang="pt-BR" sz="2000" dirty="0" err="1">
-                <a:latin typeface="Google Sans Text"/>
-              </a:rPr>
-              <a:t>list.sort</a:t>
-            </a:r>
-            <a:r>
-              <a:rPr lang="pt-BR" altLang="pt-BR" sz="2000" dirty="0">
-                <a:latin typeface="Google Sans Text"/>
-              </a:rPr>
-              <a:t>() nativo (</a:t>
-            </a:r>
-            <a:r>
-              <a:rPr lang="pt-BR" altLang="pt-BR" sz="2000" dirty="0" err="1">
-                <a:latin typeface="Google Sans Text"/>
-              </a:rPr>
-              <a:t>Timsort</a:t>
-            </a:r>
-            <a:r>
-              <a:rPr lang="pt-BR" altLang="pt-BR" sz="2000" dirty="0">
-                <a:latin typeface="Google Sans Text"/>
-              </a:rPr>
-              <a:t>) é exponencialmente mais rápido por ser compilado em C, delegando operações diretamente ao hardware.</a:t>
-            </a:r>
-            <a:endParaRPr kumimoji="0" lang="pt-BR" altLang="pt-BR" sz="1800" b="0" i="0" u="none" strike="noStrike" cap="none" normalizeH="0" baseline="0" dirty="0">
-              <a:ln>
-                <a:noFill/>
-              </a:ln>
-              <a:solidFill>
-                <a:schemeClr val="tx1"/>
-              </a:solidFill>
-              <a:effectLst/>
-              <a:latin typeface="Arial" panose="020B0604020202020204" pitchFamily="34" charset="0"/>
-            </a:endParaRPr>
-          </a:p>
-        </p:txBody>
-      </p:sp>
-      <p:sp>
-        <p:nvSpPr>
-          <p:cNvPr id="16" name="Título 1">
-            <a:extLst>
-              <a:ext uri="{FF2B5EF4-FFF2-40B4-BE49-F238E27FC236}">
-                <a16:creationId xmlns:a16="http://schemas.microsoft.com/office/drawing/2014/main" id="{6869FB9E-D0C9-D809-850E-B3E4A131FF54}"/>
-              </a:ext>
-            </a:extLst>
-          </p:cNvPr>
-          <p:cNvSpPr>
-            <a:spLocks noGrp="1"/>
-          </p:cNvSpPr>
-          <p:nvPr>
-            <p:ph type="title"/>
-          </p:nvPr>
-        </p:nvSpPr>
-        <p:spPr>
-          <a:xfrm>
-            <a:off x="474860" y="1162843"/>
-            <a:ext cx="10515600" cy="1325563"/>
-          </a:xfrm>
-        </p:spPr>
-        <p:txBody>
-          <a:bodyPr>
-            <a:normAutofit/>
-          </a:bodyPr>
-          <a:lstStyle/>
-          <a:p>
-            <a:r>
-              <a:rPr lang="pt-BR" sz="2800" b="1" dirty="0">
-                <a:latin typeface="+mn-lt"/>
-              </a:rPr>
-              <a:t>Reflexos da Teoria na Prática e Limitações do Ambiente</a:t>
-            </a:r>
-          </a:p>
-        </p:txBody>
-      </p:sp>
-      <p:sp>
-        <p:nvSpPr>
-          <p:cNvPr id="2" name="Rectangle 1">
-            <a:extLst>
-              <a:ext uri="{FF2B5EF4-FFF2-40B4-BE49-F238E27FC236}">
-                <a16:creationId xmlns:a16="http://schemas.microsoft.com/office/drawing/2014/main" id="{EA986490-0933-6260-C084-393D07EFBEC4}"/>
-              </a:ext>
-            </a:extLst>
-          </p:cNvPr>
-          <p:cNvSpPr>
-            <a:spLocks noChangeArrowheads="1"/>
-          </p:cNvSpPr>
-          <p:nvPr/>
-        </p:nvSpPr>
-        <p:spPr bwMode="auto">
-          <a:xfrm>
-            <a:off x="0" y="-161582"/>
-            <a:ext cx="184731" cy="323165"/>
-          </a:xfrm>
-          <a:prstGeom prst="rect">
-            <a:avLst/>
-          </a:prstGeom>
-          <a:noFill/>
-          <a:ln>
-            <a:noFill/>
-          </a:ln>
-          <a:effectLst/>
-          <a:extLst>
-            <a:ext uri="{909E8E84-426E-40DD-AFC4-6F175D3DCCD1}">
-              <a14:hiddenFill xmlns:a14="http://schemas.microsoft.com/office/drawing/2010/main">
-                <a:solidFill>
-                  <a:schemeClr val="accent1"/>
-                </a:solidFill>
-              </a14:hiddenFill>
-            </a:ext>
-            <a:ext uri="{91240B29-F687-4F45-9708-019B960494DF}">
-              <a14:hiddenLine xmlns:a14="http://schemas.microsoft.com/office/drawing/2010/main" w="9525">
-                <a:solidFill>
-                  <a:schemeClr val="tx1"/>
-                </a:solidFill>
-                <a:miter lim="800000"/>
-                <a:headEnd/>
-                <a:tailEnd/>
-              </a14:hiddenLine>
-            </a:ext>
-            <a:ext uri="{AF507438-7753-43E0-B8FC-AC1667EBCBE1}">
-              <a14:hiddenEffects xmlns:a14="http://schemas.microsoft.com/office/drawing/2010/main">
-                <a:effectLst>
-                  <a:outerShdw dist="35921" dir="2700000" algn="ctr" rotWithShape="0">
-                    <a:schemeClr val="bg2"/>
-                  </a:outerShdw>
-                </a:effectLst>
-              </a14:hiddenEffects>
-            </a:ext>
-          </a:extLst>
-        </p:spPr>
-        <p:txBody>
-          <a:bodyPr vert="horz" wrap="none" lIns="91440" tIns="0" rIns="91440" bIns="45720" numCol="1" anchor="ctr" anchorCtr="0" compatLnSpc="1">
-            <a:prstTxWarp prst="textNoShape">
-              <a:avLst/>
-            </a:prstTxWarp>
-            <a:spAutoFit/>
-          </a:bodyPr>
-          <a:lstStyle/>
-          <a:p>
-            <a:pPr marL="0" marR="0" lvl="0" indent="0" algn="l" defTabSz="914400" rtl="0" eaLnBrk="0" fontAlgn="base" latinLnBrk="0" hangingPunct="0">
-              <a:lnSpc>
-                <a:spcPct val="100000"/>
-              </a:lnSpc>
-              <a:spcBef>
-                <a:spcPct val="0"/>
-              </a:spcBef>
-              <a:spcAft>
-                <a:spcPct val="0"/>
-              </a:spcAft>
-              <a:buClrTx/>
-              <a:buSzTx/>
-              <a:buFontTx/>
-              <a:buNone/>
-              <a:tabLst/>
-            </a:pPr>
-            <a:endParaRPr kumimoji="0" lang="pt-BR" altLang="pt-BR" sz="1800" b="0" i="0" u="none" strike="noStrike" cap="none" normalizeH="0" baseline="0" dirty="0">
-              <a:ln>
-                <a:noFill/>
-              </a:ln>
-              <a:solidFill>
-                <a:schemeClr val="tx1"/>
-              </a:solidFill>
-              <a:effectLst/>
-              <a:latin typeface="Arial" panose="020B0604020202020204" pitchFamily="34" charset="0"/>
-            </a:endParaRPr>
-          </a:p>
         </p:txBody>
       </p:sp>
     </p:spTree>
     <p:extLst>
       <p:ext uri="{BB962C8B-B14F-4D97-AF65-F5344CB8AC3E}">
-        <p14:creationId xmlns:p14="http://schemas.microsoft.com/office/powerpoint/2010/main" val="1275068660"/>
-      </p:ext>
-    </p:extLst>
-  </p:cSld>
-  <p:clrMapOvr>
-    <a:masterClrMapping/>
-  </p:clrMapOvr>
-</p:sld>
-</file>
-
-<file path=ppt/slides/slide9.xml><?xml version="1.0" encoding="utf-8"?>
-<p:sld xmlns:a="http://schemas.openxmlformats.org/drawingml/2006/main" xmlns:r="http://schemas.openxmlformats.org/officeDocument/2006/relationships" xmlns:p="http://schemas.openxmlformats.org/presentationml/2006/main">
-  <p:cSld>
-    <p:spTree>
-      <p:nvGrpSpPr>
-        <p:cNvPr id="1" name="">
-          <a:extLst>
-            <a:ext uri="{FF2B5EF4-FFF2-40B4-BE49-F238E27FC236}">
-              <a16:creationId xmlns:a16="http://schemas.microsoft.com/office/drawing/2014/main" id="{13C95F87-6B60-EE45-2914-BAD7CAF0DEEC}"/>
-            </a:ext>
-          </a:extLst>
-        </p:cNvPr>
-        <p:cNvGrpSpPr/>
-        <p:nvPr/>
-      </p:nvGrpSpPr>
-      <p:grpSpPr>
-        <a:xfrm>
-          <a:off x="0" y="0"/>
-          <a:ext cx="0" cy="0"/>
-          <a:chOff x="0" y="0"/>
-          <a:chExt cx="0" cy="0"/>
-        </a:xfrm>
-      </p:grpSpPr>
-      <p:pic>
-        <p:nvPicPr>
-          <p:cNvPr id="5" name="Imagem 4">
-            <a:extLst>
-              <a:ext uri="{FF2B5EF4-FFF2-40B4-BE49-F238E27FC236}">
-                <a16:creationId xmlns:a16="http://schemas.microsoft.com/office/drawing/2014/main" id="{8B30A8A3-7ADD-27EF-13B1-FF41BB6FE57A}"/>
-              </a:ext>
-            </a:extLst>
-          </p:cNvPr>
-          <p:cNvPicPr>
-            <a:picLocks noChangeAspect="1"/>
-          </p:cNvPicPr>
-          <p:nvPr/>
-        </p:nvPicPr>
-        <p:blipFill>
-          <a:blip r:embed="rId2"/>
-          <a:stretch>
-            <a:fillRect/>
-          </a:stretch>
-        </p:blipFill>
-        <p:spPr>
-          <a:xfrm>
-            <a:off x="0" y="0"/>
-            <a:ext cx="12192000" cy="1398060"/>
-          </a:xfrm>
-          <a:prstGeom prst="rect">
-            <a:avLst/>
-          </a:prstGeom>
-        </p:spPr>
-      </p:pic>
-      <p:grpSp>
-        <p:nvGrpSpPr>
-          <p:cNvPr id="10" name="Agrupar 9">
-            <a:extLst>
-              <a:ext uri="{FF2B5EF4-FFF2-40B4-BE49-F238E27FC236}">
-                <a16:creationId xmlns:a16="http://schemas.microsoft.com/office/drawing/2014/main" id="{CF4293E8-8854-17B8-8D27-406A19442340}"/>
-              </a:ext>
-            </a:extLst>
-          </p:cNvPr>
-          <p:cNvGrpSpPr/>
-          <p:nvPr/>
-        </p:nvGrpSpPr>
-        <p:grpSpPr>
-          <a:xfrm>
-            <a:off x="4739781" y="3585812"/>
-            <a:ext cx="7452219" cy="3272188"/>
-            <a:chOff x="4739781" y="3585812"/>
-            <a:chExt cx="7452219" cy="3272188"/>
-          </a:xfrm>
-        </p:grpSpPr>
-        <p:pic>
-          <p:nvPicPr>
-            <p:cNvPr id="7" name="Imagem 6">
-              <a:extLst>
-                <a:ext uri="{FF2B5EF4-FFF2-40B4-BE49-F238E27FC236}">
-                  <a16:creationId xmlns:a16="http://schemas.microsoft.com/office/drawing/2014/main" id="{56DF490E-1459-1718-A3A3-2C295272AE46}"/>
-                </a:ext>
-              </a:extLst>
-            </p:cNvPr>
-            <p:cNvPicPr>
-              <a:picLocks noChangeAspect="1"/>
-            </p:cNvPicPr>
-            <p:nvPr/>
-          </p:nvPicPr>
-          <p:blipFill>
-            <a:blip r:embed="rId3"/>
-            <a:stretch>
-              <a:fillRect/>
-            </a:stretch>
-          </p:blipFill>
-          <p:spPr>
-            <a:xfrm>
-              <a:off x="5492514" y="4013377"/>
-              <a:ext cx="6699486" cy="2844623"/>
-            </a:xfrm>
-            <a:prstGeom prst="rect">
-              <a:avLst/>
-            </a:prstGeom>
-            <a:effectLst>
-              <a:outerShdw blurRad="50800" dist="50800" dir="5400000" algn="ctr" rotWithShape="0">
-                <a:srgbClr val="000000"/>
-              </a:outerShdw>
-            </a:effectLst>
-          </p:spPr>
-        </p:pic>
-        <p:sp>
-          <p:nvSpPr>
-            <p:cNvPr id="8" name="Retângulo 7">
-              <a:extLst>
-                <a:ext uri="{FF2B5EF4-FFF2-40B4-BE49-F238E27FC236}">
-                  <a16:creationId xmlns:a16="http://schemas.microsoft.com/office/drawing/2014/main" id="{F037CCE3-FCCF-12FF-E95C-10BDAFC4BCE0}"/>
-                </a:ext>
-              </a:extLst>
-            </p:cNvPr>
-            <p:cNvSpPr/>
-            <p:nvPr/>
-          </p:nvSpPr>
-          <p:spPr>
-            <a:xfrm>
-              <a:off x="4739781" y="4013377"/>
-              <a:ext cx="1104550" cy="2844623"/>
-            </a:xfrm>
-            <a:prstGeom prst="rect">
-              <a:avLst/>
-            </a:prstGeom>
-            <a:solidFill>
-              <a:schemeClr val="bg1"/>
-            </a:solidFill>
-            <a:ln>
-              <a:solidFill>
-                <a:schemeClr val="bg1"/>
-              </a:solidFill>
-            </a:ln>
-          </p:spPr>
-          <p:style>
-            <a:lnRef idx="2">
-              <a:schemeClr val="accent1">
-                <a:shade val="15000"/>
-              </a:schemeClr>
-            </a:lnRef>
-            <a:fillRef idx="1">
-              <a:schemeClr val="accent1"/>
-            </a:fillRef>
-            <a:effectRef idx="0">
-              <a:schemeClr val="accent1"/>
-            </a:effectRef>
-            <a:fontRef idx="minor">
-              <a:schemeClr val="lt1"/>
-            </a:fontRef>
-          </p:style>
-          <p:txBody>
-            <a:bodyPr rtlCol="0" anchor="ctr"/>
-            <a:lstStyle/>
-            <a:p>
-              <a:pPr algn="ctr"/>
-              <a:endParaRPr lang="pt-BR"/>
-            </a:p>
-          </p:txBody>
-        </p:sp>
-        <p:sp>
-          <p:nvSpPr>
-            <p:cNvPr id="9" name="Retângulo 8">
-              <a:extLst>
-                <a:ext uri="{FF2B5EF4-FFF2-40B4-BE49-F238E27FC236}">
-                  <a16:creationId xmlns:a16="http://schemas.microsoft.com/office/drawing/2014/main" id="{837FD02B-D0E3-74AF-79DA-0803F43558A7}"/>
-                </a:ext>
-              </a:extLst>
-            </p:cNvPr>
-            <p:cNvSpPr/>
-            <p:nvPr/>
-          </p:nvSpPr>
-          <p:spPr>
-            <a:xfrm>
-              <a:off x="5292056" y="3585812"/>
-              <a:ext cx="4453856" cy="1078467"/>
-            </a:xfrm>
-            <a:prstGeom prst="rect">
-              <a:avLst/>
-            </a:prstGeom>
-            <a:solidFill>
-              <a:schemeClr val="bg1"/>
-            </a:solidFill>
-            <a:ln>
-              <a:solidFill>
-                <a:schemeClr val="bg1"/>
-              </a:solidFill>
-            </a:ln>
-          </p:spPr>
-          <p:style>
-            <a:lnRef idx="2">
-              <a:schemeClr val="accent1">
-                <a:shade val="15000"/>
-              </a:schemeClr>
-            </a:lnRef>
-            <a:fillRef idx="1">
-              <a:schemeClr val="accent1"/>
-            </a:fillRef>
-            <a:effectRef idx="0">
-              <a:schemeClr val="accent1"/>
-            </a:effectRef>
-            <a:fontRef idx="minor">
-              <a:schemeClr val="lt1"/>
-            </a:fontRef>
-          </p:style>
-          <p:txBody>
-            <a:bodyPr rtlCol="0" anchor="ctr"/>
-            <a:lstStyle/>
-            <a:p>
-              <a:pPr algn="ctr"/>
-              <a:endParaRPr lang="pt-BR"/>
-            </a:p>
-          </p:txBody>
-        </p:sp>
-      </p:grpSp>
-      <p:sp>
-        <p:nvSpPr>
-          <p:cNvPr id="13" name="Rectangle 1">
-            <a:extLst>
-              <a:ext uri="{FF2B5EF4-FFF2-40B4-BE49-F238E27FC236}">
-                <a16:creationId xmlns:a16="http://schemas.microsoft.com/office/drawing/2014/main" id="{30424B3E-156F-8EA6-2CA3-BC4E581209A1}"/>
-              </a:ext>
-            </a:extLst>
-          </p:cNvPr>
-          <p:cNvSpPr>
-            <a:spLocks noGrp="1" noChangeArrowheads="1"/>
-          </p:cNvSpPr>
-          <p:nvPr>
-            <p:ph idx="1"/>
-          </p:nvPr>
-        </p:nvSpPr>
-        <p:spPr bwMode="auto">
-          <a:xfrm>
-            <a:off x="838200" y="2248959"/>
-            <a:ext cx="10515600" cy="3908762"/>
-          </a:xfrm>
-          <a:prstGeom prst="rect">
-            <a:avLst/>
-          </a:prstGeom>
-          <a:noFill/>
-          <a:ln>
-            <a:noFill/>
-          </a:ln>
-          <a:effectLst/>
-          <a:extLst>
-            <a:ext uri="{909E8E84-426E-40DD-AFC4-6F175D3DCCD1}">
-              <a14:hiddenFill xmlns:a14="http://schemas.microsoft.com/office/drawing/2010/main">
-                <a:solidFill>
-                  <a:schemeClr val="accent1"/>
-                </a:solidFill>
-              </a14:hiddenFill>
-            </a:ext>
-            <a:ext uri="{91240B29-F687-4F45-9708-019B960494DF}">
-              <a14:hiddenLine xmlns:a14="http://schemas.microsoft.com/office/drawing/2010/main" w="9525">
-                <a:solidFill>
-                  <a:schemeClr val="tx1"/>
-                </a:solidFill>
-                <a:miter lim="800000"/>
-                <a:headEnd/>
-                <a:tailEnd/>
-              </a14:hiddenLine>
-            </a:ext>
-            <a:ext uri="{AF507438-7753-43E0-B8FC-AC1667EBCBE1}">
-              <a14:hiddenEffects xmlns:a14="http://schemas.microsoft.com/office/drawing/2010/main">
-                <a:effectLst>
-                  <a:outerShdw dist="35921" dir="2700000" algn="ctr" rotWithShape="0">
-                    <a:schemeClr val="bg2"/>
-                  </a:outerShdw>
-                </a:effectLst>
-              </a14:hiddenEffects>
-            </a:ext>
-          </a:extLst>
-        </p:spPr>
-        <p:txBody>
-          <a:bodyPr vert="horz" wrap="square" lIns="91440" tIns="45720" rIns="91440" bIns="45720" numCol="1" anchor="ctr" anchorCtr="0" compatLnSpc="1">
-            <a:prstTxWarp prst="textNoShape">
-              <a:avLst/>
-            </a:prstTxWarp>
-            <a:spAutoFit/>
-          </a:bodyPr>
-          <a:lstStyle/>
-          <a:p>
-            <a:pPr marL="0" indent="0" eaLnBrk="0" fontAlgn="base" hangingPunct="0">
-              <a:lnSpc>
-                <a:spcPct val="100000"/>
-              </a:lnSpc>
-              <a:spcBef>
-                <a:spcPct val="0"/>
-              </a:spcBef>
-              <a:spcAft>
-                <a:spcPct val="0"/>
-              </a:spcAft>
-              <a:buFontTx/>
-              <a:buChar char="•"/>
-            </a:pPr>
-            <a:r>
-              <a:rPr kumimoji="0" lang="pt-BR" altLang="pt-BR" sz="2400" b="1" i="0" u="none" strike="noStrike" cap="none" normalizeH="0" baseline="0" dirty="0">
-                <a:ln>
-                  <a:noFill/>
-                </a:ln>
-                <a:solidFill>
-                  <a:schemeClr val="tx1"/>
-                </a:solidFill>
-                <a:effectLst/>
-                <a:latin typeface="Google Sans Text"/>
-              </a:rPr>
-              <a:t>Validação Teórica:</a:t>
-            </a:r>
-            <a:r>
-              <a:rPr kumimoji="0" lang="pt-BR" altLang="pt-BR" sz="2400" b="0" i="0" u="none" strike="noStrike" cap="none" normalizeH="0" baseline="0" dirty="0">
-                <a:ln>
-                  <a:noFill/>
-                </a:ln>
-                <a:solidFill>
-                  <a:schemeClr val="tx1"/>
-                </a:solidFill>
-                <a:effectLst/>
-                <a:latin typeface="Google Sans Text"/>
-              </a:rPr>
-              <a:t> Os experimentos corroboram a teoria matemática; algoritmos O(n</a:t>
-            </a:r>
-            <a:r>
-              <a:rPr kumimoji="0" lang="pt-BR" altLang="pt-BR" sz="2400" b="0" i="0" u="none" strike="noStrike" cap="none" normalizeH="0" baseline="30000" dirty="0">
-                <a:ln>
-                  <a:noFill/>
-                </a:ln>
-                <a:solidFill>
-                  <a:schemeClr val="tx1"/>
-                </a:solidFill>
-                <a:effectLst/>
-                <a:latin typeface="Google Sans Text"/>
-              </a:rPr>
-              <a:t>2</a:t>
-            </a:r>
-            <a:r>
-              <a:rPr kumimoji="0" lang="pt-BR" altLang="pt-BR" sz="2400" b="0" i="0" u="none" strike="noStrike" cap="none" normalizeH="0" baseline="0" dirty="0">
-                <a:ln>
-                  <a:noFill/>
-                </a:ln>
-                <a:solidFill>
-                  <a:schemeClr val="tx1"/>
-                </a:solidFill>
-                <a:effectLst/>
-                <a:latin typeface="Google Sans Text"/>
-              </a:rPr>
-              <a:t>) sofrem degradação drástica em instâncias massivas.</a:t>
-            </a:r>
-          </a:p>
-          <a:p>
-            <a:pPr marL="0" indent="0" eaLnBrk="0" fontAlgn="base" hangingPunct="0">
-              <a:lnSpc>
-                <a:spcPct val="100000"/>
-              </a:lnSpc>
-              <a:spcBef>
-                <a:spcPct val="0"/>
-              </a:spcBef>
-              <a:spcAft>
-                <a:spcPct val="0"/>
-              </a:spcAft>
-              <a:buFontTx/>
-              <a:buChar char="•"/>
-            </a:pPr>
-            <a:endParaRPr kumimoji="0" lang="pt-BR" altLang="pt-BR" sz="2400" b="0" i="0" u="none" strike="noStrike" cap="none" normalizeH="0" baseline="0" dirty="0">
-              <a:ln>
-                <a:noFill/>
-              </a:ln>
-              <a:solidFill>
-                <a:schemeClr val="tx1"/>
-              </a:solidFill>
-              <a:effectLst/>
-              <a:latin typeface="Google Sans Text"/>
-            </a:endParaRPr>
-          </a:p>
-          <a:p>
-            <a:pPr marL="0" lvl="0" indent="0" eaLnBrk="0" fontAlgn="base" hangingPunct="0">
-              <a:lnSpc>
-                <a:spcPct val="100000"/>
-              </a:lnSpc>
-              <a:spcBef>
-                <a:spcPct val="0"/>
-              </a:spcBef>
-              <a:spcAft>
-                <a:spcPct val="0"/>
-              </a:spcAft>
-              <a:buFontTx/>
-              <a:buChar char="•"/>
-            </a:pPr>
-            <a:r>
-              <a:rPr kumimoji="0" lang="pt-BR" altLang="pt-BR" sz="2400" b="1" i="0" u="none" strike="noStrike" cap="none" normalizeH="0" baseline="0" dirty="0">
-                <a:ln>
-                  <a:noFill/>
-                </a:ln>
-                <a:solidFill>
-                  <a:schemeClr val="tx1"/>
-                </a:solidFill>
-                <a:effectLst/>
-                <a:latin typeface="Google Sans Text"/>
-              </a:rPr>
-              <a:t>A Escolha Pragmática:</a:t>
-            </a:r>
-            <a:r>
-              <a:rPr kumimoji="0" lang="pt-BR" altLang="pt-BR" sz="2400" b="0" i="0" u="none" strike="noStrike" cap="none" normalizeH="0" baseline="0" dirty="0">
-                <a:ln>
-                  <a:noFill/>
-                </a:ln>
-                <a:solidFill>
-                  <a:schemeClr val="tx1"/>
-                </a:solidFill>
-                <a:effectLst/>
-                <a:latin typeface="Google Sans Text"/>
-              </a:rPr>
-              <a:t> A decisão arquitetural não deve se basear apenas na classe </a:t>
-            </a:r>
-            <a:r>
-              <a:rPr kumimoji="0" lang="pt-BR" altLang="pt-BR" sz="2400" b="0" i="0" u="none" strike="noStrike" cap="none" normalizeH="0" baseline="0" dirty="0" err="1">
-                <a:ln>
-                  <a:noFill/>
-                </a:ln>
-                <a:solidFill>
-                  <a:schemeClr val="tx1"/>
-                </a:solidFill>
-                <a:effectLst/>
-                <a:latin typeface="Google Sans Text"/>
-              </a:rPr>
-              <a:t>Big-O</a:t>
-            </a:r>
-            <a:r>
-              <a:rPr kumimoji="0" lang="pt-BR" altLang="pt-BR" sz="2400" b="0" i="0" u="none" strike="noStrike" cap="none" normalizeH="0" baseline="0" dirty="0">
-                <a:ln>
-                  <a:noFill/>
-                </a:ln>
-                <a:solidFill>
-                  <a:schemeClr val="tx1"/>
-                </a:solidFill>
-                <a:effectLst/>
-                <a:latin typeface="Google Sans Text"/>
-              </a:rPr>
-              <a:t>, mas exige a ponderação de:</a:t>
-            </a:r>
-          </a:p>
-          <a:p>
-            <a:pPr marL="457200" lvl="1" indent="0" eaLnBrk="0" fontAlgn="base" hangingPunct="0">
-              <a:lnSpc>
-                <a:spcPct val="100000"/>
-              </a:lnSpc>
-              <a:spcBef>
-                <a:spcPct val="0"/>
-              </a:spcBef>
-              <a:spcAft>
-                <a:spcPct val="0"/>
-              </a:spcAft>
-              <a:buFontTx/>
-              <a:buAutoNum type="arabicPeriod"/>
-            </a:pPr>
-            <a:r>
-              <a:rPr lang="pt-BR" altLang="pt-BR" sz="2000" b="1" dirty="0">
-                <a:latin typeface="Google Sans Text"/>
-              </a:rPr>
-              <a:t>Estabilidade</a:t>
-            </a:r>
-            <a:r>
-              <a:rPr lang="pt-BR" altLang="pt-BR" sz="2000" dirty="0">
-                <a:latin typeface="Google Sans Text"/>
-              </a:rPr>
-              <a:t>: Preservação do histórico de dados.</a:t>
-            </a:r>
-          </a:p>
-          <a:p>
-            <a:pPr marL="457200" lvl="1" indent="0" eaLnBrk="0" fontAlgn="base" hangingPunct="0">
-              <a:lnSpc>
-                <a:spcPct val="100000"/>
-              </a:lnSpc>
-              <a:spcBef>
-                <a:spcPct val="0"/>
-              </a:spcBef>
-              <a:spcAft>
-                <a:spcPct val="0"/>
-              </a:spcAft>
-              <a:buFontTx/>
-              <a:buAutoNum type="arabicPeriod" startAt="2"/>
-            </a:pPr>
-            <a:r>
-              <a:rPr lang="pt-BR" altLang="pt-BR" sz="2000" b="1" dirty="0">
-                <a:latin typeface="Google Sans Text"/>
-              </a:rPr>
-              <a:t>Complexidade Espacial</a:t>
-            </a:r>
-            <a:r>
-              <a:rPr lang="pt-BR" altLang="pt-BR" sz="2000" dirty="0">
-                <a:latin typeface="Google Sans Text"/>
-              </a:rPr>
-              <a:t>: Economia de memória x velocidade de processamento.</a:t>
-            </a:r>
-          </a:p>
-          <a:p>
-            <a:pPr marL="457200" lvl="1" indent="0" eaLnBrk="0" fontAlgn="base" hangingPunct="0">
-              <a:lnSpc>
-                <a:spcPct val="100000"/>
-              </a:lnSpc>
-              <a:spcBef>
-                <a:spcPct val="0"/>
-              </a:spcBef>
-              <a:spcAft>
-                <a:spcPct val="0"/>
-              </a:spcAft>
-              <a:buFontTx/>
-              <a:buAutoNum type="arabicPeriod" startAt="3"/>
-            </a:pPr>
-            <a:r>
-              <a:rPr lang="pt-BR" altLang="pt-BR" sz="2000" b="1" dirty="0">
-                <a:latin typeface="Google Sans Text"/>
-              </a:rPr>
-              <a:t>Sensibilidade Topológica</a:t>
-            </a:r>
-            <a:r>
-              <a:rPr lang="pt-BR" altLang="pt-BR" sz="2000" dirty="0">
-                <a:latin typeface="Google Sans Text"/>
-              </a:rPr>
-              <a:t>: Comportamento diante da ordenação prévia dos dados.</a:t>
-            </a:r>
-          </a:p>
-          <a:p>
-            <a:pPr marL="457200" lvl="1" indent="0" eaLnBrk="0" fontAlgn="base" hangingPunct="0">
-              <a:lnSpc>
-                <a:spcPct val="100000"/>
-              </a:lnSpc>
-              <a:spcBef>
-                <a:spcPct val="0"/>
-              </a:spcBef>
-              <a:spcAft>
-                <a:spcPct val="0"/>
-              </a:spcAft>
-              <a:buFontTx/>
-              <a:buAutoNum type="arabicPeriod" startAt="3"/>
-            </a:pPr>
-            <a:endParaRPr lang="pt-BR" altLang="pt-BR" sz="2000" dirty="0">
-              <a:latin typeface="Google Sans Text"/>
-            </a:endParaRPr>
-          </a:p>
-          <a:p>
-            <a:pPr marL="0" indent="0" eaLnBrk="0" fontAlgn="base" hangingPunct="0">
-              <a:lnSpc>
-                <a:spcPct val="100000"/>
-              </a:lnSpc>
-              <a:spcBef>
-                <a:spcPct val="0"/>
-              </a:spcBef>
-              <a:spcAft>
-                <a:spcPct val="0"/>
-              </a:spcAft>
-              <a:buFontTx/>
-              <a:buAutoNum type="arabicPeriod" startAt="3"/>
-            </a:pPr>
-            <a:r>
-              <a:rPr lang="pt-BR" altLang="pt-BR" sz="2400" b="1" dirty="0">
-                <a:latin typeface="Google Sans Text"/>
-              </a:rPr>
-              <a:t>Síntese: </a:t>
-            </a:r>
-            <a:r>
-              <a:rPr lang="pt-BR" altLang="pt-BR" sz="2400" dirty="0">
-                <a:latin typeface="Google Sans Text"/>
-              </a:rPr>
-              <a:t>A análise formal de algoritmos é uma ferramenta pragmática e essencial para a construção de sistemas escaláveis e verdadeiramente otimizados.</a:t>
-            </a:r>
-          </a:p>
-        </p:txBody>
-      </p:sp>
-      <p:sp>
-        <p:nvSpPr>
-          <p:cNvPr id="16" name="Título 1">
-            <a:extLst>
-              <a:ext uri="{FF2B5EF4-FFF2-40B4-BE49-F238E27FC236}">
-                <a16:creationId xmlns:a16="http://schemas.microsoft.com/office/drawing/2014/main" id="{B1E829A6-DEDD-FB0A-ECB6-BAFBC1D5EEE1}"/>
-              </a:ext>
-            </a:extLst>
-          </p:cNvPr>
-          <p:cNvSpPr>
-            <a:spLocks noGrp="1"/>
-          </p:cNvSpPr>
-          <p:nvPr>
-            <p:ph type="title"/>
-          </p:nvPr>
-        </p:nvSpPr>
-        <p:spPr>
-          <a:xfrm>
-            <a:off x="474860" y="1162843"/>
-            <a:ext cx="10515600" cy="1325563"/>
-          </a:xfrm>
-        </p:spPr>
-        <p:txBody>
-          <a:bodyPr>
-            <a:normAutofit/>
-          </a:bodyPr>
-          <a:lstStyle/>
-          <a:p>
-            <a:r>
-              <a:rPr lang="pt-BR" sz="2800" b="1" dirty="0">
-                <a:latin typeface="+mn-lt"/>
-              </a:rPr>
-              <a:t>Considerações Finais e Engenharia de Software</a:t>
-            </a:r>
-          </a:p>
-        </p:txBody>
-      </p:sp>
-    </p:spTree>
-    <p:extLst>
-      <p:ext uri="{BB962C8B-B14F-4D97-AF65-F5344CB8AC3E}">
-        <p14:creationId xmlns:p14="http://schemas.microsoft.com/office/powerpoint/2010/main" val="158680928"/>
+        <p14:creationId xmlns:p14="http://schemas.microsoft.com/office/powerpoint/2010/main" val="3227322142"/>
       </p:ext>
     </p:extLst>
   </p:cSld>

--- a/Apresentação - Projeto 02.pptx
+++ b/Apresentação - Projeto 02.pptx
@@ -9,17 +9,18 @@
     <p:sldId id="257" r:id="rId3"/>
     <p:sldId id="262" r:id="rId4"/>
     <p:sldId id="269" r:id="rId5"/>
-    <p:sldId id="263" r:id="rId6"/>
-    <p:sldId id="275" r:id="rId7"/>
-    <p:sldId id="274" r:id="rId8"/>
-    <p:sldId id="265" r:id="rId9"/>
-    <p:sldId id="270" r:id="rId10"/>
-    <p:sldId id="272" r:id="rId11"/>
-    <p:sldId id="271" r:id="rId12"/>
-    <p:sldId id="273" r:id="rId13"/>
-    <p:sldId id="266" r:id="rId14"/>
-    <p:sldId id="267" r:id="rId15"/>
-    <p:sldId id="268" r:id="rId16"/>
+    <p:sldId id="276" r:id="rId6"/>
+    <p:sldId id="263" r:id="rId7"/>
+    <p:sldId id="275" r:id="rId8"/>
+    <p:sldId id="274" r:id="rId9"/>
+    <p:sldId id="265" r:id="rId10"/>
+    <p:sldId id="270" r:id="rId11"/>
+    <p:sldId id="272" r:id="rId12"/>
+    <p:sldId id="271" r:id="rId13"/>
+    <p:sldId id="273" r:id="rId14"/>
+    <p:sldId id="266" r:id="rId15"/>
+    <p:sldId id="267" r:id="rId16"/>
+    <p:sldId id="268" r:id="rId17"/>
   </p:sldIdLst>
   <p:sldSz cx="12192000" cy="6858000"/>
   <p:notesSz cx="6858000" cy="9144000"/>
@@ -273,7 +274,7 @@
           <a:p>
             <a:fld id="{E3706E84-BC9D-4EE9-9198-D52ADEF0FD9C}" type="datetimeFigureOut">
               <a:rPr lang="pt-BR" smtClean="0"/>
-              <a:t>06/04/2026</a:t>
+              <a:t>07/04/2026</a:t>
             </a:fld>
             <a:endParaRPr lang="pt-BR"/>
           </a:p>
@@ -471,7 +472,7 @@
           <a:p>
             <a:fld id="{E3706E84-BC9D-4EE9-9198-D52ADEF0FD9C}" type="datetimeFigureOut">
               <a:rPr lang="pt-BR" smtClean="0"/>
-              <a:t>06/04/2026</a:t>
+              <a:t>07/04/2026</a:t>
             </a:fld>
             <a:endParaRPr lang="pt-BR"/>
           </a:p>
@@ -679,7 +680,7 @@
           <a:p>
             <a:fld id="{E3706E84-BC9D-4EE9-9198-D52ADEF0FD9C}" type="datetimeFigureOut">
               <a:rPr lang="pt-BR" smtClean="0"/>
-              <a:t>06/04/2026</a:t>
+              <a:t>07/04/2026</a:t>
             </a:fld>
             <a:endParaRPr lang="pt-BR"/>
           </a:p>
@@ -877,7 +878,7 @@
           <a:p>
             <a:fld id="{E3706E84-BC9D-4EE9-9198-D52ADEF0FD9C}" type="datetimeFigureOut">
               <a:rPr lang="pt-BR" smtClean="0"/>
-              <a:t>06/04/2026</a:t>
+              <a:t>07/04/2026</a:t>
             </a:fld>
             <a:endParaRPr lang="pt-BR"/>
           </a:p>
@@ -1152,7 +1153,7 @@
           <a:p>
             <a:fld id="{E3706E84-BC9D-4EE9-9198-D52ADEF0FD9C}" type="datetimeFigureOut">
               <a:rPr lang="pt-BR" smtClean="0"/>
-              <a:t>06/04/2026</a:t>
+              <a:t>07/04/2026</a:t>
             </a:fld>
             <a:endParaRPr lang="pt-BR"/>
           </a:p>
@@ -1417,7 +1418,7 @@
           <a:p>
             <a:fld id="{E3706E84-BC9D-4EE9-9198-D52ADEF0FD9C}" type="datetimeFigureOut">
               <a:rPr lang="pt-BR" smtClean="0"/>
-              <a:t>06/04/2026</a:t>
+              <a:t>07/04/2026</a:t>
             </a:fld>
             <a:endParaRPr lang="pt-BR"/>
           </a:p>
@@ -1829,7 +1830,7 @@
           <a:p>
             <a:fld id="{E3706E84-BC9D-4EE9-9198-D52ADEF0FD9C}" type="datetimeFigureOut">
               <a:rPr lang="pt-BR" smtClean="0"/>
-              <a:t>06/04/2026</a:t>
+              <a:t>07/04/2026</a:t>
             </a:fld>
             <a:endParaRPr lang="pt-BR"/>
           </a:p>
@@ -1970,7 +1971,7 @@
           <a:p>
             <a:fld id="{E3706E84-BC9D-4EE9-9198-D52ADEF0FD9C}" type="datetimeFigureOut">
               <a:rPr lang="pt-BR" smtClean="0"/>
-              <a:t>06/04/2026</a:t>
+              <a:t>07/04/2026</a:t>
             </a:fld>
             <a:endParaRPr lang="pt-BR"/>
           </a:p>
@@ -2083,7 +2084,7 @@
           <a:p>
             <a:fld id="{E3706E84-BC9D-4EE9-9198-D52ADEF0FD9C}" type="datetimeFigureOut">
               <a:rPr lang="pt-BR" smtClean="0"/>
-              <a:t>06/04/2026</a:t>
+              <a:t>07/04/2026</a:t>
             </a:fld>
             <a:endParaRPr lang="pt-BR"/>
           </a:p>
@@ -2394,7 +2395,7 @@
           <a:p>
             <a:fld id="{E3706E84-BC9D-4EE9-9198-D52ADEF0FD9C}" type="datetimeFigureOut">
               <a:rPr lang="pt-BR" smtClean="0"/>
-              <a:t>06/04/2026</a:t>
+              <a:t>07/04/2026</a:t>
             </a:fld>
             <a:endParaRPr lang="pt-BR"/>
           </a:p>
@@ -2682,7 +2683,7 @@
           <a:p>
             <a:fld id="{E3706E84-BC9D-4EE9-9198-D52ADEF0FD9C}" type="datetimeFigureOut">
               <a:rPr lang="pt-BR" smtClean="0"/>
-              <a:t>06/04/2026</a:t>
+              <a:t>07/04/2026</a:t>
             </a:fld>
             <a:endParaRPr lang="pt-BR"/>
           </a:p>
@@ -2923,7 +2924,7 @@
           <a:p>
             <a:fld id="{E3706E84-BC9D-4EE9-9198-D52ADEF0FD9C}" type="datetimeFigureOut">
               <a:rPr lang="pt-BR" smtClean="0"/>
-              <a:t>06/04/2026</a:t>
+              <a:t>07/04/2026</a:t>
             </a:fld>
             <a:endParaRPr lang="pt-BR"/>
           </a:p>
@@ -3905,6 +3906,540 @@
         <p:cNvPr id="1" name="">
           <a:extLst>
             <a:ext uri="{FF2B5EF4-FFF2-40B4-BE49-F238E27FC236}">
+              <a16:creationId xmlns:a16="http://schemas.microsoft.com/office/drawing/2014/main" id="{E164B671-FC38-2847-0962-11B4314CAE5D}"/>
+            </a:ext>
+          </a:extLst>
+        </p:cNvPr>
+        <p:cNvGrpSpPr/>
+        <p:nvPr/>
+      </p:nvGrpSpPr>
+      <p:grpSpPr>
+        <a:xfrm>
+          <a:off x="0" y="0"/>
+          <a:ext cx="0" cy="0"/>
+          <a:chOff x="0" y="0"/>
+          <a:chExt cx="0" cy="0"/>
+        </a:xfrm>
+      </p:grpSpPr>
+      <p:pic>
+        <p:nvPicPr>
+          <p:cNvPr id="5" name="Imagem 4">
+            <a:extLst>
+              <a:ext uri="{FF2B5EF4-FFF2-40B4-BE49-F238E27FC236}">
+                <a16:creationId xmlns:a16="http://schemas.microsoft.com/office/drawing/2014/main" id="{14A210E9-96BE-6AEF-888F-BC27D770B970}"/>
+              </a:ext>
+            </a:extLst>
+          </p:cNvPr>
+          <p:cNvPicPr>
+            <a:picLocks noChangeAspect="1"/>
+          </p:cNvPicPr>
+          <p:nvPr/>
+        </p:nvPicPr>
+        <p:blipFill>
+          <a:blip r:embed="rId2"/>
+          <a:stretch>
+            <a:fillRect/>
+          </a:stretch>
+        </p:blipFill>
+        <p:spPr>
+          <a:xfrm>
+            <a:off x="0" y="0"/>
+            <a:ext cx="12192000" cy="1398060"/>
+          </a:xfrm>
+          <a:prstGeom prst="rect">
+            <a:avLst/>
+          </a:prstGeom>
+        </p:spPr>
+      </p:pic>
+      <p:grpSp>
+        <p:nvGrpSpPr>
+          <p:cNvPr id="10" name="Agrupar 9">
+            <a:extLst>
+              <a:ext uri="{FF2B5EF4-FFF2-40B4-BE49-F238E27FC236}">
+                <a16:creationId xmlns:a16="http://schemas.microsoft.com/office/drawing/2014/main" id="{6B17D0A5-FA6E-7612-F4EA-B08B6E431FA9}"/>
+              </a:ext>
+            </a:extLst>
+          </p:cNvPr>
+          <p:cNvGrpSpPr/>
+          <p:nvPr/>
+        </p:nvGrpSpPr>
+        <p:grpSpPr>
+          <a:xfrm>
+            <a:off x="4739781" y="3585812"/>
+            <a:ext cx="7452219" cy="3272188"/>
+            <a:chOff x="4739781" y="3585812"/>
+            <a:chExt cx="7452219" cy="3272188"/>
+          </a:xfrm>
+        </p:grpSpPr>
+        <p:pic>
+          <p:nvPicPr>
+            <p:cNvPr id="7" name="Imagem 6">
+              <a:extLst>
+                <a:ext uri="{FF2B5EF4-FFF2-40B4-BE49-F238E27FC236}">
+                  <a16:creationId xmlns:a16="http://schemas.microsoft.com/office/drawing/2014/main" id="{C0A576E9-D595-470C-A40E-2194D8494497}"/>
+                </a:ext>
+              </a:extLst>
+            </p:cNvPr>
+            <p:cNvPicPr>
+              <a:picLocks noChangeAspect="1"/>
+            </p:cNvPicPr>
+            <p:nvPr/>
+          </p:nvPicPr>
+          <p:blipFill>
+            <a:blip r:embed="rId3"/>
+            <a:stretch>
+              <a:fillRect/>
+            </a:stretch>
+          </p:blipFill>
+          <p:spPr>
+            <a:xfrm>
+              <a:off x="5492514" y="4013377"/>
+              <a:ext cx="6699486" cy="2844623"/>
+            </a:xfrm>
+            <a:prstGeom prst="rect">
+              <a:avLst/>
+            </a:prstGeom>
+            <a:effectLst>
+              <a:outerShdw blurRad="50800" dist="50800" dir="5400000" algn="ctr" rotWithShape="0">
+                <a:srgbClr val="000000"/>
+              </a:outerShdw>
+            </a:effectLst>
+          </p:spPr>
+        </p:pic>
+        <p:sp>
+          <p:nvSpPr>
+            <p:cNvPr id="8" name="Retângulo 7">
+              <a:extLst>
+                <a:ext uri="{FF2B5EF4-FFF2-40B4-BE49-F238E27FC236}">
+                  <a16:creationId xmlns:a16="http://schemas.microsoft.com/office/drawing/2014/main" id="{6330B5B5-14A9-566F-3454-C956FFC60E8C}"/>
+                </a:ext>
+              </a:extLst>
+            </p:cNvPr>
+            <p:cNvSpPr/>
+            <p:nvPr/>
+          </p:nvSpPr>
+          <p:spPr>
+            <a:xfrm>
+              <a:off x="4739781" y="4013377"/>
+              <a:ext cx="1104550" cy="2844623"/>
+            </a:xfrm>
+            <a:prstGeom prst="rect">
+              <a:avLst/>
+            </a:prstGeom>
+            <a:solidFill>
+              <a:schemeClr val="bg1"/>
+            </a:solidFill>
+            <a:ln>
+              <a:solidFill>
+                <a:schemeClr val="bg1"/>
+              </a:solidFill>
+            </a:ln>
+          </p:spPr>
+          <p:style>
+            <a:lnRef idx="2">
+              <a:schemeClr val="accent1">
+                <a:shade val="15000"/>
+              </a:schemeClr>
+            </a:lnRef>
+            <a:fillRef idx="1">
+              <a:schemeClr val="accent1"/>
+            </a:fillRef>
+            <a:effectRef idx="0">
+              <a:schemeClr val="accent1"/>
+            </a:effectRef>
+            <a:fontRef idx="minor">
+              <a:schemeClr val="lt1"/>
+            </a:fontRef>
+          </p:style>
+          <p:txBody>
+            <a:bodyPr rtlCol="0" anchor="ctr"/>
+            <a:lstStyle/>
+            <a:p>
+              <a:pPr algn="ctr"/>
+              <a:endParaRPr lang="pt-BR"/>
+            </a:p>
+          </p:txBody>
+        </p:sp>
+        <p:sp>
+          <p:nvSpPr>
+            <p:cNvPr id="9" name="Retângulo 8">
+              <a:extLst>
+                <a:ext uri="{FF2B5EF4-FFF2-40B4-BE49-F238E27FC236}">
+                  <a16:creationId xmlns:a16="http://schemas.microsoft.com/office/drawing/2014/main" id="{484C3208-5267-F20F-10D0-69E389B21B7E}"/>
+                </a:ext>
+              </a:extLst>
+            </p:cNvPr>
+            <p:cNvSpPr/>
+            <p:nvPr/>
+          </p:nvSpPr>
+          <p:spPr>
+            <a:xfrm>
+              <a:off x="5292056" y="3585812"/>
+              <a:ext cx="4453856" cy="1078467"/>
+            </a:xfrm>
+            <a:prstGeom prst="rect">
+              <a:avLst/>
+            </a:prstGeom>
+            <a:solidFill>
+              <a:schemeClr val="bg1"/>
+            </a:solidFill>
+            <a:ln>
+              <a:solidFill>
+                <a:schemeClr val="bg1"/>
+              </a:solidFill>
+            </a:ln>
+          </p:spPr>
+          <p:style>
+            <a:lnRef idx="2">
+              <a:schemeClr val="accent1">
+                <a:shade val="15000"/>
+              </a:schemeClr>
+            </a:lnRef>
+            <a:fillRef idx="1">
+              <a:schemeClr val="accent1"/>
+            </a:fillRef>
+            <a:effectRef idx="0">
+              <a:schemeClr val="accent1"/>
+            </a:effectRef>
+            <a:fontRef idx="minor">
+              <a:schemeClr val="lt1"/>
+            </a:fontRef>
+          </p:style>
+          <p:txBody>
+            <a:bodyPr rtlCol="0" anchor="ctr"/>
+            <a:lstStyle/>
+            <a:p>
+              <a:pPr algn="ctr"/>
+              <a:endParaRPr lang="pt-BR"/>
+            </a:p>
+          </p:txBody>
+        </p:sp>
+      </p:grpSp>
+      <p:sp>
+        <p:nvSpPr>
+          <p:cNvPr id="16" name="Título 1">
+            <a:extLst>
+              <a:ext uri="{FF2B5EF4-FFF2-40B4-BE49-F238E27FC236}">
+                <a16:creationId xmlns:a16="http://schemas.microsoft.com/office/drawing/2014/main" id="{3F1C265C-450B-E149-E6F1-8766C3132B27}"/>
+              </a:ext>
+            </a:extLst>
+          </p:cNvPr>
+          <p:cNvSpPr>
+            <a:spLocks noGrp="1"/>
+          </p:cNvSpPr>
+          <p:nvPr>
+            <p:ph type="title"/>
+          </p:nvPr>
+        </p:nvSpPr>
+        <p:spPr>
+          <a:xfrm>
+            <a:off x="474860" y="1162843"/>
+            <a:ext cx="10515600" cy="1325563"/>
+          </a:xfrm>
+        </p:spPr>
+        <p:txBody>
+          <a:bodyPr>
+            <a:normAutofit/>
+          </a:bodyPr>
+          <a:lstStyle/>
+          <a:p>
+            <a:r>
+              <a:rPr lang="pt-BR" sz="2800" b="1" dirty="0">
+                <a:latin typeface="+mn-lt"/>
+              </a:rPr>
+              <a:t>A Árvore BST e a Volatilidade Estrutural</a:t>
+            </a:r>
+          </a:p>
+        </p:txBody>
+      </p:sp>
+      <p:sp>
+        <p:nvSpPr>
+          <p:cNvPr id="13" name="Rectangle 1">
+            <a:extLst>
+              <a:ext uri="{FF2B5EF4-FFF2-40B4-BE49-F238E27FC236}">
+                <a16:creationId xmlns:a16="http://schemas.microsoft.com/office/drawing/2014/main" id="{379EF3F8-DAA6-B371-6726-DD0D059AD3EC}"/>
+              </a:ext>
+            </a:extLst>
+          </p:cNvPr>
+          <p:cNvSpPr>
+            <a:spLocks noGrp="1" noChangeArrowheads="1"/>
+          </p:cNvSpPr>
+          <p:nvPr>
+            <p:ph idx="1"/>
+          </p:nvPr>
+        </p:nvSpPr>
+        <p:spPr bwMode="auto">
+          <a:xfrm>
+            <a:off x="1075630" y="2382161"/>
+            <a:ext cx="10515600" cy="3262432"/>
+          </a:xfrm>
+          <a:prstGeom prst="rect">
+            <a:avLst/>
+          </a:prstGeom>
+          <a:noFill/>
+          <a:ln>
+            <a:noFill/>
+          </a:ln>
+          <a:effectLst/>
+          <a:extLst>
+            <a:ext uri="{909E8E84-426E-40DD-AFC4-6F175D3DCCD1}">
+              <a14:hiddenFill xmlns:a14="http://schemas.microsoft.com/office/drawing/2010/main">
+                <a:solidFill>
+                  <a:schemeClr val="accent1"/>
+                </a:solidFill>
+              </a14:hiddenFill>
+            </a:ext>
+            <a:ext uri="{91240B29-F687-4F45-9708-019B960494DF}">
+              <a14:hiddenLine xmlns:a14="http://schemas.microsoft.com/office/drawing/2010/main" w="9525">
+                <a:solidFill>
+                  <a:schemeClr val="tx1"/>
+                </a:solidFill>
+                <a:miter lim="800000"/>
+                <a:headEnd/>
+                <a:tailEnd/>
+              </a14:hiddenLine>
+            </a:ext>
+            <a:ext uri="{AF507438-7753-43E0-B8FC-AC1667EBCBE1}">
+              <a14:hiddenEffects xmlns:a14="http://schemas.microsoft.com/office/drawing/2010/main">
+                <a:effectLst>
+                  <a:outerShdw dist="35921" dir="2700000" algn="ctr" rotWithShape="0">
+                    <a:schemeClr val="bg2"/>
+                  </a:outerShdw>
+                </a:effectLst>
+              </a14:hiddenEffects>
+            </a:ext>
+          </a:extLst>
+        </p:spPr>
+        <p:txBody>
+          <a:bodyPr vert="horz" wrap="square" lIns="91440" tIns="45720" rIns="91440" bIns="45720" numCol="1" anchor="ctr" anchorCtr="0" compatLnSpc="1">
+            <a:prstTxWarp prst="textNoShape">
+              <a:avLst/>
+            </a:prstTxWarp>
+            <a:spAutoFit/>
+          </a:bodyPr>
+          <a:lstStyle/>
+          <a:p>
+            <a:pPr marL="0" indent="0" eaLnBrk="0" fontAlgn="base" hangingPunct="0">
+              <a:lnSpc>
+                <a:spcPct val="100000"/>
+              </a:lnSpc>
+              <a:spcBef>
+                <a:spcPct val="0"/>
+              </a:spcBef>
+              <a:spcAft>
+                <a:spcPct val="0"/>
+              </a:spcAft>
+              <a:buFontTx/>
+              <a:buChar char="•"/>
+            </a:pPr>
+            <a:r>
+              <a:rPr lang="pt-BR" altLang="pt-BR" sz="2400" b="1" dirty="0"/>
+              <a:t> Topologicamente vulnerável a entrada dos dados</a:t>
+            </a:r>
+          </a:p>
+          <a:p>
+            <a:pPr marL="0" indent="0" eaLnBrk="0" fontAlgn="base" hangingPunct="0">
+              <a:lnSpc>
+                <a:spcPct val="100000"/>
+              </a:lnSpc>
+              <a:spcBef>
+                <a:spcPct val="0"/>
+              </a:spcBef>
+              <a:spcAft>
+                <a:spcPct val="0"/>
+              </a:spcAft>
+              <a:buFontTx/>
+              <a:buChar char="•"/>
+            </a:pPr>
+            <a:endParaRPr lang="pt-BR" altLang="pt-BR" sz="2400" b="1" dirty="0"/>
+          </a:p>
+          <a:p>
+            <a:pPr marL="457200" lvl="1" indent="0" eaLnBrk="0" fontAlgn="base" hangingPunct="0">
+              <a:lnSpc>
+                <a:spcPct val="100000"/>
+              </a:lnSpc>
+              <a:spcBef>
+                <a:spcPct val="0"/>
+              </a:spcBef>
+              <a:spcAft>
+                <a:spcPct val="0"/>
+              </a:spcAft>
+              <a:buFontTx/>
+              <a:buChar char="•"/>
+            </a:pPr>
+            <a:r>
+              <a:rPr lang="pt-BR" altLang="pt-BR" sz="2000" b="1" dirty="0"/>
+              <a:t> Dados ordenados</a:t>
+            </a:r>
+          </a:p>
+          <a:p>
+            <a:pPr marL="914400" lvl="2" indent="0" eaLnBrk="0" fontAlgn="base" hangingPunct="0">
+              <a:lnSpc>
+                <a:spcPct val="100000"/>
+              </a:lnSpc>
+              <a:spcBef>
+                <a:spcPct val="0"/>
+              </a:spcBef>
+              <a:spcAft>
+                <a:spcPct val="0"/>
+              </a:spcAft>
+              <a:buFontTx/>
+              <a:buChar char="•"/>
+            </a:pPr>
+            <a:r>
+              <a:rPr lang="pt-BR" altLang="pt-BR" dirty="0"/>
+              <a:t> “Lista encadeada” - O(N)</a:t>
+            </a:r>
+          </a:p>
+          <a:p>
+            <a:pPr marL="457200" lvl="1" indent="0" eaLnBrk="0" fontAlgn="base" hangingPunct="0">
+              <a:lnSpc>
+                <a:spcPct val="100000"/>
+              </a:lnSpc>
+              <a:spcBef>
+                <a:spcPct val="0"/>
+              </a:spcBef>
+              <a:spcAft>
+                <a:spcPct val="0"/>
+              </a:spcAft>
+              <a:buFontTx/>
+              <a:buChar char="•"/>
+            </a:pPr>
+            <a:r>
+              <a:rPr lang="pt-BR" altLang="pt-BR" sz="2000" b="1" dirty="0"/>
+              <a:t> Dados aleatórios</a:t>
+            </a:r>
+          </a:p>
+          <a:p>
+            <a:pPr marL="914400" lvl="2" indent="0" eaLnBrk="0" fontAlgn="base" hangingPunct="0">
+              <a:lnSpc>
+                <a:spcPct val="100000"/>
+              </a:lnSpc>
+              <a:spcBef>
+                <a:spcPct val="0"/>
+              </a:spcBef>
+              <a:spcAft>
+                <a:spcPct val="0"/>
+              </a:spcAft>
+              <a:buFontTx/>
+              <a:buChar char="•"/>
+            </a:pPr>
+            <a:r>
+              <a:rPr lang="pt-BR" altLang="pt-BR" dirty="0"/>
+              <a:t> Árvore naturalmente balanceada</a:t>
+            </a:r>
+          </a:p>
+          <a:p>
+            <a:pPr marL="914400" lvl="2" indent="0" eaLnBrk="0" fontAlgn="base" hangingPunct="0">
+              <a:lnSpc>
+                <a:spcPct val="100000"/>
+              </a:lnSpc>
+              <a:spcBef>
+                <a:spcPct val="0"/>
+              </a:spcBef>
+              <a:spcAft>
+                <a:spcPct val="0"/>
+              </a:spcAft>
+              <a:buFontTx/>
+              <a:buChar char="•"/>
+            </a:pPr>
+            <a:r>
+              <a:rPr lang="pt-BR" altLang="pt-BR" dirty="0"/>
+              <a:t> Superou AVL no processamento sequencial</a:t>
+            </a:r>
+          </a:p>
+          <a:p>
+            <a:pPr marL="1371600" lvl="3" indent="0" eaLnBrk="0" fontAlgn="base" hangingPunct="0">
+              <a:lnSpc>
+                <a:spcPct val="100000"/>
+              </a:lnSpc>
+              <a:spcBef>
+                <a:spcPct val="0"/>
+              </a:spcBef>
+              <a:spcAft>
+                <a:spcPct val="0"/>
+              </a:spcAft>
+              <a:buFontTx/>
+              <a:buChar char="•"/>
+            </a:pPr>
+            <a:r>
+              <a:rPr lang="pt-BR" altLang="pt-BR" sz="2000" dirty="0"/>
+              <a:t>sem overhead de rotações automáticas</a:t>
+            </a:r>
+          </a:p>
+          <a:p>
+            <a:pPr marL="914400" lvl="2" indent="0" eaLnBrk="0" fontAlgn="base" hangingPunct="0">
+              <a:lnSpc>
+                <a:spcPct val="100000"/>
+              </a:lnSpc>
+              <a:spcBef>
+                <a:spcPct val="0"/>
+              </a:spcBef>
+              <a:spcAft>
+                <a:spcPct val="0"/>
+              </a:spcAft>
+              <a:buFontTx/>
+              <a:buChar char="•"/>
+            </a:pPr>
+            <a:endParaRPr kumimoji="0" lang="pt-BR" altLang="pt-BR" sz="1800" b="1" i="0" u="none" strike="noStrike" cap="none" normalizeH="0" baseline="0" dirty="0">
+              <a:ln>
+                <a:noFill/>
+              </a:ln>
+              <a:solidFill>
+                <a:schemeClr val="tx1"/>
+              </a:solidFill>
+              <a:effectLst/>
+              <a:latin typeface="Arial" panose="020B0604020202020204" pitchFamily="34" charset="0"/>
+            </a:endParaRPr>
+          </a:p>
+          <a:p>
+            <a:pPr marL="457200" lvl="1" indent="0" eaLnBrk="0" fontAlgn="base" hangingPunct="0">
+              <a:lnSpc>
+                <a:spcPct val="100000"/>
+              </a:lnSpc>
+              <a:spcBef>
+                <a:spcPct val="0"/>
+              </a:spcBef>
+              <a:spcAft>
+                <a:spcPct val="0"/>
+              </a:spcAft>
+              <a:buFontTx/>
+              <a:buAutoNum type="arabicPeriod"/>
+            </a:pPr>
+            <a:endParaRPr kumimoji="0" lang="pt-BR" altLang="pt-BR" sz="2000" b="0" i="0" u="none" strike="noStrike" cap="none" normalizeH="0" baseline="0" dirty="0">
+              <a:ln>
+                <a:noFill/>
+              </a:ln>
+              <a:solidFill>
+                <a:schemeClr val="tx1"/>
+              </a:solidFill>
+              <a:effectLst/>
+              <a:latin typeface="Google Sans Text"/>
+            </a:endParaRPr>
+          </a:p>
+        </p:txBody>
+      </p:sp>
+    </p:spTree>
+    <p:extLst>
+      <p:ext uri="{BB962C8B-B14F-4D97-AF65-F5344CB8AC3E}">
+        <p14:creationId xmlns:p14="http://schemas.microsoft.com/office/powerpoint/2010/main" val="3227322142"/>
+      </p:ext>
+    </p:extLst>
+  </p:cSld>
+  <p:clrMapOvr>
+    <a:masterClrMapping/>
+  </p:clrMapOvr>
+</p:sld>
+</file>
+
+<file path=ppt/slides/slide11.xml><?xml version="1.0" encoding="utf-8"?>
+<p:sld xmlns:a="http://schemas.openxmlformats.org/drawingml/2006/main" xmlns:r="http://schemas.openxmlformats.org/officeDocument/2006/relationships" xmlns:p="http://schemas.openxmlformats.org/presentationml/2006/main">
+  <p:cSld>
+    <p:spTree>
+      <p:nvGrpSpPr>
+        <p:cNvPr id="1" name="">
+          <a:extLst>
+            <a:ext uri="{FF2B5EF4-FFF2-40B4-BE49-F238E27FC236}">
               <a16:creationId xmlns:a16="http://schemas.microsoft.com/office/drawing/2014/main" id="{A02D6968-D1BD-D846-D23A-50FCDDAE70F0}"/>
             </a:ext>
           </a:extLst>
@@ -4163,7 +4698,7 @@
 </p:sld>
 </file>
 
-<file path=ppt/slides/slide11.xml><?xml version="1.0" encoding="utf-8"?>
+<file path=ppt/slides/slide12.xml><?xml version="1.0" encoding="utf-8"?>
 <p:sld xmlns:a="http://schemas.openxmlformats.org/drawingml/2006/main" xmlns:r="http://schemas.openxmlformats.org/officeDocument/2006/relationships" xmlns:p="http://schemas.openxmlformats.org/presentationml/2006/main">
   <p:cSld>
     <p:spTree>
@@ -4509,7 +5044,7 @@
             </a:pPr>
             <a:r>
               <a:rPr lang="pt-BR" dirty="0"/>
-              <a:t> paralelismo</a:t>
+              <a:t> Paralelismo</a:t>
             </a:r>
           </a:p>
           <a:p>
@@ -4572,7 +5107,7 @@
             <a:pPr lvl="2"/>
             <a:r>
               <a:rPr lang="pt-BR" dirty="0"/>
-              <a:t>Para as operações naturalmente eficientes O(log N), o overhead de coordenação tornou a computação Single-Thread vitoriosa</a:t>
+              <a:t>Para as operações naturalmente eficientes O(log N), o overhead de coordenação tornou a computação Single-Thread superior</a:t>
             </a:r>
             <a:endParaRPr kumimoji="0" lang="pt-BR" altLang="pt-BR" sz="2000" b="0" i="0" u="none" strike="noStrike" cap="none" normalizeH="0" baseline="0" dirty="0">
               <a:ln>
@@ -4649,7 +5184,7 @@
 </p:sld>
 </file>
 
-<file path=ppt/slides/slide12.xml><?xml version="1.0" encoding="utf-8"?>
+<file path=ppt/slides/slide13.xml><?xml version="1.0" encoding="utf-8"?>
 <p:sld xmlns:a="http://schemas.openxmlformats.org/drawingml/2006/main" xmlns:r="http://schemas.openxmlformats.org/officeDocument/2006/relationships" xmlns:p="http://schemas.openxmlformats.org/presentationml/2006/main">
   <p:cSld>
     <p:spTree>
@@ -4915,7 +5450,7 @@
 </p:sld>
 </file>
 
-<file path=ppt/slides/slide13.xml><?xml version="1.0" encoding="utf-8"?>
+<file path=ppt/slides/slide14.xml><?xml version="1.0" encoding="utf-8"?>
 <p:sld xmlns:a="http://schemas.openxmlformats.org/drawingml/2006/main" xmlns:r="http://schemas.openxmlformats.org/officeDocument/2006/relationships" xmlns:p="http://schemas.openxmlformats.org/presentationml/2006/main">
   <p:cSld>
     <p:spTree>
@@ -5150,8 +5685,8 @@
         </p:nvSpPr>
         <p:spPr bwMode="auto">
           <a:xfrm>
-            <a:off x="838200" y="2050682"/>
-            <a:ext cx="10515600" cy="4462760"/>
+            <a:off x="838200" y="2604679"/>
+            <a:ext cx="10515600" cy="3354765"/>
           </a:xfrm>
           <a:prstGeom prst="rect">
             <a:avLst/>
@@ -5223,125 +5758,79 @@
                 <a:effectLst/>
                 <a:latin typeface="Google Sans Text"/>
               </a:rPr>
-              <a:t> A Invariância do </a:t>
-            </a:r>
-            <a:r>
-              <a:rPr kumimoji="0" lang="pt-BR" altLang="pt-BR" sz="2400" b="1" i="0" u="none" strike="noStrike" cap="none" normalizeH="0" baseline="0" dirty="0" err="1">
-                <a:ln>
-                  <a:noFill/>
-                </a:ln>
-                <a:solidFill>
-                  <a:schemeClr val="tx1"/>
-                </a:solidFill>
-                <a:effectLst/>
+              <a:t> </a:t>
+            </a:r>
+            <a:r>
+              <a:rPr lang="pt-BR" sz="2400" b="1" dirty="0">
                 <a:latin typeface="Google Sans Text"/>
               </a:rPr>
-              <a:t>Selection</a:t>
-            </a:r>
-            <a:r>
-              <a:rPr kumimoji="0" lang="pt-BR" altLang="pt-BR" sz="2400" b="1" i="0" u="none" strike="noStrike" cap="none" normalizeH="0" baseline="0" dirty="0">
-                <a:ln>
-                  <a:noFill/>
-                </a:ln>
-                <a:solidFill>
-                  <a:schemeClr val="tx1"/>
-                </a:solidFill>
-                <a:effectLst/>
+              <a:t>Topologias binárias são unidimensionais</a:t>
+            </a:r>
+          </a:p>
+          <a:p>
+            <a:pPr marL="457200" lvl="1" indent="0" eaLnBrk="0" fontAlgn="base" hangingPunct="0">
+              <a:lnSpc>
+                <a:spcPct val="100000"/>
+              </a:lnSpc>
+              <a:spcBef>
+                <a:spcPct val="0"/>
+              </a:spcBef>
+              <a:spcAft>
+                <a:spcPct val="0"/>
+              </a:spcAft>
+              <a:buFontTx/>
+              <a:buChar char="•"/>
+            </a:pPr>
+            <a:r>
+              <a:rPr lang="pt-BR" sz="2000" dirty="0">
+                <a:latin typeface="Google Sans Text"/>
+              </a:rPr>
+              <a:t> Ao buscar por um campo que não seja a chave primária de indexação, a capacidade de direcionamento lógico se perde</a:t>
+            </a:r>
+          </a:p>
+          <a:p>
+            <a:pPr marL="457200" lvl="1" indent="0" eaLnBrk="0" fontAlgn="base" hangingPunct="0">
+              <a:lnSpc>
+                <a:spcPct val="100000"/>
+              </a:lnSpc>
+              <a:spcBef>
+                <a:spcPct val="0"/>
+              </a:spcBef>
+              <a:spcAft>
+                <a:spcPct val="0"/>
+              </a:spcAft>
+              <a:buFontTx/>
+              <a:buChar char="•"/>
+            </a:pPr>
+            <a:r>
+              <a:rPr lang="pt-BR" sz="2000" dirty="0">
+                <a:latin typeface="Google Sans Text"/>
+              </a:rPr>
+              <a:t> A operação sofre uma degradação imediata para varredura completa O(N), exigindo a travessia de todos os nós (</a:t>
+            </a:r>
+            <a:r>
+              <a:rPr lang="pt-BR" sz="2000" dirty="0" err="1">
+                <a:latin typeface="Google Sans Text"/>
+              </a:rPr>
+              <a:t>Tree</a:t>
+            </a:r>
+            <a:r>
+              <a:rPr lang="pt-BR" sz="2000" dirty="0">
                 <a:latin typeface="Google Sans Text"/>
               </a:rPr>
               <a:t> </a:t>
             </a:r>
             <a:r>
-              <a:rPr kumimoji="0" lang="pt-BR" altLang="pt-BR" sz="2400" b="1" i="0" u="none" strike="noStrike" cap="none" normalizeH="0" baseline="0" dirty="0" err="1">
-                <a:ln>
-                  <a:noFill/>
-                </a:ln>
-                <a:solidFill>
-                  <a:schemeClr val="tx1"/>
-                </a:solidFill>
-                <a:effectLst/>
+              <a:rPr lang="pt-BR" sz="2000" dirty="0" err="1">
                 <a:latin typeface="Google Sans Text"/>
               </a:rPr>
-              <a:t>Sort</a:t>
-            </a:r>
-            <a:r>
-              <a:rPr kumimoji="0" lang="pt-BR" altLang="pt-BR" sz="2400" b="1" i="0" u="none" strike="noStrike" cap="none" normalizeH="0" baseline="0" dirty="0">
-                <a:ln>
-                  <a:noFill/>
-                </a:ln>
-                <a:solidFill>
-                  <a:schemeClr val="tx1"/>
-                </a:solidFill>
-                <a:effectLst/>
+              <a:t>Traversal</a:t>
+            </a:r>
+            <a:r>
+              <a:rPr lang="pt-BR" sz="2000" dirty="0">
                 <a:latin typeface="Google Sans Text"/>
               </a:rPr>
-              <a:t>:</a:t>
-            </a:r>
-            <a:r>
-              <a:rPr kumimoji="0" lang="pt-BR" altLang="pt-BR" sz="2400" b="0" i="0" u="none" strike="noStrike" cap="none" normalizeH="0" baseline="0" dirty="0">
-                <a:ln>
-                  <a:noFill/>
-                </a:ln>
-                <a:solidFill>
-                  <a:schemeClr val="tx1"/>
-                </a:solidFill>
-                <a:effectLst/>
-                <a:latin typeface="Google Sans Text"/>
-              </a:rPr>
-              <a:t> Preso na complexidade </a:t>
-            </a:r>
-            <a:r>
-              <a:rPr kumimoji="0" lang="pt-BR" altLang="pt-BR" sz="3600" b="0" i="0" u="none" strike="noStrike" cap="none" normalizeH="0" baseline="0" dirty="0">
-                <a:ln>
-                  <a:noFill/>
-                </a:ln>
-                <a:solidFill>
-                  <a:schemeClr val="tx1"/>
-                </a:solidFill>
-                <a:effectLst/>
-                <a:latin typeface="Times New Roman" panose="02020603050405020304" pitchFamily="18" charset="0"/>
-                <a:cs typeface="Times New Roman" panose="02020603050405020304" pitchFamily="18" charset="0"/>
-              </a:rPr>
-              <a:t>ɵ</a:t>
-            </a:r>
-            <a:r>
-              <a:rPr kumimoji="0" lang="pt-BR" altLang="pt-BR" sz="2400" b="0" i="0" u="none" strike="noStrike" cap="none" normalizeH="0" baseline="0" dirty="0">
-                <a:ln>
-                  <a:noFill/>
-                </a:ln>
-                <a:solidFill>
-                  <a:schemeClr val="tx1"/>
-                </a:solidFill>
-                <a:effectLst/>
-                <a:latin typeface="Google Sans Text"/>
-              </a:rPr>
-              <a:t>(n</a:t>
-            </a:r>
-            <a:r>
-              <a:rPr kumimoji="0" lang="pt-BR" altLang="pt-BR" sz="2400" b="0" i="0" u="none" strike="noStrike" cap="none" normalizeH="0" baseline="30000" dirty="0">
-                <a:ln>
-                  <a:noFill/>
-                </a:ln>
-                <a:solidFill>
-                  <a:schemeClr val="tx1"/>
-                </a:solidFill>
-                <a:effectLst/>
-                <a:latin typeface="Google Sans Text"/>
-              </a:rPr>
-              <a:t>2</a:t>
-            </a:r>
-            <a:r>
-              <a:rPr kumimoji="0" lang="pt-BR" altLang="pt-BR" sz="2400" b="0" i="0" u="none" strike="noStrike" cap="none" normalizeH="0" baseline="0" dirty="0">
-                <a:ln>
-                  <a:noFill/>
-                </a:ln>
-                <a:solidFill>
-                  <a:schemeClr val="tx1"/>
-                </a:solidFill>
-                <a:effectLst/>
-                <a:latin typeface="Google Sans Text"/>
-              </a:rPr>
-              <a:t>), não se beneficia de vetores ordenados (tempo constante nos 3 cenários)</a:t>
+              <a:t>).</a:t>
             </a:r>
           </a:p>
           <a:p>
@@ -5384,174 +5873,26 @@
               <a:buChar char="•"/>
             </a:pPr>
             <a:r>
-              <a:rPr kumimoji="0" lang="pt-BR" altLang="pt-BR" sz="2400" b="1" i="0" u="none" strike="noStrike" cap="none" normalizeH="0" baseline="0" dirty="0">
-                <a:ln>
-                  <a:noFill/>
-                </a:ln>
-                <a:solidFill>
-                  <a:schemeClr val="tx1"/>
-                </a:solidFill>
-                <a:effectLst/>
-                <a:latin typeface="Google Sans Text"/>
-              </a:rPr>
-              <a:t> O Comportamento Adaptativo do </a:t>
-            </a:r>
-            <a:r>
-              <a:rPr kumimoji="0" lang="pt-BR" altLang="pt-BR" sz="2400" b="1" i="0" u="none" strike="noStrike" cap="none" normalizeH="0" baseline="0" dirty="0" err="1">
-                <a:ln>
-                  <a:noFill/>
-                </a:ln>
-                <a:solidFill>
-                  <a:schemeClr val="tx1"/>
-                </a:solidFill>
-                <a:effectLst/>
-                <a:latin typeface="Google Sans Text"/>
-              </a:rPr>
-              <a:t>Insertion</a:t>
-            </a:r>
-            <a:r>
-              <a:rPr kumimoji="0" lang="pt-BR" altLang="pt-BR" sz="2400" b="1" i="0" u="none" strike="noStrike" cap="none" normalizeH="0" baseline="0" dirty="0">
-                <a:ln>
-                  <a:noFill/>
-                </a:ln>
-                <a:solidFill>
-                  <a:schemeClr val="tx1"/>
-                </a:solidFill>
-                <a:effectLst/>
+              <a:rPr lang="pt-BR" altLang="pt-BR" sz="2400" b="1" dirty="0">
                 <a:latin typeface="Google Sans Text"/>
               </a:rPr>
               <a:t> </a:t>
             </a:r>
             <a:r>
-              <a:rPr kumimoji="0" lang="pt-BR" altLang="pt-BR" sz="2400" b="1" i="0" u="none" strike="noStrike" cap="none" normalizeH="0" baseline="0" dirty="0" err="1">
-                <a:ln>
-                  <a:noFill/>
-                </a:ln>
-                <a:solidFill>
-                  <a:schemeClr val="tx1"/>
-                </a:solidFill>
-                <a:effectLst/>
+              <a:rPr lang="pt-BR" sz="2400" b="1" dirty="0">
                 <a:latin typeface="Google Sans Text"/>
               </a:rPr>
-              <a:t>Sort</a:t>
-            </a:r>
-            <a:r>
-              <a:rPr kumimoji="0" lang="pt-BR" altLang="pt-BR" sz="2400" b="1" i="0" u="none" strike="noStrike" cap="none" normalizeH="0" baseline="0" dirty="0">
-                <a:ln>
-                  <a:noFill/>
-                </a:ln>
-                <a:solidFill>
-                  <a:schemeClr val="tx1"/>
-                </a:solidFill>
-                <a:effectLst/>
+              <a:t>Single-Thread vs </a:t>
+            </a:r>
+            <a:r>
+              <a:rPr lang="pt-BR" sz="2400" b="1" dirty="0" err="1">
                 <a:latin typeface="Google Sans Text"/>
               </a:rPr>
-              <a:t>:</a:t>
-            </a:r>
-            <a:r>
-              <a:rPr kumimoji="0" lang="pt-BR" altLang="pt-BR" sz="2400" b="0" i="0" u="none" strike="noStrike" cap="none" normalizeH="0" baseline="0" dirty="0">
-                <a:ln>
-                  <a:noFill/>
-                </a:ln>
-                <a:solidFill>
-                  <a:schemeClr val="tx1"/>
-                </a:solidFill>
-                <a:effectLst/>
-                <a:latin typeface="Google Sans Text"/>
-              </a:rPr>
-              <a:t> Atinge o limite inferior garantido de </a:t>
-            </a:r>
-            <a:r>
-              <a:rPr kumimoji="0" lang="el-GR" altLang="pt-BR" sz="2400" b="0" i="0" u="none" strike="noStrike" cap="none" normalizeH="0" baseline="0" dirty="0">
-                <a:ln>
-                  <a:noFill/>
-                </a:ln>
-                <a:solidFill>
-                  <a:schemeClr val="tx1"/>
-                </a:solidFill>
-                <a:effectLst/>
-                <a:latin typeface="Times New Roman" panose="02020603050405020304" pitchFamily="18" charset="0"/>
-                <a:cs typeface="Times New Roman" panose="02020603050405020304" pitchFamily="18" charset="0"/>
-              </a:rPr>
-              <a:t>Ω</a:t>
-            </a:r>
-            <a:r>
-              <a:rPr kumimoji="0" lang="pt-BR" altLang="pt-BR" sz="2400" b="0" i="0" u="none" strike="noStrike" cap="none" normalizeH="0" baseline="0" dirty="0">
-                <a:ln>
-                  <a:noFill/>
-                </a:ln>
-                <a:solidFill>
-                  <a:schemeClr val="tx1"/>
-                </a:solidFill>
-                <a:effectLst/>
-                <a:latin typeface="Google Sans Text"/>
-              </a:rPr>
-              <a:t>(n) no melhor caso (~0.00s), mas sofre severa punição geométrica no pior caso.</a:t>
-            </a:r>
-          </a:p>
-          <a:p>
-            <a:pPr marL="0" indent="0" eaLnBrk="0" fontAlgn="base" hangingPunct="0">
-              <a:lnSpc>
-                <a:spcPct val="100000"/>
-              </a:lnSpc>
-              <a:spcBef>
-                <a:spcPct val="0"/>
-              </a:spcBef>
-              <a:spcAft>
-                <a:spcPct val="0"/>
-              </a:spcAft>
-              <a:buFontTx/>
-              <a:buChar char="•"/>
-            </a:pPr>
-            <a:endParaRPr kumimoji="0" lang="pt-BR" altLang="pt-BR" sz="2400" b="0" i="0" u="none" strike="noStrike" cap="none" normalizeH="0" baseline="0" dirty="0">
-              <a:ln>
-                <a:noFill/>
-              </a:ln>
-              <a:solidFill>
-                <a:schemeClr val="tx1"/>
-              </a:solidFill>
-              <a:effectLst/>
+              <a:t>Multiprocessing</a:t>
+            </a:r>
+            <a:endParaRPr lang="pt-BR" sz="2400" b="1" dirty="0">
               <a:latin typeface="Google Sans Text"/>
             </a:endParaRPr>
-          </a:p>
-          <a:p>
-            <a:pPr marL="0" indent="0" eaLnBrk="0" fontAlgn="base" hangingPunct="0">
-              <a:lnSpc>
-                <a:spcPct val="100000"/>
-              </a:lnSpc>
-              <a:spcBef>
-                <a:spcPct val="0"/>
-              </a:spcBef>
-              <a:spcAft>
-                <a:spcPct val="0"/>
-              </a:spcAft>
-              <a:buFontTx/>
-              <a:buChar char="•"/>
-            </a:pPr>
-            <a:r>
-              <a:rPr lang="pt-BR" altLang="pt-BR" sz="2400" b="1" dirty="0">
-                <a:latin typeface="Google Sans Text"/>
-              </a:rPr>
-              <a:t>Overhead do Interpretador </a:t>
-            </a:r>
-            <a:r>
-              <a:rPr lang="pt-BR" altLang="pt-BR" sz="2400" dirty="0">
-                <a:latin typeface="Google Sans Text"/>
-              </a:rPr>
-              <a:t>(</a:t>
-            </a:r>
-            <a:r>
-              <a:rPr lang="pt-BR" altLang="pt-BR" sz="2400" dirty="0" err="1">
-                <a:latin typeface="Google Sans Text"/>
-              </a:rPr>
-              <a:t>CPython</a:t>
-            </a:r>
-            <a:r>
-              <a:rPr lang="pt-BR" altLang="pt-BR" sz="2400" dirty="0">
-                <a:latin typeface="Google Sans Text"/>
-              </a:rPr>
-              <a:t>):</a:t>
-            </a:r>
           </a:p>
           <a:p>
             <a:pPr marL="457200" lvl="1" indent="0" eaLnBrk="0" fontAlgn="base" hangingPunct="0">
@@ -5568,95 +5909,25 @@
               <a:buChar char="•"/>
             </a:pPr>
             <a:r>
-              <a:rPr lang="pt-BR" altLang="pt-BR" sz="2000" dirty="0">
+              <a:rPr lang="pt-BR" sz="2000" dirty="0">
                 <a:latin typeface="Google Sans Text"/>
               </a:rPr>
-              <a:t> Os tempos brutos refletem não apenas o algoritmo, mas as limitações da linguagem: tipagem dinâmica, custo do </a:t>
-            </a:r>
-            <a:r>
-              <a:rPr lang="pt-BR" altLang="pt-BR" sz="2000" i="1" dirty="0" err="1">
+              <a:t> A varredura iterativa implementada (DFS via pilha) processou rapidamente os registros por operar essencialmente na RAM, e novamente o </a:t>
+            </a:r>
+            <a:r>
+              <a:rPr lang="pt-BR" sz="2000" dirty="0" err="1">
                 <a:latin typeface="Google Sans Text"/>
               </a:rPr>
-              <a:t>call</a:t>
-            </a:r>
-            <a:r>
-              <a:rPr lang="pt-BR" altLang="pt-BR" sz="2000" i="1" dirty="0">
+              <a:t>Multiprocessing</a:t>
+            </a:r>
+            <a:r>
+              <a:rPr lang="pt-BR" sz="2000" dirty="0">
                 <a:latin typeface="Google Sans Text"/>
               </a:rPr>
-              <a:t> </a:t>
-            </a:r>
-            <a:r>
-              <a:rPr lang="pt-BR" altLang="pt-BR" sz="2000" i="1" dirty="0" err="1">
-                <a:latin typeface="Google Sans Text"/>
-              </a:rPr>
-              <a:t>stack</a:t>
-            </a:r>
-            <a:r>
-              <a:rPr lang="pt-BR" altLang="pt-BR" sz="2000" i="1" dirty="0">
-                <a:latin typeface="Google Sans Text"/>
-              </a:rPr>
-              <a:t> </a:t>
-            </a:r>
-            <a:r>
-              <a:rPr lang="pt-BR" altLang="pt-BR" sz="2000" dirty="0">
-                <a:latin typeface="Google Sans Text"/>
-              </a:rPr>
-              <a:t>(recursão profunda) e laços interpretados.</a:t>
-            </a:r>
-          </a:p>
-          <a:p>
-            <a:pPr marL="457200" lvl="1" indent="0" eaLnBrk="0" fontAlgn="base" hangingPunct="0">
-              <a:lnSpc>
-                <a:spcPct val="100000"/>
-              </a:lnSpc>
-              <a:spcBef>
-                <a:spcPct val="0"/>
-              </a:spcBef>
-              <a:spcAft>
-                <a:spcPct val="0"/>
-              </a:spcAft>
-              <a:buFontTx/>
-              <a:buChar char="•"/>
-            </a:pPr>
-            <a:r>
-              <a:rPr lang="pt-BR" altLang="pt-BR" sz="2000" dirty="0">
-                <a:latin typeface="Google Sans Text"/>
-              </a:rPr>
-              <a:t> O </a:t>
-            </a:r>
-            <a:r>
-              <a:rPr lang="pt-BR" altLang="pt-BR" sz="2000" dirty="0" err="1">
-                <a:latin typeface="Google Sans Text"/>
-              </a:rPr>
-              <a:t>list.sort</a:t>
-            </a:r>
-            <a:r>
-              <a:rPr lang="pt-BR" altLang="pt-BR" sz="2000" dirty="0">
-                <a:latin typeface="Google Sans Text"/>
-              </a:rPr>
-              <a:t>() nativo (</a:t>
-            </a:r>
-            <a:r>
-              <a:rPr lang="pt-BR" altLang="pt-BR" sz="2000" dirty="0" err="1">
-                <a:latin typeface="Google Sans Text"/>
-              </a:rPr>
-              <a:t>Timsort</a:t>
-            </a:r>
-            <a:r>
-              <a:rPr lang="pt-BR" altLang="pt-BR" sz="2000" dirty="0">
-                <a:latin typeface="Google Sans Text"/>
-              </a:rPr>
-              <a:t>) é exponencialmente mais rápido por ser compilado em C, delegando operações diretamente ao hardware.</a:t>
-            </a:r>
-            <a:endParaRPr kumimoji="0" lang="pt-BR" altLang="pt-BR" sz="1800" b="0" i="0" u="none" strike="noStrike" cap="none" normalizeH="0" baseline="0" dirty="0">
-              <a:ln>
-                <a:noFill/>
-              </a:ln>
-              <a:solidFill>
-                <a:schemeClr val="tx1"/>
-              </a:solidFill>
-              <a:effectLst/>
-              <a:latin typeface="Arial" panose="020B0604020202020204" pitchFamily="34" charset="0"/>
+              <a:t> causou regressão severa pelos custos de serialização e IPC</a:t>
+            </a:r>
+            <a:endParaRPr lang="pt-BR" altLang="pt-BR" sz="2000" dirty="0">
+              <a:latin typeface="Google Sans Text"/>
             </a:endParaRPr>
           </a:p>
         </p:txBody>
@@ -5805,7 +6076,7 @@
 </p:sld>
 </file>
 
-<file path=ppt/slides/slide14.xml><?xml version="1.0" encoding="utf-8"?>
+<file path=ppt/slides/slide15.xml><?xml version="1.0" encoding="utf-8"?>
 <p:sld xmlns:a="http://schemas.openxmlformats.org/drawingml/2006/main" xmlns:r="http://schemas.openxmlformats.org/officeDocument/2006/relationships" xmlns:p="http://schemas.openxmlformats.org/presentationml/2006/main">
   <p:cSld>
     <p:spTree>
@@ -5828,6 +6099,43 @@
           <a:chExt cx="0" cy="0"/>
         </a:xfrm>
       </p:grpSpPr>
+      <p:sp>
+        <p:nvSpPr>
+          <p:cNvPr id="16" name="Título 1">
+            <a:extLst>
+              <a:ext uri="{FF2B5EF4-FFF2-40B4-BE49-F238E27FC236}">
+                <a16:creationId xmlns:a16="http://schemas.microsoft.com/office/drawing/2014/main" id="{B1E829A6-DEDD-FB0A-ECB6-BAFBC1D5EEE1}"/>
+              </a:ext>
+            </a:extLst>
+          </p:cNvPr>
+          <p:cNvSpPr>
+            <a:spLocks noGrp="1"/>
+          </p:cNvSpPr>
+          <p:nvPr>
+            <p:ph type="title"/>
+          </p:nvPr>
+        </p:nvSpPr>
+        <p:spPr>
+          <a:xfrm>
+            <a:off x="474860" y="1162843"/>
+            <a:ext cx="10515600" cy="1325563"/>
+          </a:xfrm>
+        </p:spPr>
+        <p:txBody>
+          <a:bodyPr>
+            <a:normAutofit/>
+          </a:bodyPr>
+          <a:lstStyle/>
+          <a:p>
+            <a:r>
+              <a:rPr lang="pt-BR" sz="2800" b="1" dirty="0">
+                <a:latin typeface="+mn-lt"/>
+              </a:rPr>
+              <a:t>Considerações Finais e Alternativas Híbridas </a:t>
+            </a:r>
+          </a:p>
+        </p:txBody>
+      </p:sp>
       <p:pic>
         <p:nvPicPr>
           <p:cNvPr id="5" name="Imagem 4">
@@ -6040,8 +6348,8 @@
         </p:nvSpPr>
         <p:spPr bwMode="auto">
           <a:xfrm>
-            <a:off x="838200" y="2248959"/>
-            <a:ext cx="10515600" cy="3908762"/>
+            <a:off x="838200" y="2455939"/>
+            <a:ext cx="10515600" cy="3494803"/>
           </a:xfrm>
           <a:prstGeom prst="rect">
             <a:avLst/>
@@ -6089,326 +6397,142 @@
           </a:bodyPr>
           <a:lstStyle/>
           <a:p>
-            <a:pPr marL="0" indent="0" eaLnBrk="0" fontAlgn="base" hangingPunct="0">
-              <a:lnSpc>
-                <a:spcPct val="100000"/>
-              </a:lnSpc>
-              <a:spcBef>
-                <a:spcPct val="0"/>
-              </a:spcBef>
-              <a:spcAft>
-                <a:spcPct val="0"/>
-              </a:spcAft>
-              <a:buFontTx/>
-              <a:buChar char="•"/>
-            </a:pPr>
-            <a:r>
-              <a:rPr kumimoji="0" lang="pt-BR" altLang="pt-BR" sz="2400" b="1" i="0" u="none" strike="noStrike" cap="none" normalizeH="0" baseline="0" dirty="0">
-                <a:ln>
-                  <a:noFill/>
-                </a:ln>
-                <a:solidFill>
-                  <a:schemeClr val="tx1"/>
-                </a:solidFill>
-                <a:effectLst/>
+            <a:pPr lvl="0"/>
+            <a:r>
+              <a:rPr lang="pt-BR" sz="2000" dirty="0">
                 <a:latin typeface="Google Sans Text"/>
               </a:rPr>
-              <a:t>Validação Teórica:</a:t>
-            </a:r>
-            <a:r>
-              <a:rPr kumimoji="0" lang="pt-BR" altLang="pt-BR" sz="2400" b="0" i="0" u="none" strike="noStrike" cap="none" normalizeH="0" baseline="0" dirty="0">
-                <a:ln>
-                  <a:noFill/>
-                </a:ln>
-                <a:solidFill>
-                  <a:schemeClr val="tx1"/>
-                </a:solidFill>
-                <a:effectLst/>
+              <a:t>Para </a:t>
+            </a:r>
+            <a:r>
+              <a:rPr lang="pt-BR" sz="2000" b="1" dirty="0">
                 <a:latin typeface="Google Sans Text"/>
               </a:rPr>
-              <a:t> Os experimentos corroboram a teoria matemática; algoritmos O(n</a:t>
-            </a:r>
-            <a:r>
-              <a:rPr kumimoji="0" lang="pt-BR" altLang="pt-BR" sz="2400" b="0" i="0" u="none" strike="noStrike" cap="none" normalizeH="0" baseline="30000" dirty="0">
-                <a:ln>
-                  <a:noFill/>
-                </a:ln>
-                <a:solidFill>
-                  <a:schemeClr val="tx1"/>
-                </a:solidFill>
-                <a:effectLst/>
+              <a:t>cenários produtivos </a:t>
+            </a:r>
+            <a:r>
+              <a:rPr lang="pt-BR" sz="2000" dirty="0">
                 <a:latin typeface="Google Sans Text"/>
               </a:rPr>
-              <a:t>2</a:t>
-            </a:r>
-            <a:r>
-              <a:rPr kumimoji="0" lang="pt-BR" altLang="pt-BR" sz="2400" b="0" i="0" u="none" strike="noStrike" cap="none" normalizeH="0" baseline="0" dirty="0">
-                <a:ln>
-                  <a:noFill/>
-                </a:ln>
-                <a:solidFill>
-                  <a:schemeClr val="tx1"/>
-                </a:solidFill>
-                <a:effectLst/>
+              <a:t>reais:</a:t>
+            </a:r>
+          </a:p>
+          <a:p>
+            <a:pPr lvl="1"/>
+            <a:r>
+              <a:rPr lang="pt-BR" sz="2000" dirty="0">
                 <a:latin typeface="Google Sans Text"/>
               </a:rPr>
-              <a:t>) sofrem degradação drástica em instâncias massivas.</a:t>
-            </a:r>
-          </a:p>
-          <a:p>
-            <a:pPr marL="0" indent="0" eaLnBrk="0" fontAlgn="base" hangingPunct="0">
-              <a:lnSpc>
-                <a:spcPct val="100000"/>
-              </a:lnSpc>
-              <a:spcBef>
-                <a:spcPct val="0"/>
-              </a:spcBef>
-              <a:spcAft>
-                <a:spcPct val="0"/>
-              </a:spcAft>
-              <a:buFontTx/>
-              <a:buChar char="•"/>
-            </a:pPr>
-            <a:endParaRPr kumimoji="0" lang="pt-BR" altLang="pt-BR" sz="2400" b="0" i="0" u="none" strike="noStrike" cap="none" normalizeH="0" baseline="0" dirty="0">
-              <a:ln>
-                <a:noFill/>
-              </a:ln>
-              <a:solidFill>
-                <a:schemeClr val="tx1"/>
-              </a:solidFill>
-              <a:effectLst/>
+              <a:t> Varreduras O(N) são ineficientes em alta escala. </a:t>
+            </a:r>
+          </a:p>
+          <a:p>
+            <a:pPr lvl="2"/>
+            <a:r>
+              <a:rPr lang="pt-BR" dirty="0">
+                <a:latin typeface="Google Sans Text"/>
+              </a:rPr>
+              <a:t>A melhor solução arquitetural é associar a árvore a Índices Secundários baseados em </a:t>
+            </a:r>
+            <a:r>
+              <a:rPr lang="pt-BR" dirty="0" err="1">
+                <a:latin typeface="Google Sans Text"/>
+              </a:rPr>
+              <a:t>Hash</a:t>
+            </a:r>
+            <a:r>
+              <a:rPr lang="pt-BR" dirty="0">
+                <a:latin typeface="Google Sans Text"/>
+              </a:rPr>
+              <a:t> Maps (dicionários com custo O(1))</a:t>
+            </a:r>
+          </a:p>
+          <a:p>
+            <a:pPr lvl="0"/>
+            <a:r>
+              <a:rPr lang="pt-BR" sz="2000" dirty="0">
+                <a:latin typeface="Google Sans Text"/>
+              </a:rPr>
+              <a:t>A </a:t>
+            </a:r>
+            <a:r>
+              <a:rPr lang="pt-BR" sz="2000" b="1" dirty="0">
+                <a:latin typeface="Google Sans Text"/>
+              </a:rPr>
+              <a:t>eficiência algorítmica </a:t>
+            </a:r>
+            <a:r>
+              <a:rPr lang="pt-BR" sz="2000" dirty="0">
+                <a:latin typeface="Google Sans Text"/>
+              </a:rPr>
+              <a:t>depende da </a:t>
+            </a:r>
+            <a:r>
+              <a:rPr lang="pt-BR" sz="2000" b="1" dirty="0">
+                <a:latin typeface="Google Sans Text"/>
+              </a:rPr>
+              <a:t>metodologia</a:t>
+            </a:r>
+            <a:r>
+              <a:rPr lang="pt-BR" sz="2000" dirty="0">
+                <a:latin typeface="Google Sans Text"/>
+              </a:rPr>
+              <a:t> aplicada e também da </a:t>
+            </a:r>
+            <a:r>
+              <a:rPr lang="pt-BR" sz="2000" b="1" dirty="0">
+                <a:latin typeface="Google Sans Text"/>
+              </a:rPr>
+              <a:t>entropia dos dados </a:t>
+            </a:r>
+            <a:r>
+              <a:rPr lang="pt-BR" sz="2000" dirty="0">
+                <a:latin typeface="Google Sans Text"/>
+              </a:rPr>
+              <a:t>e de </a:t>
+            </a:r>
+            <a:r>
+              <a:rPr lang="pt-BR" sz="2000" u="sng" dirty="0">
+                <a:latin typeface="Google Sans Text"/>
+              </a:rPr>
+              <a:t>custos ocultos do ambiente</a:t>
+            </a:r>
+            <a:r>
+              <a:rPr lang="pt-BR" sz="2000" dirty="0">
+                <a:latin typeface="Google Sans Text"/>
+              </a:rPr>
+              <a:t>.</a:t>
+            </a:r>
+          </a:p>
+          <a:p>
+            <a:pPr lvl="0"/>
+            <a:r>
+              <a:rPr lang="pt-BR" sz="2000" dirty="0">
+                <a:latin typeface="Google Sans Text"/>
+              </a:rPr>
+              <a:t>A força bruta computacional não substitui o </a:t>
+            </a:r>
+            <a:r>
+              <a:rPr lang="pt-BR" sz="2000" b="1" dirty="0">
+                <a:latin typeface="Google Sans Text"/>
+              </a:rPr>
+              <a:t>planejamento matemático algorítmico</a:t>
+            </a:r>
+          </a:p>
+          <a:p>
+            <a:pPr lvl="1"/>
+            <a:r>
+              <a:rPr lang="pt-BR" sz="2000" dirty="0">
+                <a:latin typeface="Google Sans Text"/>
+              </a:rPr>
+              <a:t>Paralelizar processos ineficientes pode atenuar o problema, mas não corrige a ineficiência intrínseca</a:t>
+            </a:r>
+          </a:p>
+          <a:p>
+            <a:pPr lvl="0"/>
+            <a:endParaRPr lang="pt-BR" sz="2400" dirty="0">
               <a:latin typeface="Google Sans Text"/>
             </a:endParaRPr>
-          </a:p>
-          <a:p>
-            <a:pPr marL="0" lvl="0" indent="0" eaLnBrk="0" fontAlgn="base" hangingPunct="0">
-              <a:lnSpc>
-                <a:spcPct val="100000"/>
-              </a:lnSpc>
-              <a:spcBef>
-                <a:spcPct val="0"/>
-              </a:spcBef>
-              <a:spcAft>
-                <a:spcPct val="0"/>
-              </a:spcAft>
-              <a:buFontTx/>
-              <a:buChar char="•"/>
-            </a:pPr>
-            <a:r>
-              <a:rPr kumimoji="0" lang="pt-BR" altLang="pt-BR" sz="2400" b="1" i="0" u="none" strike="noStrike" cap="none" normalizeH="0" baseline="0" dirty="0">
-                <a:ln>
-                  <a:noFill/>
-                </a:ln>
-                <a:solidFill>
-                  <a:schemeClr val="tx1"/>
-                </a:solidFill>
-                <a:effectLst/>
-                <a:latin typeface="Google Sans Text"/>
-              </a:rPr>
-              <a:t>A Escolha Pragmática:</a:t>
-            </a:r>
-            <a:r>
-              <a:rPr kumimoji="0" lang="pt-BR" altLang="pt-BR" sz="2400" b="0" i="0" u="none" strike="noStrike" cap="none" normalizeH="0" baseline="0" dirty="0">
-                <a:ln>
-                  <a:noFill/>
-                </a:ln>
-                <a:solidFill>
-                  <a:schemeClr val="tx1"/>
-                </a:solidFill>
-                <a:effectLst/>
-                <a:latin typeface="Google Sans Text"/>
-              </a:rPr>
-              <a:t> A decisão arquitetural não deve se basear apenas na classe </a:t>
-            </a:r>
-            <a:r>
-              <a:rPr kumimoji="0" lang="pt-BR" altLang="pt-BR" sz="2400" b="0" i="0" u="none" strike="noStrike" cap="none" normalizeH="0" baseline="0" dirty="0" err="1">
-                <a:ln>
-                  <a:noFill/>
-                </a:ln>
-                <a:solidFill>
-                  <a:schemeClr val="tx1"/>
-                </a:solidFill>
-                <a:effectLst/>
-                <a:latin typeface="Google Sans Text"/>
-              </a:rPr>
-              <a:t>Big-O</a:t>
-            </a:r>
-            <a:r>
-              <a:rPr kumimoji="0" lang="pt-BR" altLang="pt-BR" sz="2400" b="0" i="0" u="none" strike="noStrike" cap="none" normalizeH="0" baseline="0" dirty="0">
-                <a:ln>
-                  <a:noFill/>
-                </a:ln>
-                <a:solidFill>
-                  <a:schemeClr val="tx1"/>
-                </a:solidFill>
-                <a:effectLst/>
-                <a:latin typeface="Google Sans Text"/>
-              </a:rPr>
-              <a:t>, mas exige a ponderação de:</a:t>
-            </a:r>
-          </a:p>
-          <a:p>
-            <a:pPr marL="457200" lvl="1" indent="0" eaLnBrk="0" fontAlgn="base" hangingPunct="0">
-              <a:lnSpc>
-                <a:spcPct val="100000"/>
-              </a:lnSpc>
-              <a:spcBef>
-                <a:spcPct val="0"/>
-              </a:spcBef>
-              <a:spcAft>
-                <a:spcPct val="0"/>
-              </a:spcAft>
-              <a:buFontTx/>
-              <a:buAutoNum type="arabicPeriod"/>
-            </a:pPr>
-            <a:r>
-              <a:rPr lang="pt-BR" altLang="pt-BR" sz="2000" b="1" dirty="0">
-                <a:latin typeface="Google Sans Text"/>
-              </a:rPr>
-              <a:t>Estabilidade</a:t>
-            </a:r>
-            <a:r>
-              <a:rPr lang="pt-BR" altLang="pt-BR" sz="2000" dirty="0">
-                <a:latin typeface="Google Sans Text"/>
-              </a:rPr>
-              <a:t>: Preservação do histórico de dados.</a:t>
-            </a:r>
-          </a:p>
-          <a:p>
-            <a:pPr marL="457200" lvl="1" indent="0" eaLnBrk="0" fontAlgn="base" hangingPunct="0">
-              <a:lnSpc>
-                <a:spcPct val="100000"/>
-              </a:lnSpc>
-              <a:spcBef>
-                <a:spcPct val="0"/>
-              </a:spcBef>
-              <a:spcAft>
-                <a:spcPct val="0"/>
-              </a:spcAft>
-              <a:buFontTx/>
-              <a:buAutoNum type="arabicPeriod" startAt="2"/>
-            </a:pPr>
-            <a:r>
-              <a:rPr lang="pt-BR" altLang="pt-BR" sz="2000" b="1" dirty="0">
-                <a:latin typeface="Google Sans Text"/>
-              </a:rPr>
-              <a:t>Complexidade Espacial</a:t>
-            </a:r>
-            <a:r>
-              <a:rPr lang="pt-BR" altLang="pt-BR" sz="2000" dirty="0">
-                <a:latin typeface="Google Sans Text"/>
-              </a:rPr>
-              <a:t>: Economia de memória x velocidade de processamento.</a:t>
-            </a:r>
-          </a:p>
-          <a:p>
-            <a:pPr marL="457200" lvl="1" indent="0" eaLnBrk="0" fontAlgn="base" hangingPunct="0">
-              <a:lnSpc>
-                <a:spcPct val="100000"/>
-              </a:lnSpc>
-              <a:spcBef>
-                <a:spcPct val="0"/>
-              </a:spcBef>
-              <a:spcAft>
-                <a:spcPct val="0"/>
-              </a:spcAft>
-              <a:buFontTx/>
-              <a:buAutoNum type="arabicPeriod" startAt="3"/>
-            </a:pPr>
-            <a:r>
-              <a:rPr lang="pt-BR" altLang="pt-BR" sz="2000" b="1" dirty="0">
-                <a:latin typeface="Google Sans Text"/>
-              </a:rPr>
-              <a:t>Sensibilidade Topológica</a:t>
-            </a:r>
-            <a:r>
-              <a:rPr lang="pt-BR" altLang="pt-BR" sz="2000" dirty="0">
-                <a:latin typeface="Google Sans Text"/>
-              </a:rPr>
-              <a:t>: Comportamento diante da ordenação prévia dos dados.</a:t>
-            </a:r>
-          </a:p>
-          <a:p>
-            <a:pPr marL="457200" lvl="1" indent="0" eaLnBrk="0" fontAlgn="base" hangingPunct="0">
-              <a:lnSpc>
-                <a:spcPct val="100000"/>
-              </a:lnSpc>
-              <a:spcBef>
-                <a:spcPct val="0"/>
-              </a:spcBef>
-              <a:spcAft>
-                <a:spcPct val="0"/>
-              </a:spcAft>
-              <a:buFontTx/>
-              <a:buAutoNum type="arabicPeriod" startAt="3"/>
-            </a:pPr>
-            <a:endParaRPr lang="pt-BR" altLang="pt-BR" sz="2000" dirty="0">
-              <a:latin typeface="Google Sans Text"/>
-            </a:endParaRPr>
-          </a:p>
-          <a:p>
-            <a:pPr marL="0" indent="0" eaLnBrk="0" fontAlgn="base" hangingPunct="0">
-              <a:lnSpc>
-                <a:spcPct val="100000"/>
-              </a:lnSpc>
-              <a:spcBef>
-                <a:spcPct val="0"/>
-              </a:spcBef>
-              <a:spcAft>
-                <a:spcPct val="0"/>
-              </a:spcAft>
-              <a:buFontTx/>
-              <a:buAutoNum type="arabicPeriod" startAt="3"/>
-            </a:pPr>
-            <a:r>
-              <a:rPr lang="pt-BR" altLang="pt-BR" sz="2400" b="1" dirty="0">
-                <a:latin typeface="Google Sans Text"/>
-              </a:rPr>
-              <a:t>Síntese: </a:t>
-            </a:r>
-            <a:r>
-              <a:rPr lang="pt-BR" altLang="pt-BR" sz="2400" dirty="0">
-                <a:latin typeface="Google Sans Text"/>
-              </a:rPr>
-              <a:t>A análise formal de algoritmos é uma ferramenta pragmática e essencial para a construção de sistemas escaláveis e verdadeiramente otimizados.</a:t>
-            </a:r>
-          </a:p>
-        </p:txBody>
-      </p:sp>
-      <p:sp>
-        <p:nvSpPr>
-          <p:cNvPr id="16" name="Título 1">
-            <a:extLst>
-              <a:ext uri="{FF2B5EF4-FFF2-40B4-BE49-F238E27FC236}">
-                <a16:creationId xmlns:a16="http://schemas.microsoft.com/office/drawing/2014/main" id="{B1E829A6-DEDD-FB0A-ECB6-BAFBC1D5EEE1}"/>
-              </a:ext>
-            </a:extLst>
-          </p:cNvPr>
-          <p:cNvSpPr>
-            <a:spLocks noGrp="1"/>
-          </p:cNvSpPr>
-          <p:nvPr>
-            <p:ph type="title"/>
-          </p:nvPr>
-        </p:nvSpPr>
-        <p:spPr>
-          <a:xfrm>
-            <a:off x="474860" y="1162843"/>
-            <a:ext cx="10515600" cy="1325563"/>
-          </a:xfrm>
-        </p:spPr>
-        <p:txBody>
-          <a:bodyPr>
-            <a:normAutofit/>
-          </a:bodyPr>
-          <a:lstStyle/>
-          <a:p>
-            <a:r>
-              <a:rPr lang="pt-BR" sz="2800" b="1" dirty="0">
-                <a:latin typeface="+mn-lt"/>
-              </a:rPr>
-              <a:t>Considerações Finais e Engenharia de Software</a:t>
-            </a:r>
           </a:p>
         </p:txBody>
       </p:sp>
@@ -6425,7 +6549,7 @@
 </p:sld>
 </file>
 
-<file path=ppt/slides/slide15.xml><?xml version="1.0" encoding="utf-8"?>
+<file path=ppt/slides/slide16.xml><?xml version="1.0" encoding="utf-8"?>
 <p:sld xmlns:a="http://schemas.openxmlformats.org/drawingml/2006/main" xmlns:r="http://schemas.openxmlformats.org/officeDocument/2006/relationships" xmlns:p="http://schemas.openxmlformats.org/presentationml/2006/main">
   <p:cSld>
     <p:spTree>
@@ -7284,8 +7408,8 @@
         </p:nvSpPr>
         <p:spPr bwMode="auto">
           <a:xfrm>
-            <a:off x="949720" y="2107438"/>
-            <a:ext cx="10515600" cy="4524315"/>
+            <a:off x="949720" y="2292103"/>
+            <a:ext cx="10515600" cy="4154984"/>
           </a:xfrm>
           <a:prstGeom prst="rect">
             <a:avLst/>
@@ -7373,7 +7497,7 @@
             </a:pPr>
             <a:r>
               <a:rPr lang="pt-BR" dirty="0"/>
-              <a:t>A eficiência das estruturas de dados na prática é influenciada não apenas pelo limite matemático teórico, mas pela entropia dos dados de entrada e pelo custo oculto do ambiente de execução</a:t>
+              <a:t> Avaliar o impacto das árvores de pesquisa e da topologia prévia dos dados no tempo de execução/inserção</a:t>
             </a:r>
           </a:p>
           <a:p>
@@ -7390,10 +7514,7 @@
               <a:buFontTx/>
               <a:buChar char="•"/>
             </a:pPr>
-            <a:endParaRPr lang="pt-BR" altLang="pt-BR" b="1" dirty="0">
-              <a:ea typeface="+mj-ea"/>
-              <a:cs typeface="+mj-cs"/>
-            </a:endParaRPr>
+            <a:endParaRPr lang="pt-BR" dirty="0"/>
           </a:p>
           <a:p>
             <a:pPr marL="0" marR="0" lvl="0" indent="0" algn="l" defTabSz="914400" rtl="0" eaLnBrk="0" fontAlgn="base" latinLnBrk="0" hangingPunct="0">
@@ -7443,7 +7564,7 @@
             </a:r>
             <a:r>
               <a:rPr lang="pt-BR" dirty="0"/>
-              <a:t>Executar testes de benchmarking para quantificar o impacto da paralelização e da topologia dos dados sobre o tempo de busca em árvores de pesquisa</a:t>
+              <a:t>Executar testes de benchmarking para quantificar o impacto das árvores de pesquisa e da topologia prévia dos dados</a:t>
             </a:r>
           </a:p>
           <a:p>
@@ -7460,13 +7581,10 @@
               <a:buFontTx/>
               <a:buChar char="•"/>
             </a:pPr>
-            <a:endParaRPr lang="pt-BR" altLang="pt-BR" b="1" dirty="0">
-              <a:ea typeface="+mj-ea"/>
-              <a:cs typeface="+mj-cs"/>
-            </a:endParaRPr>
-          </a:p>
-          <a:p>
-            <a:pPr marL="0" marR="0" lvl="0" indent="0" algn="l" defTabSz="914400" rtl="0" eaLnBrk="0" fontAlgn="base" latinLnBrk="0" hangingPunct="0">
+            <a:endParaRPr lang="pt-BR" dirty="0"/>
+          </a:p>
+          <a:p>
+            <a:pPr marL="0" lvl="0" indent="0" eaLnBrk="0" fontAlgn="base" hangingPunct="0">
               <a:lnSpc>
                 <a:spcPct val="100000"/>
               </a:lnSpc>
@@ -7476,11 +7594,8 @@
               <a:spcAft>
                 <a:spcPct val="0"/>
               </a:spcAft>
-              <a:buClrTx/>
-              <a:buSzTx/>
               <a:buFontTx/>
               <a:buChar char="•"/>
-              <a:tabLst/>
             </a:pPr>
             <a:r>
               <a:rPr lang="pt-BR" altLang="pt-BR" sz="2400" b="1" dirty="0">
@@ -8984,6 +9099,309 @@
         <p:cNvPr id="1" name="">
           <a:extLst>
             <a:ext uri="{FF2B5EF4-FFF2-40B4-BE49-F238E27FC236}">
+              <a16:creationId xmlns:a16="http://schemas.microsoft.com/office/drawing/2014/main" id="{AD7E254D-7C30-226F-46B1-60A90E756696}"/>
+            </a:ext>
+          </a:extLst>
+        </p:cNvPr>
+        <p:cNvGrpSpPr/>
+        <p:nvPr/>
+      </p:nvGrpSpPr>
+      <p:grpSpPr>
+        <a:xfrm>
+          <a:off x="0" y="0"/>
+          <a:ext cx="0" cy="0"/>
+          <a:chOff x="0" y="0"/>
+          <a:chExt cx="0" cy="0"/>
+        </a:xfrm>
+      </p:grpSpPr>
+      <p:pic>
+        <p:nvPicPr>
+          <p:cNvPr id="5" name="Imagem 4">
+            <a:extLst>
+              <a:ext uri="{FF2B5EF4-FFF2-40B4-BE49-F238E27FC236}">
+                <a16:creationId xmlns:a16="http://schemas.microsoft.com/office/drawing/2014/main" id="{C1C31EDC-F49A-C0AA-82CF-57499F4C0E9A}"/>
+              </a:ext>
+            </a:extLst>
+          </p:cNvPr>
+          <p:cNvPicPr>
+            <a:picLocks noChangeAspect="1"/>
+          </p:cNvPicPr>
+          <p:nvPr/>
+        </p:nvPicPr>
+        <p:blipFill>
+          <a:blip r:embed="rId2"/>
+          <a:stretch>
+            <a:fillRect/>
+          </a:stretch>
+        </p:blipFill>
+        <p:spPr>
+          <a:xfrm>
+            <a:off x="0" y="0"/>
+            <a:ext cx="12192000" cy="1398060"/>
+          </a:xfrm>
+          <a:prstGeom prst="rect">
+            <a:avLst/>
+          </a:prstGeom>
+        </p:spPr>
+      </p:pic>
+      <p:grpSp>
+        <p:nvGrpSpPr>
+          <p:cNvPr id="10" name="Agrupar 9">
+            <a:extLst>
+              <a:ext uri="{FF2B5EF4-FFF2-40B4-BE49-F238E27FC236}">
+                <a16:creationId xmlns:a16="http://schemas.microsoft.com/office/drawing/2014/main" id="{737DE06F-78E9-42EF-F7B2-BD4FDF6616EE}"/>
+              </a:ext>
+            </a:extLst>
+          </p:cNvPr>
+          <p:cNvGrpSpPr/>
+          <p:nvPr/>
+        </p:nvGrpSpPr>
+        <p:grpSpPr>
+          <a:xfrm>
+            <a:off x="4739781" y="3585812"/>
+            <a:ext cx="7452219" cy="3272188"/>
+            <a:chOff x="4739781" y="3585812"/>
+            <a:chExt cx="7452219" cy="3272188"/>
+          </a:xfrm>
+        </p:grpSpPr>
+        <p:pic>
+          <p:nvPicPr>
+            <p:cNvPr id="7" name="Imagem 6">
+              <a:extLst>
+                <a:ext uri="{FF2B5EF4-FFF2-40B4-BE49-F238E27FC236}">
+                  <a16:creationId xmlns:a16="http://schemas.microsoft.com/office/drawing/2014/main" id="{837EF829-EABB-20FA-D9BF-B2774A6A87C3}"/>
+                </a:ext>
+              </a:extLst>
+            </p:cNvPr>
+            <p:cNvPicPr>
+              <a:picLocks noChangeAspect="1"/>
+            </p:cNvPicPr>
+            <p:nvPr/>
+          </p:nvPicPr>
+          <p:blipFill>
+            <a:blip r:embed="rId3"/>
+            <a:stretch>
+              <a:fillRect/>
+            </a:stretch>
+          </p:blipFill>
+          <p:spPr>
+            <a:xfrm>
+              <a:off x="5492514" y="4013377"/>
+              <a:ext cx="6699486" cy="2844623"/>
+            </a:xfrm>
+            <a:prstGeom prst="rect">
+              <a:avLst/>
+            </a:prstGeom>
+            <a:effectLst>
+              <a:outerShdw blurRad="50800" dist="50800" dir="5400000" algn="ctr" rotWithShape="0">
+                <a:srgbClr val="000000"/>
+              </a:outerShdw>
+            </a:effectLst>
+          </p:spPr>
+        </p:pic>
+        <p:sp>
+          <p:nvSpPr>
+            <p:cNvPr id="8" name="Retângulo 7">
+              <a:extLst>
+                <a:ext uri="{FF2B5EF4-FFF2-40B4-BE49-F238E27FC236}">
+                  <a16:creationId xmlns:a16="http://schemas.microsoft.com/office/drawing/2014/main" id="{19DC2AC7-9A42-0858-AE50-9DA8AC7EC297}"/>
+                </a:ext>
+              </a:extLst>
+            </p:cNvPr>
+            <p:cNvSpPr/>
+            <p:nvPr/>
+          </p:nvSpPr>
+          <p:spPr>
+            <a:xfrm>
+              <a:off x="4739781" y="4013377"/>
+              <a:ext cx="1104550" cy="2844623"/>
+            </a:xfrm>
+            <a:prstGeom prst="rect">
+              <a:avLst/>
+            </a:prstGeom>
+            <a:solidFill>
+              <a:schemeClr val="bg1"/>
+            </a:solidFill>
+            <a:ln>
+              <a:solidFill>
+                <a:schemeClr val="bg1"/>
+              </a:solidFill>
+            </a:ln>
+          </p:spPr>
+          <p:style>
+            <a:lnRef idx="2">
+              <a:schemeClr val="accent1">
+                <a:shade val="15000"/>
+              </a:schemeClr>
+            </a:lnRef>
+            <a:fillRef idx="1">
+              <a:schemeClr val="accent1"/>
+            </a:fillRef>
+            <a:effectRef idx="0">
+              <a:schemeClr val="accent1"/>
+            </a:effectRef>
+            <a:fontRef idx="minor">
+              <a:schemeClr val="lt1"/>
+            </a:fontRef>
+          </p:style>
+          <p:txBody>
+            <a:bodyPr rtlCol="0" anchor="ctr"/>
+            <a:lstStyle/>
+            <a:p>
+              <a:pPr algn="ctr"/>
+              <a:endParaRPr lang="pt-BR"/>
+            </a:p>
+          </p:txBody>
+        </p:sp>
+        <p:sp>
+          <p:nvSpPr>
+            <p:cNvPr id="9" name="Retângulo 8">
+              <a:extLst>
+                <a:ext uri="{FF2B5EF4-FFF2-40B4-BE49-F238E27FC236}">
+                  <a16:creationId xmlns:a16="http://schemas.microsoft.com/office/drawing/2014/main" id="{E2BFFAE3-6CCE-FA34-F823-E5E193AAA54F}"/>
+                </a:ext>
+              </a:extLst>
+            </p:cNvPr>
+            <p:cNvSpPr/>
+            <p:nvPr/>
+          </p:nvSpPr>
+          <p:spPr>
+            <a:xfrm>
+              <a:off x="5292056" y="3585812"/>
+              <a:ext cx="4453856" cy="1078467"/>
+            </a:xfrm>
+            <a:prstGeom prst="rect">
+              <a:avLst/>
+            </a:prstGeom>
+            <a:solidFill>
+              <a:schemeClr val="bg1"/>
+            </a:solidFill>
+            <a:ln>
+              <a:solidFill>
+                <a:schemeClr val="bg1"/>
+              </a:solidFill>
+            </a:ln>
+          </p:spPr>
+          <p:style>
+            <a:lnRef idx="2">
+              <a:schemeClr val="accent1">
+                <a:shade val="15000"/>
+              </a:schemeClr>
+            </a:lnRef>
+            <a:fillRef idx="1">
+              <a:schemeClr val="accent1"/>
+            </a:fillRef>
+            <a:effectRef idx="0">
+              <a:schemeClr val="accent1"/>
+            </a:effectRef>
+            <a:fontRef idx="minor">
+              <a:schemeClr val="lt1"/>
+            </a:fontRef>
+          </p:style>
+          <p:txBody>
+            <a:bodyPr rtlCol="0" anchor="ctr"/>
+            <a:lstStyle/>
+            <a:p>
+              <a:pPr algn="ctr"/>
+              <a:endParaRPr lang="pt-BR"/>
+            </a:p>
+          </p:txBody>
+        </p:sp>
+      </p:grpSp>
+      <p:sp>
+        <p:nvSpPr>
+          <p:cNvPr id="16" name="Título 1">
+            <a:extLst>
+              <a:ext uri="{FF2B5EF4-FFF2-40B4-BE49-F238E27FC236}">
+                <a16:creationId xmlns:a16="http://schemas.microsoft.com/office/drawing/2014/main" id="{29EF4A97-8977-0649-CE9B-D87987B28823}"/>
+              </a:ext>
+            </a:extLst>
+          </p:cNvPr>
+          <p:cNvSpPr>
+            <a:spLocks noGrp="1"/>
+          </p:cNvSpPr>
+          <p:nvPr>
+            <p:ph type="title"/>
+          </p:nvPr>
+        </p:nvSpPr>
+        <p:spPr>
+          <a:xfrm>
+            <a:off x="305479" y="902711"/>
+            <a:ext cx="10515600" cy="1325563"/>
+          </a:xfrm>
+        </p:spPr>
+        <p:txBody>
+          <a:bodyPr>
+            <a:normAutofit/>
+          </a:bodyPr>
+          <a:lstStyle/>
+          <a:p>
+            <a:r>
+              <a:rPr lang="pt-BR" sz="2800" b="1" dirty="0">
+                <a:latin typeface="+mn-lt"/>
+              </a:rPr>
+              <a:t>Resultados</a:t>
+            </a:r>
+          </a:p>
+        </p:txBody>
+      </p:sp>
+      <p:pic>
+        <p:nvPicPr>
+          <p:cNvPr id="3" name="Imagem 2">
+            <a:extLst>
+              <a:ext uri="{FF2B5EF4-FFF2-40B4-BE49-F238E27FC236}">
+                <a16:creationId xmlns:a16="http://schemas.microsoft.com/office/drawing/2014/main" id="{2C717BB6-ECB5-EA1C-397D-9005A4D4B586}"/>
+              </a:ext>
+            </a:extLst>
+          </p:cNvPr>
+          <p:cNvPicPr>
+            <a:picLocks noChangeAspect="1"/>
+          </p:cNvPicPr>
+          <p:nvPr/>
+        </p:nvPicPr>
+        <p:blipFill>
+          <a:blip r:embed="rId4">
+            <a:extLst>
+              <a:ext uri="{28A0092B-C50C-407E-A947-70E740481C1C}">
+                <a14:useLocalDpi xmlns:a14="http://schemas.microsoft.com/office/drawing/2010/main" val="0"/>
+              </a:ext>
+            </a:extLst>
+          </a:blip>
+          <a:stretch>
+            <a:fillRect/>
+          </a:stretch>
+        </p:blipFill>
+        <p:spPr>
+          <a:xfrm>
+            <a:off x="2053516" y="1509372"/>
+            <a:ext cx="8968021" cy="5231346"/>
+          </a:xfrm>
+          <a:prstGeom prst="rect">
+            <a:avLst/>
+          </a:prstGeom>
+        </p:spPr>
+      </p:pic>
+    </p:spTree>
+    <p:extLst>
+      <p:ext uri="{BB962C8B-B14F-4D97-AF65-F5344CB8AC3E}">
+        <p14:creationId xmlns:p14="http://schemas.microsoft.com/office/powerpoint/2010/main" val="2996263216"/>
+      </p:ext>
+    </p:extLst>
+  </p:cSld>
+  <p:clrMapOvr>
+    <a:masterClrMapping/>
+  </p:clrMapOvr>
+</p:sld>
+</file>
+
+<file path=ppt/slides/slide6.xml><?xml version="1.0" encoding="utf-8"?>
+<p:sld xmlns:a="http://schemas.openxmlformats.org/drawingml/2006/main" xmlns:r="http://schemas.openxmlformats.org/officeDocument/2006/relationships" xmlns:p="http://schemas.openxmlformats.org/presentationml/2006/main">
+  <p:cSld>
+    <p:spTree>
+      <p:nvGrpSpPr>
+        <p:cNvPr id="1" name="">
+          <a:extLst>
+            <a:ext uri="{FF2B5EF4-FFF2-40B4-BE49-F238E27FC236}">
               <a16:creationId xmlns:a16="http://schemas.microsoft.com/office/drawing/2014/main" id="{D492F274-7D61-FEA2-F730-B29648AFA5A2}"/>
             </a:ext>
           </a:extLst>
@@ -9525,7 +9943,7 @@
 </p:sld>
 </file>
 
-<file path=ppt/slides/slide6.xml><?xml version="1.0" encoding="utf-8"?>
+<file path=ppt/slides/slide7.xml><?xml version="1.0" encoding="utf-8"?>
 <p:sld xmlns:a="http://schemas.openxmlformats.org/drawingml/2006/main" xmlns:r="http://schemas.openxmlformats.org/officeDocument/2006/relationships" xmlns:p="http://schemas.openxmlformats.org/presentationml/2006/main">
   <p:cSld>
     <p:spTree>
@@ -9791,7 +10209,7 @@
 </p:sld>
 </file>
 
-<file path=ppt/slides/slide7.xml><?xml version="1.0" encoding="utf-8"?>
+<file path=ppt/slides/slide8.xml><?xml version="1.0" encoding="utf-8"?>
 <p:sld xmlns:a="http://schemas.openxmlformats.org/drawingml/2006/main" xmlns:r="http://schemas.openxmlformats.org/officeDocument/2006/relationships" xmlns:p="http://schemas.openxmlformats.org/presentationml/2006/main">
   <p:cSld>
     <p:spTree>
@@ -10057,7 +10475,7 @@
 </p:sld>
 </file>
 
-<file path=ppt/slides/slide8.xml><?xml version="1.0" encoding="utf-8"?>
+<file path=ppt/slides/slide9.xml><?xml version="1.0" encoding="utf-8"?>
 <p:sld xmlns:a="http://schemas.openxmlformats.org/drawingml/2006/main" xmlns:r="http://schemas.openxmlformats.org/officeDocument/2006/relationships" xmlns:p="http://schemas.openxmlformats.org/presentationml/2006/main">
   <p:cSld>
     <p:spTree>
@@ -10623,540 +11041,6 @@
     <p:extLst>
       <p:ext uri="{BB962C8B-B14F-4D97-AF65-F5344CB8AC3E}">
         <p14:creationId xmlns:p14="http://schemas.microsoft.com/office/powerpoint/2010/main" val="3209490412"/>
-      </p:ext>
-    </p:extLst>
-  </p:cSld>
-  <p:clrMapOvr>
-    <a:masterClrMapping/>
-  </p:clrMapOvr>
-</p:sld>
-</file>
-
-<file path=ppt/slides/slide9.xml><?xml version="1.0" encoding="utf-8"?>
-<p:sld xmlns:a="http://schemas.openxmlformats.org/drawingml/2006/main" xmlns:r="http://schemas.openxmlformats.org/officeDocument/2006/relationships" xmlns:p="http://schemas.openxmlformats.org/presentationml/2006/main">
-  <p:cSld>
-    <p:spTree>
-      <p:nvGrpSpPr>
-        <p:cNvPr id="1" name="">
-          <a:extLst>
-            <a:ext uri="{FF2B5EF4-FFF2-40B4-BE49-F238E27FC236}">
-              <a16:creationId xmlns:a16="http://schemas.microsoft.com/office/drawing/2014/main" id="{E164B671-FC38-2847-0962-11B4314CAE5D}"/>
-            </a:ext>
-          </a:extLst>
-        </p:cNvPr>
-        <p:cNvGrpSpPr/>
-        <p:nvPr/>
-      </p:nvGrpSpPr>
-      <p:grpSpPr>
-        <a:xfrm>
-          <a:off x="0" y="0"/>
-          <a:ext cx="0" cy="0"/>
-          <a:chOff x="0" y="0"/>
-          <a:chExt cx="0" cy="0"/>
-        </a:xfrm>
-      </p:grpSpPr>
-      <p:pic>
-        <p:nvPicPr>
-          <p:cNvPr id="5" name="Imagem 4">
-            <a:extLst>
-              <a:ext uri="{FF2B5EF4-FFF2-40B4-BE49-F238E27FC236}">
-                <a16:creationId xmlns:a16="http://schemas.microsoft.com/office/drawing/2014/main" id="{14A210E9-96BE-6AEF-888F-BC27D770B970}"/>
-              </a:ext>
-            </a:extLst>
-          </p:cNvPr>
-          <p:cNvPicPr>
-            <a:picLocks noChangeAspect="1"/>
-          </p:cNvPicPr>
-          <p:nvPr/>
-        </p:nvPicPr>
-        <p:blipFill>
-          <a:blip r:embed="rId2"/>
-          <a:stretch>
-            <a:fillRect/>
-          </a:stretch>
-        </p:blipFill>
-        <p:spPr>
-          <a:xfrm>
-            <a:off x="0" y="0"/>
-            <a:ext cx="12192000" cy="1398060"/>
-          </a:xfrm>
-          <a:prstGeom prst="rect">
-            <a:avLst/>
-          </a:prstGeom>
-        </p:spPr>
-      </p:pic>
-      <p:grpSp>
-        <p:nvGrpSpPr>
-          <p:cNvPr id="10" name="Agrupar 9">
-            <a:extLst>
-              <a:ext uri="{FF2B5EF4-FFF2-40B4-BE49-F238E27FC236}">
-                <a16:creationId xmlns:a16="http://schemas.microsoft.com/office/drawing/2014/main" id="{6B17D0A5-FA6E-7612-F4EA-B08B6E431FA9}"/>
-              </a:ext>
-            </a:extLst>
-          </p:cNvPr>
-          <p:cNvGrpSpPr/>
-          <p:nvPr/>
-        </p:nvGrpSpPr>
-        <p:grpSpPr>
-          <a:xfrm>
-            <a:off x="4739781" y="3585812"/>
-            <a:ext cx="7452219" cy="3272188"/>
-            <a:chOff x="4739781" y="3585812"/>
-            <a:chExt cx="7452219" cy="3272188"/>
-          </a:xfrm>
-        </p:grpSpPr>
-        <p:pic>
-          <p:nvPicPr>
-            <p:cNvPr id="7" name="Imagem 6">
-              <a:extLst>
-                <a:ext uri="{FF2B5EF4-FFF2-40B4-BE49-F238E27FC236}">
-                  <a16:creationId xmlns:a16="http://schemas.microsoft.com/office/drawing/2014/main" id="{C0A576E9-D595-470C-A40E-2194D8494497}"/>
-                </a:ext>
-              </a:extLst>
-            </p:cNvPr>
-            <p:cNvPicPr>
-              <a:picLocks noChangeAspect="1"/>
-            </p:cNvPicPr>
-            <p:nvPr/>
-          </p:nvPicPr>
-          <p:blipFill>
-            <a:blip r:embed="rId3"/>
-            <a:stretch>
-              <a:fillRect/>
-            </a:stretch>
-          </p:blipFill>
-          <p:spPr>
-            <a:xfrm>
-              <a:off x="5492514" y="4013377"/>
-              <a:ext cx="6699486" cy="2844623"/>
-            </a:xfrm>
-            <a:prstGeom prst="rect">
-              <a:avLst/>
-            </a:prstGeom>
-            <a:effectLst>
-              <a:outerShdw blurRad="50800" dist="50800" dir="5400000" algn="ctr" rotWithShape="0">
-                <a:srgbClr val="000000"/>
-              </a:outerShdw>
-            </a:effectLst>
-          </p:spPr>
-        </p:pic>
-        <p:sp>
-          <p:nvSpPr>
-            <p:cNvPr id="8" name="Retângulo 7">
-              <a:extLst>
-                <a:ext uri="{FF2B5EF4-FFF2-40B4-BE49-F238E27FC236}">
-                  <a16:creationId xmlns:a16="http://schemas.microsoft.com/office/drawing/2014/main" id="{6330B5B5-14A9-566F-3454-C956FFC60E8C}"/>
-                </a:ext>
-              </a:extLst>
-            </p:cNvPr>
-            <p:cNvSpPr/>
-            <p:nvPr/>
-          </p:nvSpPr>
-          <p:spPr>
-            <a:xfrm>
-              <a:off x="4739781" y="4013377"/>
-              <a:ext cx="1104550" cy="2844623"/>
-            </a:xfrm>
-            <a:prstGeom prst="rect">
-              <a:avLst/>
-            </a:prstGeom>
-            <a:solidFill>
-              <a:schemeClr val="bg1"/>
-            </a:solidFill>
-            <a:ln>
-              <a:solidFill>
-                <a:schemeClr val="bg1"/>
-              </a:solidFill>
-            </a:ln>
-          </p:spPr>
-          <p:style>
-            <a:lnRef idx="2">
-              <a:schemeClr val="accent1">
-                <a:shade val="15000"/>
-              </a:schemeClr>
-            </a:lnRef>
-            <a:fillRef idx="1">
-              <a:schemeClr val="accent1"/>
-            </a:fillRef>
-            <a:effectRef idx="0">
-              <a:schemeClr val="accent1"/>
-            </a:effectRef>
-            <a:fontRef idx="minor">
-              <a:schemeClr val="lt1"/>
-            </a:fontRef>
-          </p:style>
-          <p:txBody>
-            <a:bodyPr rtlCol="0" anchor="ctr"/>
-            <a:lstStyle/>
-            <a:p>
-              <a:pPr algn="ctr"/>
-              <a:endParaRPr lang="pt-BR"/>
-            </a:p>
-          </p:txBody>
-        </p:sp>
-        <p:sp>
-          <p:nvSpPr>
-            <p:cNvPr id="9" name="Retângulo 8">
-              <a:extLst>
-                <a:ext uri="{FF2B5EF4-FFF2-40B4-BE49-F238E27FC236}">
-                  <a16:creationId xmlns:a16="http://schemas.microsoft.com/office/drawing/2014/main" id="{484C3208-5267-F20F-10D0-69E389B21B7E}"/>
-                </a:ext>
-              </a:extLst>
-            </p:cNvPr>
-            <p:cNvSpPr/>
-            <p:nvPr/>
-          </p:nvSpPr>
-          <p:spPr>
-            <a:xfrm>
-              <a:off x="5292056" y="3585812"/>
-              <a:ext cx="4453856" cy="1078467"/>
-            </a:xfrm>
-            <a:prstGeom prst="rect">
-              <a:avLst/>
-            </a:prstGeom>
-            <a:solidFill>
-              <a:schemeClr val="bg1"/>
-            </a:solidFill>
-            <a:ln>
-              <a:solidFill>
-                <a:schemeClr val="bg1"/>
-              </a:solidFill>
-            </a:ln>
-          </p:spPr>
-          <p:style>
-            <a:lnRef idx="2">
-              <a:schemeClr val="accent1">
-                <a:shade val="15000"/>
-              </a:schemeClr>
-            </a:lnRef>
-            <a:fillRef idx="1">
-              <a:schemeClr val="accent1"/>
-            </a:fillRef>
-            <a:effectRef idx="0">
-              <a:schemeClr val="accent1"/>
-            </a:effectRef>
-            <a:fontRef idx="minor">
-              <a:schemeClr val="lt1"/>
-            </a:fontRef>
-          </p:style>
-          <p:txBody>
-            <a:bodyPr rtlCol="0" anchor="ctr"/>
-            <a:lstStyle/>
-            <a:p>
-              <a:pPr algn="ctr"/>
-              <a:endParaRPr lang="pt-BR"/>
-            </a:p>
-          </p:txBody>
-        </p:sp>
-      </p:grpSp>
-      <p:sp>
-        <p:nvSpPr>
-          <p:cNvPr id="16" name="Título 1">
-            <a:extLst>
-              <a:ext uri="{FF2B5EF4-FFF2-40B4-BE49-F238E27FC236}">
-                <a16:creationId xmlns:a16="http://schemas.microsoft.com/office/drawing/2014/main" id="{3F1C265C-450B-E149-E6F1-8766C3132B27}"/>
-              </a:ext>
-            </a:extLst>
-          </p:cNvPr>
-          <p:cNvSpPr>
-            <a:spLocks noGrp="1"/>
-          </p:cNvSpPr>
-          <p:nvPr>
-            <p:ph type="title"/>
-          </p:nvPr>
-        </p:nvSpPr>
-        <p:spPr>
-          <a:xfrm>
-            <a:off x="474860" y="1162843"/>
-            <a:ext cx="10515600" cy="1325563"/>
-          </a:xfrm>
-        </p:spPr>
-        <p:txBody>
-          <a:bodyPr>
-            <a:normAutofit/>
-          </a:bodyPr>
-          <a:lstStyle/>
-          <a:p>
-            <a:r>
-              <a:rPr lang="pt-BR" sz="2800" b="1" dirty="0">
-                <a:latin typeface="+mn-lt"/>
-              </a:rPr>
-              <a:t>A Árvore BST e a Volatilidade Estrutural</a:t>
-            </a:r>
-          </a:p>
-        </p:txBody>
-      </p:sp>
-      <p:sp>
-        <p:nvSpPr>
-          <p:cNvPr id="13" name="Rectangle 1">
-            <a:extLst>
-              <a:ext uri="{FF2B5EF4-FFF2-40B4-BE49-F238E27FC236}">
-                <a16:creationId xmlns:a16="http://schemas.microsoft.com/office/drawing/2014/main" id="{379EF3F8-DAA6-B371-6726-DD0D059AD3EC}"/>
-              </a:ext>
-            </a:extLst>
-          </p:cNvPr>
-          <p:cNvSpPr>
-            <a:spLocks noGrp="1" noChangeArrowheads="1"/>
-          </p:cNvSpPr>
-          <p:nvPr>
-            <p:ph idx="1"/>
-          </p:nvPr>
-        </p:nvSpPr>
-        <p:spPr bwMode="auto">
-          <a:xfrm>
-            <a:off x="1075630" y="2382161"/>
-            <a:ext cx="10515600" cy="3262432"/>
-          </a:xfrm>
-          <a:prstGeom prst="rect">
-            <a:avLst/>
-          </a:prstGeom>
-          <a:noFill/>
-          <a:ln>
-            <a:noFill/>
-          </a:ln>
-          <a:effectLst/>
-          <a:extLst>
-            <a:ext uri="{909E8E84-426E-40DD-AFC4-6F175D3DCCD1}">
-              <a14:hiddenFill xmlns:a14="http://schemas.microsoft.com/office/drawing/2010/main">
-                <a:solidFill>
-                  <a:schemeClr val="accent1"/>
-                </a:solidFill>
-              </a14:hiddenFill>
-            </a:ext>
-            <a:ext uri="{91240B29-F687-4F45-9708-019B960494DF}">
-              <a14:hiddenLine xmlns:a14="http://schemas.microsoft.com/office/drawing/2010/main" w="9525">
-                <a:solidFill>
-                  <a:schemeClr val="tx1"/>
-                </a:solidFill>
-                <a:miter lim="800000"/>
-                <a:headEnd/>
-                <a:tailEnd/>
-              </a14:hiddenLine>
-            </a:ext>
-            <a:ext uri="{AF507438-7753-43E0-B8FC-AC1667EBCBE1}">
-              <a14:hiddenEffects xmlns:a14="http://schemas.microsoft.com/office/drawing/2010/main">
-                <a:effectLst>
-                  <a:outerShdw dist="35921" dir="2700000" algn="ctr" rotWithShape="0">
-                    <a:schemeClr val="bg2"/>
-                  </a:outerShdw>
-                </a:effectLst>
-              </a14:hiddenEffects>
-            </a:ext>
-          </a:extLst>
-        </p:spPr>
-        <p:txBody>
-          <a:bodyPr vert="horz" wrap="square" lIns="91440" tIns="45720" rIns="91440" bIns="45720" numCol="1" anchor="ctr" anchorCtr="0" compatLnSpc="1">
-            <a:prstTxWarp prst="textNoShape">
-              <a:avLst/>
-            </a:prstTxWarp>
-            <a:spAutoFit/>
-          </a:bodyPr>
-          <a:lstStyle/>
-          <a:p>
-            <a:pPr marL="0" indent="0" eaLnBrk="0" fontAlgn="base" hangingPunct="0">
-              <a:lnSpc>
-                <a:spcPct val="100000"/>
-              </a:lnSpc>
-              <a:spcBef>
-                <a:spcPct val="0"/>
-              </a:spcBef>
-              <a:spcAft>
-                <a:spcPct val="0"/>
-              </a:spcAft>
-              <a:buFontTx/>
-              <a:buChar char="•"/>
-            </a:pPr>
-            <a:r>
-              <a:rPr lang="pt-BR" altLang="pt-BR" sz="2400" b="1" dirty="0"/>
-              <a:t> Topologicamente vulnerável a entrada dos dados</a:t>
-            </a:r>
-          </a:p>
-          <a:p>
-            <a:pPr marL="0" indent="0" eaLnBrk="0" fontAlgn="base" hangingPunct="0">
-              <a:lnSpc>
-                <a:spcPct val="100000"/>
-              </a:lnSpc>
-              <a:spcBef>
-                <a:spcPct val="0"/>
-              </a:spcBef>
-              <a:spcAft>
-                <a:spcPct val="0"/>
-              </a:spcAft>
-              <a:buFontTx/>
-              <a:buChar char="•"/>
-            </a:pPr>
-            <a:endParaRPr lang="pt-BR" altLang="pt-BR" sz="2400" b="1" dirty="0"/>
-          </a:p>
-          <a:p>
-            <a:pPr marL="457200" lvl="1" indent="0" eaLnBrk="0" fontAlgn="base" hangingPunct="0">
-              <a:lnSpc>
-                <a:spcPct val="100000"/>
-              </a:lnSpc>
-              <a:spcBef>
-                <a:spcPct val="0"/>
-              </a:spcBef>
-              <a:spcAft>
-                <a:spcPct val="0"/>
-              </a:spcAft>
-              <a:buFontTx/>
-              <a:buChar char="•"/>
-            </a:pPr>
-            <a:r>
-              <a:rPr lang="pt-BR" altLang="pt-BR" sz="2000" b="1" dirty="0"/>
-              <a:t> Dados ordenados</a:t>
-            </a:r>
-          </a:p>
-          <a:p>
-            <a:pPr marL="914400" lvl="2" indent="0" eaLnBrk="0" fontAlgn="base" hangingPunct="0">
-              <a:lnSpc>
-                <a:spcPct val="100000"/>
-              </a:lnSpc>
-              <a:spcBef>
-                <a:spcPct val="0"/>
-              </a:spcBef>
-              <a:spcAft>
-                <a:spcPct val="0"/>
-              </a:spcAft>
-              <a:buFontTx/>
-              <a:buChar char="•"/>
-            </a:pPr>
-            <a:r>
-              <a:rPr lang="pt-BR" altLang="pt-BR" dirty="0"/>
-              <a:t> “Lista encadeada” - O(N)</a:t>
-            </a:r>
-          </a:p>
-          <a:p>
-            <a:pPr marL="457200" lvl="1" indent="0" eaLnBrk="0" fontAlgn="base" hangingPunct="0">
-              <a:lnSpc>
-                <a:spcPct val="100000"/>
-              </a:lnSpc>
-              <a:spcBef>
-                <a:spcPct val="0"/>
-              </a:spcBef>
-              <a:spcAft>
-                <a:spcPct val="0"/>
-              </a:spcAft>
-              <a:buFontTx/>
-              <a:buChar char="•"/>
-            </a:pPr>
-            <a:r>
-              <a:rPr lang="pt-BR" altLang="pt-BR" sz="2000" b="1" dirty="0"/>
-              <a:t> Dados aleatórios</a:t>
-            </a:r>
-          </a:p>
-          <a:p>
-            <a:pPr marL="914400" lvl="2" indent="0" eaLnBrk="0" fontAlgn="base" hangingPunct="0">
-              <a:lnSpc>
-                <a:spcPct val="100000"/>
-              </a:lnSpc>
-              <a:spcBef>
-                <a:spcPct val="0"/>
-              </a:spcBef>
-              <a:spcAft>
-                <a:spcPct val="0"/>
-              </a:spcAft>
-              <a:buFontTx/>
-              <a:buChar char="•"/>
-            </a:pPr>
-            <a:r>
-              <a:rPr lang="pt-BR" altLang="pt-BR" dirty="0"/>
-              <a:t> Árvore naturalmente balanceada</a:t>
-            </a:r>
-          </a:p>
-          <a:p>
-            <a:pPr marL="914400" lvl="2" indent="0" eaLnBrk="0" fontAlgn="base" hangingPunct="0">
-              <a:lnSpc>
-                <a:spcPct val="100000"/>
-              </a:lnSpc>
-              <a:spcBef>
-                <a:spcPct val="0"/>
-              </a:spcBef>
-              <a:spcAft>
-                <a:spcPct val="0"/>
-              </a:spcAft>
-              <a:buFontTx/>
-              <a:buChar char="•"/>
-            </a:pPr>
-            <a:r>
-              <a:rPr lang="pt-BR" altLang="pt-BR" dirty="0"/>
-              <a:t> Superou AVL no processamento sequencial</a:t>
-            </a:r>
-          </a:p>
-          <a:p>
-            <a:pPr marL="1371600" lvl="3" indent="0" eaLnBrk="0" fontAlgn="base" hangingPunct="0">
-              <a:lnSpc>
-                <a:spcPct val="100000"/>
-              </a:lnSpc>
-              <a:spcBef>
-                <a:spcPct val="0"/>
-              </a:spcBef>
-              <a:spcAft>
-                <a:spcPct val="0"/>
-              </a:spcAft>
-              <a:buFontTx/>
-              <a:buChar char="•"/>
-            </a:pPr>
-            <a:r>
-              <a:rPr lang="pt-BR" altLang="pt-BR" sz="2000" dirty="0"/>
-              <a:t>sem overhead de rotações automáticas</a:t>
-            </a:r>
-          </a:p>
-          <a:p>
-            <a:pPr marL="914400" lvl="2" indent="0" eaLnBrk="0" fontAlgn="base" hangingPunct="0">
-              <a:lnSpc>
-                <a:spcPct val="100000"/>
-              </a:lnSpc>
-              <a:spcBef>
-                <a:spcPct val="0"/>
-              </a:spcBef>
-              <a:spcAft>
-                <a:spcPct val="0"/>
-              </a:spcAft>
-              <a:buFontTx/>
-              <a:buChar char="•"/>
-            </a:pPr>
-            <a:endParaRPr kumimoji="0" lang="pt-BR" altLang="pt-BR" sz="1800" b="1" i="0" u="none" strike="noStrike" cap="none" normalizeH="0" baseline="0" dirty="0">
-              <a:ln>
-                <a:noFill/>
-              </a:ln>
-              <a:solidFill>
-                <a:schemeClr val="tx1"/>
-              </a:solidFill>
-              <a:effectLst/>
-              <a:latin typeface="Arial" panose="020B0604020202020204" pitchFamily="34" charset="0"/>
-            </a:endParaRPr>
-          </a:p>
-          <a:p>
-            <a:pPr marL="457200" lvl="1" indent="0" eaLnBrk="0" fontAlgn="base" hangingPunct="0">
-              <a:lnSpc>
-                <a:spcPct val="100000"/>
-              </a:lnSpc>
-              <a:spcBef>
-                <a:spcPct val="0"/>
-              </a:spcBef>
-              <a:spcAft>
-                <a:spcPct val="0"/>
-              </a:spcAft>
-              <a:buFontTx/>
-              <a:buAutoNum type="arabicPeriod"/>
-            </a:pPr>
-            <a:endParaRPr kumimoji="0" lang="pt-BR" altLang="pt-BR" sz="2000" b="0" i="0" u="none" strike="noStrike" cap="none" normalizeH="0" baseline="0" dirty="0">
-              <a:ln>
-                <a:noFill/>
-              </a:ln>
-              <a:solidFill>
-                <a:schemeClr val="tx1"/>
-              </a:solidFill>
-              <a:effectLst/>
-              <a:latin typeface="Google Sans Text"/>
-            </a:endParaRPr>
-          </a:p>
-        </p:txBody>
-      </p:sp>
-    </p:spTree>
-    <p:extLst>
-      <p:ext uri="{BB962C8B-B14F-4D97-AF65-F5344CB8AC3E}">
-        <p14:creationId xmlns:p14="http://schemas.microsoft.com/office/powerpoint/2010/main" val="3227322142"/>
       </p:ext>
     </p:extLst>
   </p:cSld>
